--- a/M4/GDV_2D_Gym/les3/gdv-2d-gym-les2.pptx
+++ b/M4/GDV_2D_Gym/les3/gdv-2d-gym-les2.pptx
@@ -6,15 +6,13 @@
   </p:sldMasterIdLst>
   <p:sldIdLst>
     <p:sldId id="256" r:id="rId5"/>
-    <p:sldId id="257" r:id="rId6"/>
-    <p:sldId id="259" r:id="rId7"/>
-    <p:sldId id="260" r:id="rId8"/>
-    <p:sldId id="267" r:id="rId9"/>
-    <p:sldId id="261" r:id="rId10"/>
-    <p:sldId id="258" r:id="rId11"/>
-    <p:sldId id="268" r:id="rId12"/>
-    <p:sldId id="270" r:id="rId13"/>
-    <p:sldId id="269" r:id="rId14"/>
+    <p:sldId id="260" r:id="rId6"/>
+    <p:sldId id="267" r:id="rId7"/>
+    <p:sldId id="268" r:id="rId8"/>
+    <p:sldId id="258" r:id="rId9"/>
+    <p:sldId id="269" r:id="rId10"/>
+    <p:sldId id="270" r:id="rId11"/>
+    <p:sldId id="261" r:id="rId12"/>
   </p:sldIdLst>
   <p:sldSz cx="12192000" cy="6858000"/>
   <p:notesSz cx="6858000" cy="9144000"/>
@@ -270,7 +268,7 @@
           <a:p>
             <a:fld id="{7F6255D4-ABB5-456D-9970-B21DD0297007}" type="datetimeFigureOut">
               <a:rPr lang="en-US" smtClean="0"/>
-              <a:t>5/12/2026</a:t>
+              <a:t>5/20/2026</a:t>
             </a:fld>
             <a:endParaRPr lang="en-US"/>
           </a:p>
@@ -470,7 +468,7 @@
           <a:p>
             <a:fld id="{7F6255D4-ABB5-456D-9970-B21DD0297007}" type="datetimeFigureOut">
               <a:rPr lang="en-US" smtClean="0"/>
-              <a:t>5/12/2026</a:t>
+              <a:t>5/20/2026</a:t>
             </a:fld>
             <a:endParaRPr lang="en-US"/>
           </a:p>
@@ -680,7 +678,7 @@
           <a:p>
             <a:fld id="{7F6255D4-ABB5-456D-9970-B21DD0297007}" type="datetimeFigureOut">
               <a:rPr lang="en-US" smtClean="0"/>
-              <a:t>5/12/2026</a:t>
+              <a:t>5/20/2026</a:t>
             </a:fld>
             <a:endParaRPr lang="en-US"/>
           </a:p>
@@ -880,7 +878,7 @@
           <a:p>
             <a:fld id="{7F6255D4-ABB5-456D-9970-B21DD0297007}" type="datetimeFigureOut">
               <a:rPr lang="en-US" smtClean="0"/>
-              <a:t>5/12/2026</a:t>
+              <a:t>5/20/2026</a:t>
             </a:fld>
             <a:endParaRPr lang="en-US"/>
           </a:p>
@@ -1156,7 +1154,7 @@
           <a:p>
             <a:fld id="{7F6255D4-ABB5-456D-9970-B21DD0297007}" type="datetimeFigureOut">
               <a:rPr lang="en-US" smtClean="0"/>
-              <a:t>5/12/2026</a:t>
+              <a:t>5/20/2026</a:t>
             </a:fld>
             <a:endParaRPr lang="en-US"/>
           </a:p>
@@ -1424,7 +1422,7 @@
           <a:p>
             <a:fld id="{7F6255D4-ABB5-456D-9970-B21DD0297007}" type="datetimeFigureOut">
               <a:rPr lang="en-US" smtClean="0"/>
-              <a:t>5/12/2026</a:t>
+              <a:t>5/20/2026</a:t>
             </a:fld>
             <a:endParaRPr lang="en-US"/>
           </a:p>
@@ -1839,7 +1837,7 @@
           <a:p>
             <a:fld id="{7F6255D4-ABB5-456D-9970-B21DD0297007}" type="datetimeFigureOut">
               <a:rPr lang="en-US" smtClean="0"/>
-              <a:t>5/12/2026</a:t>
+              <a:t>5/20/2026</a:t>
             </a:fld>
             <a:endParaRPr lang="en-US"/>
           </a:p>
@@ -1981,7 +1979,7 @@
           <a:p>
             <a:fld id="{7F6255D4-ABB5-456D-9970-B21DD0297007}" type="datetimeFigureOut">
               <a:rPr lang="en-US" smtClean="0"/>
-              <a:t>5/12/2026</a:t>
+              <a:t>5/20/2026</a:t>
             </a:fld>
             <a:endParaRPr lang="en-US"/>
           </a:p>
@@ -2094,7 +2092,7 @@
           <a:p>
             <a:fld id="{7F6255D4-ABB5-456D-9970-B21DD0297007}" type="datetimeFigureOut">
               <a:rPr lang="en-US" smtClean="0"/>
-              <a:t>5/12/2026</a:t>
+              <a:t>5/20/2026</a:t>
             </a:fld>
             <a:endParaRPr lang="en-US"/>
           </a:p>
@@ -2407,7 +2405,7 @@
           <a:p>
             <a:fld id="{7F6255D4-ABB5-456D-9970-B21DD0297007}" type="datetimeFigureOut">
               <a:rPr lang="en-US" smtClean="0"/>
-              <a:t>5/12/2026</a:t>
+              <a:t>5/20/2026</a:t>
             </a:fld>
             <a:endParaRPr lang="en-US"/>
           </a:p>
@@ -2696,7 +2694,7 @@
           <a:p>
             <a:fld id="{7F6255D4-ABB5-456D-9970-B21DD0297007}" type="datetimeFigureOut">
               <a:rPr lang="en-US" smtClean="0"/>
-              <a:t>5/12/2026</a:t>
+              <a:t>5/20/2026</a:t>
             </a:fld>
             <a:endParaRPr lang="en-US"/>
           </a:p>
@@ -2939,7 +2937,7 @@
           <a:p>
             <a:fld id="{7F6255D4-ABB5-456D-9970-B21DD0297007}" type="datetimeFigureOut">
               <a:rPr lang="en-US" smtClean="0"/>
-              <a:t>5/12/2026</a:t>
+              <a:t>5/20/2026</a:t>
             </a:fld>
             <a:endParaRPr lang="en-US"/>
           </a:p>
@@ -4212,1883 +4210,7 @@
 </p:sld>
 </file>
 
-<file path=ppt/slides/slide10.xml><?xml version="1.0" encoding="utf-8"?>
-<p:sld xmlns:a="http://schemas.openxmlformats.org/drawingml/2006/main" xmlns:r="http://schemas.openxmlformats.org/officeDocument/2006/relationships" xmlns:p="http://schemas.openxmlformats.org/presentationml/2006/main">
-  <p:cSld>
-    <p:spTree>
-      <p:nvGrpSpPr>
-        <p:cNvPr id="1" name=""/>
-        <p:cNvGrpSpPr/>
-        <p:nvPr/>
-      </p:nvGrpSpPr>
-      <p:grpSpPr>
-        <a:xfrm>
-          <a:off x="0" y="0"/>
-          <a:ext cx="0" cy="0"/>
-          <a:chOff x="0" y="0"/>
-          <a:chExt cx="0" cy="0"/>
-        </a:xfrm>
-      </p:grpSpPr>
-      <p:sp>
-        <p:nvSpPr>
-          <p:cNvPr id="2" name="Titel 1">
-            <a:extLst>
-              <a:ext uri="{FF2B5EF4-FFF2-40B4-BE49-F238E27FC236}">
-                <a16:creationId xmlns:a16="http://schemas.microsoft.com/office/drawing/2014/main" id="{FE45CA3E-C9D6-04E4-C92D-157A40F1CBB5}"/>
-              </a:ext>
-            </a:extLst>
-          </p:cNvPr>
-          <p:cNvSpPr>
-            <a:spLocks noGrp="1"/>
-          </p:cNvSpPr>
-          <p:nvPr>
-            <p:ph type="title"/>
-          </p:nvPr>
-        </p:nvSpPr>
-        <p:spPr/>
-        <p:txBody>
-          <a:bodyPr/>
-          <a:lstStyle/>
-          <a:p>
-            <a:endParaRPr lang="nl-NL"/>
-          </a:p>
-        </p:txBody>
-      </p:sp>
-      <p:sp>
-        <p:nvSpPr>
-          <p:cNvPr id="3" name="Tijdelijke aanduiding voor inhoud 2">
-            <a:extLst>
-              <a:ext uri="{FF2B5EF4-FFF2-40B4-BE49-F238E27FC236}">
-                <a16:creationId xmlns:a16="http://schemas.microsoft.com/office/drawing/2014/main" id="{662A7417-122E-94DF-F517-CEF372CF421F}"/>
-              </a:ext>
-            </a:extLst>
-          </p:cNvPr>
-          <p:cNvSpPr>
-            <a:spLocks noGrp="1"/>
-          </p:cNvSpPr>
-          <p:nvPr>
-            <p:ph idx="1"/>
-          </p:nvPr>
-        </p:nvSpPr>
-        <p:spPr/>
-        <p:txBody>
-          <a:bodyPr/>
-          <a:lstStyle/>
-          <a:p>
-            <a:endParaRPr lang="nl-NL"/>
-          </a:p>
-        </p:txBody>
-      </p:sp>
-    </p:spTree>
-    <p:extLst>
-      <p:ext uri="{BB962C8B-B14F-4D97-AF65-F5344CB8AC3E}">
-        <p14:creationId xmlns:p14="http://schemas.microsoft.com/office/powerpoint/2010/main" val="3861025813"/>
-      </p:ext>
-    </p:extLst>
-  </p:cSld>
-  <p:clrMapOvr>
-    <a:masterClrMapping/>
-  </p:clrMapOvr>
-</p:sld>
-</file>
-
 <file path=ppt/slides/slide2.xml><?xml version="1.0" encoding="utf-8"?>
-<p:sld xmlns:a="http://schemas.openxmlformats.org/drawingml/2006/main" xmlns:r="http://schemas.openxmlformats.org/officeDocument/2006/relationships" xmlns:p="http://schemas.openxmlformats.org/presentationml/2006/main">
-  <p:cSld>
-    <p:spTree>
-      <p:nvGrpSpPr>
-        <p:cNvPr id="1" name=""/>
-        <p:cNvGrpSpPr/>
-        <p:nvPr/>
-      </p:nvGrpSpPr>
-      <p:grpSpPr>
-        <a:xfrm>
-          <a:off x="0" y="0"/>
-          <a:ext cx="0" cy="0"/>
-          <a:chOff x="0" y="0"/>
-          <a:chExt cx="0" cy="0"/>
-        </a:xfrm>
-      </p:grpSpPr>
-      <p:sp>
-        <p:nvSpPr>
-          <p:cNvPr id="2" name="Titel 1">
-            <a:extLst>
-              <a:ext uri="{FF2B5EF4-FFF2-40B4-BE49-F238E27FC236}">
-                <a16:creationId xmlns:a16="http://schemas.microsoft.com/office/drawing/2014/main" id="{E1AFACB2-DA6C-BDD7-71E2-314506816300}"/>
-              </a:ext>
-            </a:extLst>
-          </p:cNvPr>
-          <p:cNvSpPr>
-            <a:spLocks noGrp="1"/>
-          </p:cNvSpPr>
-          <p:nvPr>
-            <p:ph type="title"/>
-          </p:nvPr>
-        </p:nvSpPr>
-        <p:spPr/>
-        <p:txBody>
-          <a:bodyPr/>
-          <a:lstStyle/>
-          <a:p>
-            <a:r>
-              <a:rPr lang="en-US" dirty="0" err="1"/>
-              <a:t>Gebruikte</a:t>
-            </a:r>
-            <a:r>
-              <a:rPr lang="en-US" dirty="0"/>
-              <a:t> termen</a:t>
-            </a:r>
-          </a:p>
-        </p:txBody>
-      </p:sp>
-      <p:grpSp>
-        <p:nvGrpSpPr>
-          <p:cNvPr id="26" name="Groep 25">
-            <a:extLst>
-              <a:ext uri="{FF2B5EF4-FFF2-40B4-BE49-F238E27FC236}">
-                <a16:creationId xmlns:a16="http://schemas.microsoft.com/office/drawing/2014/main" id="{692C2740-6E09-FE8D-A09F-FE27B192559F}"/>
-              </a:ext>
-            </a:extLst>
-          </p:cNvPr>
-          <p:cNvGrpSpPr/>
-          <p:nvPr/>
-        </p:nvGrpSpPr>
-        <p:grpSpPr>
-          <a:xfrm>
-            <a:off x="2671945" y="3529883"/>
-            <a:ext cx="2388389" cy="605693"/>
-            <a:chOff x="1160815" y="2247009"/>
-            <a:chExt cx="2388389" cy="605693"/>
-          </a:xfrm>
-        </p:grpSpPr>
-        <p:sp>
-          <p:nvSpPr>
-            <p:cNvPr id="4" name="Rechthoek 3">
-              <a:extLst>
-                <a:ext uri="{FF2B5EF4-FFF2-40B4-BE49-F238E27FC236}">
-                  <a16:creationId xmlns:a16="http://schemas.microsoft.com/office/drawing/2014/main" id="{3D7F51DA-0BDF-8AF6-37AB-630133EAE4A4}"/>
-                </a:ext>
-              </a:extLst>
-            </p:cNvPr>
-            <p:cNvSpPr/>
-            <p:nvPr/>
-          </p:nvSpPr>
-          <p:spPr>
-            <a:xfrm>
-              <a:off x="1160815" y="2248761"/>
-              <a:ext cx="301752" cy="301752"/>
-            </a:xfrm>
-            <a:prstGeom prst="rect">
-              <a:avLst/>
-            </a:prstGeom>
-            <a:solidFill>
-              <a:schemeClr val="bg1"/>
-            </a:solidFill>
-          </p:spPr>
-          <p:style>
-            <a:lnRef idx="2">
-              <a:schemeClr val="accent1">
-                <a:shade val="15000"/>
-              </a:schemeClr>
-            </a:lnRef>
-            <a:fillRef idx="1">
-              <a:schemeClr val="accent1"/>
-            </a:fillRef>
-            <a:effectRef idx="0">
-              <a:schemeClr val="accent1"/>
-            </a:effectRef>
-            <a:fontRef idx="minor">
-              <a:schemeClr val="lt1"/>
-            </a:fontRef>
-          </p:style>
-          <p:txBody>
-            <a:bodyPr rtlCol="0" anchor="ctr"/>
-            <a:lstStyle/>
-            <a:p>
-              <a:pPr algn="ctr"/>
-              <a:endParaRPr lang="en-US"/>
-            </a:p>
-          </p:txBody>
-        </p:sp>
-        <p:sp>
-          <p:nvSpPr>
-            <p:cNvPr id="5" name="Rechthoek 4">
-              <a:extLst>
-                <a:ext uri="{FF2B5EF4-FFF2-40B4-BE49-F238E27FC236}">
-                  <a16:creationId xmlns:a16="http://schemas.microsoft.com/office/drawing/2014/main" id="{E5D06084-9E44-40F2-2BE3-75FCA6C0B28A}"/>
-                </a:ext>
-              </a:extLst>
-            </p:cNvPr>
-            <p:cNvSpPr/>
-            <p:nvPr/>
-          </p:nvSpPr>
-          <p:spPr>
-            <a:xfrm>
-              <a:off x="1461805" y="2248761"/>
-              <a:ext cx="301752" cy="301752"/>
-            </a:xfrm>
-            <a:prstGeom prst="rect">
-              <a:avLst/>
-            </a:prstGeom>
-            <a:solidFill>
-              <a:schemeClr val="bg1">
-                <a:lumMod val="95000"/>
-              </a:schemeClr>
-            </a:solidFill>
-          </p:spPr>
-          <p:style>
-            <a:lnRef idx="2">
-              <a:schemeClr val="accent1">
-                <a:shade val="15000"/>
-              </a:schemeClr>
-            </a:lnRef>
-            <a:fillRef idx="1">
-              <a:schemeClr val="accent1"/>
-            </a:fillRef>
-            <a:effectRef idx="0">
-              <a:schemeClr val="accent1"/>
-            </a:effectRef>
-            <a:fontRef idx="minor">
-              <a:schemeClr val="lt1"/>
-            </a:fontRef>
-          </p:style>
-          <p:txBody>
-            <a:bodyPr rtlCol="0" anchor="ctr"/>
-            <a:lstStyle/>
-            <a:p>
-              <a:pPr algn="ctr"/>
-              <a:endParaRPr lang="en-US"/>
-            </a:p>
-          </p:txBody>
-        </p:sp>
-        <p:sp>
-          <p:nvSpPr>
-            <p:cNvPr id="6" name="Rechthoek 5">
-              <a:extLst>
-                <a:ext uri="{FF2B5EF4-FFF2-40B4-BE49-F238E27FC236}">
-                  <a16:creationId xmlns:a16="http://schemas.microsoft.com/office/drawing/2014/main" id="{2B414635-EA8B-13AB-4B72-675F7CBD5324}"/>
-                </a:ext>
-              </a:extLst>
-            </p:cNvPr>
-            <p:cNvSpPr/>
-            <p:nvPr/>
-          </p:nvSpPr>
-          <p:spPr>
-            <a:xfrm>
-              <a:off x="1763557" y="2248761"/>
-              <a:ext cx="301752" cy="301752"/>
-            </a:xfrm>
-            <a:prstGeom prst="rect">
-              <a:avLst/>
-            </a:prstGeom>
-            <a:solidFill>
-              <a:schemeClr val="bg1">
-                <a:lumMod val="85000"/>
-              </a:schemeClr>
-            </a:solidFill>
-          </p:spPr>
-          <p:style>
-            <a:lnRef idx="2">
-              <a:schemeClr val="accent1">
-                <a:shade val="15000"/>
-              </a:schemeClr>
-            </a:lnRef>
-            <a:fillRef idx="1">
-              <a:schemeClr val="accent1"/>
-            </a:fillRef>
-            <a:effectRef idx="0">
-              <a:schemeClr val="accent1"/>
-            </a:effectRef>
-            <a:fontRef idx="minor">
-              <a:schemeClr val="lt1"/>
-            </a:fontRef>
-          </p:style>
-          <p:txBody>
-            <a:bodyPr rtlCol="0" anchor="ctr"/>
-            <a:lstStyle/>
-            <a:p>
-              <a:pPr algn="ctr"/>
-              <a:endParaRPr lang="en-US"/>
-            </a:p>
-          </p:txBody>
-        </p:sp>
-        <p:sp>
-          <p:nvSpPr>
-            <p:cNvPr id="7" name="Rechthoek 6">
-              <a:extLst>
-                <a:ext uri="{FF2B5EF4-FFF2-40B4-BE49-F238E27FC236}">
-                  <a16:creationId xmlns:a16="http://schemas.microsoft.com/office/drawing/2014/main" id="{88274186-8DC8-E4C9-524E-402767E8A421}"/>
-                </a:ext>
-              </a:extLst>
-            </p:cNvPr>
-            <p:cNvSpPr/>
-            <p:nvPr/>
-          </p:nvSpPr>
-          <p:spPr>
-            <a:xfrm>
-              <a:off x="2051565" y="2248761"/>
-              <a:ext cx="301752" cy="301752"/>
-            </a:xfrm>
-            <a:prstGeom prst="rect">
-              <a:avLst/>
-            </a:prstGeom>
-            <a:solidFill>
-              <a:schemeClr val="bg1">
-                <a:lumMod val="75000"/>
-              </a:schemeClr>
-            </a:solidFill>
-          </p:spPr>
-          <p:style>
-            <a:lnRef idx="2">
-              <a:schemeClr val="accent1">
-                <a:shade val="15000"/>
-              </a:schemeClr>
-            </a:lnRef>
-            <a:fillRef idx="1">
-              <a:schemeClr val="accent1"/>
-            </a:fillRef>
-            <a:effectRef idx="0">
-              <a:schemeClr val="accent1"/>
-            </a:effectRef>
-            <a:fontRef idx="minor">
-              <a:schemeClr val="lt1"/>
-            </a:fontRef>
-          </p:style>
-          <p:txBody>
-            <a:bodyPr rtlCol="0" anchor="ctr"/>
-            <a:lstStyle/>
-            <a:p>
-              <a:pPr algn="ctr"/>
-              <a:endParaRPr lang="en-US"/>
-            </a:p>
-          </p:txBody>
-        </p:sp>
-        <p:sp>
-          <p:nvSpPr>
-            <p:cNvPr id="8" name="Rechthoek 7">
-              <a:extLst>
-                <a:ext uri="{FF2B5EF4-FFF2-40B4-BE49-F238E27FC236}">
-                  <a16:creationId xmlns:a16="http://schemas.microsoft.com/office/drawing/2014/main" id="{0B377830-B6F0-8DCF-03CD-0EBB6AD921E1}"/>
-                </a:ext>
-              </a:extLst>
-            </p:cNvPr>
-            <p:cNvSpPr/>
-            <p:nvPr/>
-          </p:nvSpPr>
-          <p:spPr>
-            <a:xfrm>
-              <a:off x="2353317" y="2247009"/>
-              <a:ext cx="301752" cy="301752"/>
-            </a:xfrm>
-            <a:prstGeom prst="rect">
-              <a:avLst/>
-            </a:prstGeom>
-            <a:solidFill>
-              <a:schemeClr val="bg1">
-                <a:lumMod val="65000"/>
-              </a:schemeClr>
-            </a:solidFill>
-          </p:spPr>
-          <p:style>
-            <a:lnRef idx="2">
-              <a:schemeClr val="accent1">
-                <a:shade val="15000"/>
-              </a:schemeClr>
-            </a:lnRef>
-            <a:fillRef idx="1">
-              <a:schemeClr val="accent1"/>
-            </a:fillRef>
-            <a:effectRef idx="0">
-              <a:schemeClr val="accent1"/>
-            </a:effectRef>
-            <a:fontRef idx="minor">
-              <a:schemeClr val="lt1"/>
-            </a:fontRef>
-          </p:style>
-          <p:txBody>
-            <a:bodyPr rtlCol="0" anchor="ctr"/>
-            <a:lstStyle/>
-            <a:p>
-              <a:pPr algn="ctr"/>
-              <a:endParaRPr lang="en-US"/>
-            </a:p>
-          </p:txBody>
-        </p:sp>
-        <p:sp>
-          <p:nvSpPr>
-            <p:cNvPr id="9" name="Rechthoek 8">
-              <a:extLst>
-                <a:ext uri="{FF2B5EF4-FFF2-40B4-BE49-F238E27FC236}">
-                  <a16:creationId xmlns:a16="http://schemas.microsoft.com/office/drawing/2014/main" id="{13550900-7AF9-81C7-38FA-35BE4B3F83B7}"/>
-                </a:ext>
-              </a:extLst>
-            </p:cNvPr>
-            <p:cNvSpPr/>
-            <p:nvPr/>
-          </p:nvSpPr>
-          <p:spPr>
-            <a:xfrm>
-              <a:off x="2655069" y="2247009"/>
-              <a:ext cx="301752" cy="301752"/>
-            </a:xfrm>
-            <a:prstGeom prst="rect">
-              <a:avLst/>
-            </a:prstGeom>
-            <a:solidFill>
-              <a:schemeClr val="bg1">
-                <a:lumMod val="50000"/>
-              </a:schemeClr>
-            </a:solidFill>
-          </p:spPr>
-          <p:style>
-            <a:lnRef idx="2">
-              <a:schemeClr val="accent1">
-                <a:shade val="15000"/>
-              </a:schemeClr>
-            </a:lnRef>
-            <a:fillRef idx="1">
-              <a:schemeClr val="accent1"/>
-            </a:fillRef>
-            <a:effectRef idx="0">
-              <a:schemeClr val="accent1"/>
-            </a:effectRef>
-            <a:fontRef idx="minor">
-              <a:schemeClr val="lt1"/>
-            </a:fontRef>
-          </p:style>
-          <p:txBody>
-            <a:bodyPr rtlCol="0" anchor="ctr"/>
-            <a:lstStyle/>
-            <a:p>
-              <a:pPr algn="ctr"/>
-              <a:endParaRPr lang="en-US"/>
-            </a:p>
-          </p:txBody>
-        </p:sp>
-        <p:sp>
-          <p:nvSpPr>
-            <p:cNvPr id="10" name="Rechthoek 9">
-              <a:extLst>
-                <a:ext uri="{FF2B5EF4-FFF2-40B4-BE49-F238E27FC236}">
-                  <a16:creationId xmlns:a16="http://schemas.microsoft.com/office/drawing/2014/main" id="{35B630B2-AD89-3F9C-6568-7AD944D7B30E}"/>
-                </a:ext>
-              </a:extLst>
-            </p:cNvPr>
-            <p:cNvSpPr/>
-            <p:nvPr/>
-          </p:nvSpPr>
-          <p:spPr>
-            <a:xfrm>
-              <a:off x="2943077" y="2247009"/>
-              <a:ext cx="301752" cy="301752"/>
-            </a:xfrm>
-            <a:prstGeom prst="rect">
-              <a:avLst/>
-            </a:prstGeom>
-            <a:solidFill>
-              <a:schemeClr val="bg2">
-                <a:lumMod val="90000"/>
-              </a:schemeClr>
-            </a:solidFill>
-          </p:spPr>
-          <p:style>
-            <a:lnRef idx="2">
-              <a:schemeClr val="accent1">
-                <a:shade val="15000"/>
-              </a:schemeClr>
-            </a:lnRef>
-            <a:fillRef idx="1">
-              <a:schemeClr val="accent1"/>
-            </a:fillRef>
-            <a:effectRef idx="0">
-              <a:schemeClr val="accent1"/>
-            </a:effectRef>
-            <a:fontRef idx="minor">
-              <a:schemeClr val="lt1"/>
-            </a:fontRef>
-          </p:style>
-          <p:txBody>
-            <a:bodyPr rtlCol="0" anchor="ctr"/>
-            <a:lstStyle/>
-            <a:p>
-              <a:pPr algn="ctr"/>
-              <a:endParaRPr lang="en-US"/>
-            </a:p>
-          </p:txBody>
-        </p:sp>
-        <p:sp>
-          <p:nvSpPr>
-            <p:cNvPr id="11" name="Rechthoek 10">
-              <a:extLst>
-                <a:ext uri="{FF2B5EF4-FFF2-40B4-BE49-F238E27FC236}">
-                  <a16:creationId xmlns:a16="http://schemas.microsoft.com/office/drawing/2014/main" id="{8FAF3625-8F65-2B18-1842-892C5319FBCD}"/>
-                </a:ext>
-              </a:extLst>
-            </p:cNvPr>
-            <p:cNvSpPr/>
-            <p:nvPr/>
-          </p:nvSpPr>
-          <p:spPr>
-            <a:xfrm>
-              <a:off x="3245547" y="2247009"/>
-              <a:ext cx="301752" cy="301752"/>
-            </a:xfrm>
-            <a:prstGeom prst="rect">
-              <a:avLst/>
-            </a:prstGeom>
-            <a:solidFill>
-              <a:schemeClr val="bg2"/>
-            </a:solidFill>
-          </p:spPr>
-          <p:style>
-            <a:lnRef idx="2">
-              <a:schemeClr val="accent1">
-                <a:shade val="15000"/>
-              </a:schemeClr>
-            </a:lnRef>
-            <a:fillRef idx="1">
-              <a:schemeClr val="accent1"/>
-            </a:fillRef>
-            <a:effectRef idx="0">
-              <a:schemeClr val="accent1"/>
-            </a:effectRef>
-            <a:fontRef idx="minor">
-              <a:schemeClr val="lt1"/>
-            </a:fontRef>
-          </p:style>
-          <p:txBody>
-            <a:bodyPr rtlCol="0" anchor="ctr"/>
-            <a:lstStyle/>
-            <a:p>
-              <a:pPr algn="ctr"/>
-              <a:endParaRPr lang="en-US"/>
-            </a:p>
-          </p:txBody>
-        </p:sp>
-        <p:sp>
-          <p:nvSpPr>
-            <p:cNvPr id="12" name="Rechthoek 11">
-              <a:extLst>
-                <a:ext uri="{FF2B5EF4-FFF2-40B4-BE49-F238E27FC236}">
-                  <a16:creationId xmlns:a16="http://schemas.microsoft.com/office/drawing/2014/main" id="{D4904885-8C13-8233-1FA6-F1FAEF8960F4}"/>
-                </a:ext>
-              </a:extLst>
-            </p:cNvPr>
-            <p:cNvSpPr/>
-            <p:nvPr/>
-          </p:nvSpPr>
-          <p:spPr>
-            <a:xfrm>
-              <a:off x="1160815" y="2550950"/>
-              <a:ext cx="301752" cy="301752"/>
-            </a:xfrm>
-            <a:prstGeom prst="rect">
-              <a:avLst/>
-            </a:prstGeom>
-            <a:solidFill>
-              <a:schemeClr val="bg2">
-                <a:lumMod val="25000"/>
-              </a:schemeClr>
-            </a:solidFill>
-          </p:spPr>
-          <p:style>
-            <a:lnRef idx="2">
-              <a:schemeClr val="accent1">
-                <a:shade val="15000"/>
-              </a:schemeClr>
-            </a:lnRef>
-            <a:fillRef idx="1">
-              <a:schemeClr val="accent1"/>
-            </a:fillRef>
-            <a:effectRef idx="0">
-              <a:schemeClr val="accent1"/>
-            </a:effectRef>
-            <a:fontRef idx="minor">
-              <a:schemeClr val="lt1"/>
-            </a:fontRef>
-          </p:style>
-          <p:txBody>
-            <a:bodyPr rtlCol="0" anchor="ctr"/>
-            <a:lstStyle/>
-            <a:p>
-              <a:pPr algn="ctr"/>
-              <a:endParaRPr lang="en-US"/>
-            </a:p>
-          </p:txBody>
-        </p:sp>
-        <p:sp>
-          <p:nvSpPr>
-            <p:cNvPr id="13" name="Rechthoek 12">
-              <a:extLst>
-                <a:ext uri="{FF2B5EF4-FFF2-40B4-BE49-F238E27FC236}">
-                  <a16:creationId xmlns:a16="http://schemas.microsoft.com/office/drawing/2014/main" id="{C5BD4AC2-48E5-FE4F-1B85-6EB533F9FE81}"/>
-                </a:ext>
-              </a:extLst>
-            </p:cNvPr>
-            <p:cNvSpPr/>
-            <p:nvPr/>
-          </p:nvSpPr>
-          <p:spPr>
-            <a:xfrm>
-              <a:off x="1461805" y="2550950"/>
-              <a:ext cx="301752" cy="301752"/>
-            </a:xfrm>
-            <a:prstGeom prst="rect">
-              <a:avLst/>
-            </a:prstGeom>
-            <a:solidFill>
-              <a:schemeClr val="bg2">
-                <a:lumMod val="10000"/>
-              </a:schemeClr>
-            </a:solidFill>
-          </p:spPr>
-          <p:style>
-            <a:lnRef idx="2">
-              <a:schemeClr val="accent1">
-                <a:shade val="15000"/>
-              </a:schemeClr>
-            </a:lnRef>
-            <a:fillRef idx="1">
-              <a:schemeClr val="accent1"/>
-            </a:fillRef>
-            <a:effectRef idx="0">
-              <a:schemeClr val="accent1"/>
-            </a:effectRef>
-            <a:fontRef idx="minor">
-              <a:schemeClr val="lt1"/>
-            </a:fontRef>
-          </p:style>
-          <p:txBody>
-            <a:bodyPr rtlCol="0" anchor="ctr"/>
-            <a:lstStyle/>
-            <a:p>
-              <a:pPr algn="ctr"/>
-              <a:endParaRPr lang="en-US"/>
-            </a:p>
-          </p:txBody>
-        </p:sp>
-        <p:sp>
-          <p:nvSpPr>
-            <p:cNvPr id="14" name="Rechthoek 13">
-              <a:extLst>
-                <a:ext uri="{FF2B5EF4-FFF2-40B4-BE49-F238E27FC236}">
-                  <a16:creationId xmlns:a16="http://schemas.microsoft.com/office/drawing/2014/main" id="{6C4F9075-E3DA-3E32-22F3-8C729E249E0A}"/>
-                </a:ext>
-              </a:extLst>
-            </p:cNvPr>
-            <p:cNvSpPr/>
-            <p:nvPr/>
-          </p:nvSpPr>
-          <p:spPr>
-            <a:xfrm>
-              <a:off x="1763557" y="2550950"/>
-              <a:ext cx="301752" cy="301752"/>
-            </a:xfrm>
-            <a:prstGeom prst="rect">
-              <a:avLst/>
-            </a:prstGeom>
-            <a:solidFill>
-              <a:schemeClr val="bg2">
-                <a:lumMod val="50000"/>
-              </a:schemeClr>
-            </a:solidFill>
-          </p:spPr>
-          <p:style>
-            <a:lnRef idx="2">
-              <a:schemeClr val="accent1">
-                <a:shade val="15000"/>
-              </a:schemeClr>
-            </a:lnRef>
-            <a:fillRef idx="1">
-              <a:schemeClr val="accent1"/>
-            </a:fillRef>
-            <a:effectRef idx="0">
-              <a:schemeClr val="accent1"/>
-            </a:effectRef>
-            <a:fontRef idx="minor">
-              <a:schemeClr val="lt1"/>
-            </a:fontRef>
-          </p:style>
-          <p:txBody>
-            <a:bodyPr rtlCol="0" anchor="ctr"/>
-            <a:lstStyle/>
-            <a:p>
-              <a:pPr algn="ctr"/>
-              <a:endParaRPr lang="en-US"/>
-            </a:p>
-          </p:txBody>
-        </p:sp>
-        <p:sp>
-          <p:nvSpPr>
-            <p:cNvPr id="15" name="Rechthoek 14">
-              <a:extLst>
-                <a:ext uri="{FF2B5EF4-FFF2-40B4-BE49-F238E27FC236}">
-                  <a16:creationId xmlns:a16="http://schemas.microsoft.com/office/drawing/2014/main" id="{4BE23436-7B74-FCCD-F8B6-AC078CDBF081}"/>
-                </a:ext>
-              </a:extLst>
-            </p:cNvPr>
-            <p:cNvSpPr/>
-            <p:nvPr/>
-          </p:nvSpPr>
-          <p:spPr>
-            <a:xfrm>
-              <a:off x="2051565" y="2550950"/>
-              <a:ext cx="301752" cy="301752"/>
-            </a:xfrm>
-            <a:prstGeom prst="rect">
-              <a:avLst/>
-            </a:prstGeom>
-            <a:solidFill>
-              <a:schemeClr val="tx1">
-                <a:lumMod val="85000"/>
-                <a:lumOff val="15000"/>
-              </a:schemeClr>
-            </a:solidFill>
-          </p:spPr>
-          <p:style>
-            <a:lnRef idx="2">
-              <a:schemeClr val="accent1">
-                <a:shade val="15000"/>
-              </a:schemeClr>
-            </a:lnRef>
-            <a:fillRef idx="1">
-              <a:schemeClr val="accent1"/>
-            </a:fillRef>
-            <a:effectRef idx="0">
-              <a:schemeClr val="accent1"/>
-            </a:effectRef>
-            <a:fontRef idx="minor">
-              <a:schemeClr val="lt1"/>
-            </a:fontRef>
-          </p:style>
-          <p:txBody>
-            <a:bodyPr rtlCol="0" anchor="ctr"/>
-            <a:lstStyle/>
-            <a:p>
-              <a:pPr algn="ctr"/>
-              <a:endParaRPr lang="en-US"/>
-            </a:p>
-          </p:txBody>
-        </p:sp>
-        <p:sp>
-          <p:nvSpPr>
-            <p:cNvPr id="16" name="Rechthoek 15">
-              <a:extLst>
-                <a:ext uri="{FF2B5EF4-FFF2-40B4-BE49-F238E27FC236}">
-                  <a16:creationId xmlns:a16="http://schemas.microsoft.com/office/drawing/2014/main" id="{707ED4D9-79B8-D961-C5DD-635AEBE843C0}"/>
-                </a:ext>
-              </a:extLst>
-            </p:cNvPr>
-            <p:cNvSpPr/>
-            <p:nvPr/>
-          </p:nvSpPr>
-          <p:spPr>
-            <a:xfrm>
-              <a:off x="2353317" y="2549198"/>
-              <a:ext cx="301752" cy="301752"/>
-            </a:xfrm>
-            <a:prstGeom prst="rect">
-              <a:avLst/>
-            </a:prstGeom>
-            <a:solidFill>
-              <a:schemeClr val="tx1">
-                <a:lumMod val="75000"/>
-                <a:lumOff val="25000"/>
-              </a:schemeClr>
-            </a:solidFill>
-          </p:spPr>
-          <p:style>
-            <a:lnRef idx="2">
-              <a:schemeClr val="accent1">
-                <a:shade val="15000"/>
-              </a:schemeClr>
-            </a:lnRef>
-            <a:fillRef idx="1">
-              <a:schemeClr val="accent1"/>
-            </a:fillRef>
-            <a:effectRef idx="0">
-              <a:schemeClr val="accent1"/>
-            </a:effectRef>
-            <a:fontRef idx="minor">
-              <a:schemeClr val="lt1"/>
-            </a:fontRef>
-          </p:style>
-          <p:txBody>
-            <a:bodyPr rtlCol="0" anchor="ctr"/>
-            <a:lstStyle/>
-            <a:p>
-              <a:pPr algn="ctr"/>
-              <a:endParaRPr lang="en-US"/>
-            </a:p>
-          </p:txBody>
-        </p:sp>
-        <p:sp>
-          <p:nvSpPr>
-            <p:cNvPr id="17" name="Rechthoek 16">
-              <a:extLst>
-                <a:ext uri="{FF2B5EF4-FFF2-40B4-BE49-F238E27FC236}">
-                  <a16:creationId xmlns:a16="http://schemas.microsoft.com/office/drawing/2014/main" id="{669B7264-6470-C013-C25E-3BE69B7361D5}"/>
-                </a:ext>
-              </a:extLst>
-            </p:cNvPr>
-            <p:cNvSpPr/>
-            <p:nvPr/>
-          </p:nvSpPr>
-          <p:spPr>
-            <a:xfrm>
-              <a:off x="2655069" y="2549198"/>
-              <a:ext cx="301752" cy="301752"/>
-            </a:xfrm>
-            <a:prstGeom prst="rect">
-              <a:avLst/>
-            </a:prstGeom>
-            <a:solidFill>
-              <a:schemeClr val="tx1">
-                <a:lumMod val="65000"/>
-                <a:lumOff val="35000"/>
-              </a:schemeClr>
-            </a:solidFill>
-          </p:spPr>
-          <p:style>
-            <a:lnRef idx="2">
-              <a:schemeClr val="accent1">
-                <a:shade val="15000"/>
-              </a:schemeClr>
-            </a:lnRef>
-            <a:fillRef idx="1">
-              <a:schemeClr val="accent1"/>
-            </a:fillRef>
-            <a:effectRef idx="0">
-              <a:schemeClr val="accent1"/>
-            </a:effectRef>
-            <a:fontRef idx="minor">
-              <a:schemeClr val="lt1"/>
-            </a:fontRef>
-          </p:style>
-          <p:txBody>
-            <a:bodyPr rtlCol="0" anchor="ctr"/>
-            <a:lstStyle/>
-            <a:p>
-              <a:pPr algn="ctr"/>
-              <a:endParaRPr lang="en-US"/>
-            </a:p>
-          </p:txBody>
-        </p:sp>
-        <p:sp>
-          <p:nvSpPr>
-            <p:cNvPr id="18" name="Rechthoek 17">
-              <a:extLst>
-                <a:ext uri="{FF2B5EF4-FFF2-40B4-BE49-F238E27FC236}">
-                  <a16:creationId xmlns:a16="http://schemas.microsoft.com/office/drawing/2014/main" id="{BC1B9FE4-8C78-634A-C87F-5EF27F9CBB87}"/>
-                </a:ext>
-              </a:extLst>
-            </p:cNvPr>
-            <p:cNvSpPr/>
-            <p:nvPr/>
-          </p:nvSpPr>
-          <p:spPr>
-            <a:xfrm>
-              <a:off x="2943077" y="2549198"/>
-              <a:ext cx="301752" cy="301752"/>
-            </a:xfrm>
-            <a:prstGeom prst="rect">
-              <a:avLst/>
-            </a:prstGeom>
-            <a:solidFill>
-              <a:schemeClr val="tx1">
-                <a:lumMod val="50000"/>
-                <a:lumOff val="50000"/>
-              </a:schemeClr>
-            </a:solidFill>
-          </p:spPr>
-          <p:style>
-            <a:lnRef idx="2">
-              <a:schemeClr val="accent1">
-                <a:shade val="15000"/>
-              </a:schemeClr>
-            </a:lnRef>
-            <a:fillRef idx="1">
-              <a:schemeClr val="accent1"/>
-            </a:fillRef>
-            <a:effectRef idx="0">
-              <a:schemeClr val="accent1"/>
-            </a:effectRef>
-            <a:fontRef idx="minor">
-              <a:schemeClr val="lt1"/>
-            </a:fontRef>
-          </p:style>
-          <p:txBody>
-            <a:bodyPr rtlCol="0" anchor="ctr"/>
-            <a:lstStyle/>
-            <a:p>
-              <a:pPr algn="ctr"/>
-              <a:endParaRPr lang="en-US"/>
-            </a:p>
-          </p:txBody>
-        </p:sp>
-        <p:sp>
-          <p:nvSpPr>
-            <p:cNvPr id="19" name="Rechthoek 18">
-              <a:extLst>
-                <a:ext uri="{FF2B5EF4-FFF2-40B4-BE49-F238E27FC236}">
-                  <a16:creationId xmlns:a16="http://schemas.microsoft.com/office/drawing/2014/main" id="{55388109-F9EC-B7CF-D2E3-63679B7A8E78}"/>
-                </a:ext>
-              </a:extLst>
-            </p:cNvPr>
-            <p:cNvSpPr/>
-            <p:nvPr/>
-          </p:nvSpPr>
-          <p:spPr>
-            <a:xfrm>
-              <a:off x="3247452" y="2549198"/>
-              <a:ext cx="301752" cy="301752"/>
-            </a:xfrm>
-            <a:prstGeom prst="rect">
-              <a:avLst/>
-            </a:prstGeom>
-            <a:solidFill>
-              <a:schemeClr val="tx1"/>
-            </a:solidFill>
-            <a:ln>
-              <a:solidFill>
-                <a:srgbClr val="7030A0"/>
-              </a:solidFill>
-            </a:ln>
-          </p:spPr>
-          <p:style>
-            <a:lnRef idx="2">
-              <a:schemeClr val="accent1">
-                <a:shade val="15000"/>
-              </a:schemeClr>
-            </a:lnRef>
-            <a:fillRef idx="1">
-              <a:schemeClr val="accent1"/>
-            </a:fillRef>
-            <a:effectRef idx="0">
-              <a:schemeClr val="accent1"/>
-            </a:effectRef>
-            <a:fontRef idx="minor">
-              <a:schemeClr val="lt1"/>
-            </a:fontRef>
-          </p:style>
-          <p:txBody>
-            <a:bodyPr rtlCol="0" anchor="ctr"/>
-            <a:lstStyle/>
-            <a:p>
-              <a:pPr algn="ctr"/>
-              <a:endParaRPr lang="en-US"/>
-            </a:p>
-          </p:txBody>
-        </p:sp>
-      </p:grpSp>
-      <p:sp>
-        <p:nvSpPr>
-          <p:cNvPr id="21" name="Tekstvak 20">
-            <a:extLst>
-              <a:ext uri="{FF2B5EF4-FFF2-40B4-BE49-F238E27FC236}">
-                <a16:creationId xmlns:a16="http://schemas.microsoft.com/office/drawing/2014/main" id="{0654BD71-B84A-8ECC-62A1-0DD2C1F00147}"/>
-              </a:ext>
-            </a:extLst>
-          </p:cNvPr>
-          <p:cNvSpPr txBox="1"/>
-          <p:nvPr/>
-        </p:nvSpPr>
-        <p:spPr>
-          <a:xfrm>
-            <a:off x="3572422" y="4325073"/>
-            <a:ext cx="857927" cy="369332"/>
-          </a:xfrm>
-          <a:prstGeom prst="rect">
-            <a:avLst/>
-          </a:prstGeom>
-          <a:noFill/>
-        </p:spPr>
-        <p:txBody>
-          <a:bodyPr wrap="none" rtlCol="0">
-            <a:spAutoFit/>
-          </a:bodyPr>
-          <a:lstStyle/>
-          <a:p>
-            <a:r>
-              <a:rPr lang="en-US" dirty="0" err="1"/>
-              <a:t>Tileset</a:t>
-            </a:r>
-            <a:endParaRPr lang="nl-NL" dirty="0"/>
-          </a:p>
-        </p:txBody>
-      </p:sp>
-      <p:pic>
-        <p:nvPicPr>
-          <p:cNvPr id="1026" name="Picture 2" descr="Unity Tilemap | Unity Tutorial | NotSlot">
-            <a:extLst>
-              <a:ext uri="{FF2B5EF4-FFF2-40B4-BE49-F238E27FC236}">
-                <a16:creationId xmlns:a16="http://schemas.microsoft.com/office/drawing/2014/main" id="{43AEABFB-9FD5-086D-B9B0-9718A14C06F8}"/>
-              </a:ext>
-            </a:extLst>
-          </p:cNvPr>
-          <p:cNvPicPr>
-            <a:picLocks noChangeAspect="1" noChangeArrowheads="1"/>
-          </p:cNvPicPr>
-          <p:nvPr/>
-        </p:nvPicPr>
-        <p:blipFill>
-          <a:blip r:embed="rId2">
-            <a:extLst>
-              <a:ext uri="{28A0092B-C50C-407E-A947-70E740481C1C}">
-                <a14:useLocalDpi xmlns:a14="http://schemas.microsoft.com/office/drawing/2010/main" val="0"/>
-              </a:ext>
-            </a:extLst>
-          </a:blip>
-          <a:srcRect/>
-          <a:stretch>
-            <a:fillRect/>
-          </a:stretch>
-        </p:blipFill>
-        <p:spPr bwMode="auto">
-          <a:xfrm>
-            <a:off x="8869467" y="2532927"/>
-            <a:ext cx="2857500" cy="1600200"/>
-          </a:xfrm>
-          <a:prstGeom prst="rect">
-            <a:avLst/>
-          </a:prstGeom>
-          <a:noFill/>
-          <a:extLst>
-            <a:ext uri="{909E8E84-426E-40DD-AFC4-6F175D3DCCD1}">
-              <a14:hiddenFill xmlns:a14="http://schemas.microsoft.com/office/drawing/2010/main">
-                <a:solidFill>
-                  <a:srgbClr val="FFFFFF"/>
-                </a:solidFill>
-              </a14:hiddenFill>
-            </a:ext>
-          </a:extLst>
-        </p:spPr>
-      </p:pic>
-      <p:sp>
-        <p:nvSpPr>
-          <p:cNvPr id="22" name="Tekstvak 21">
-            <a:extLst>
-              <a:ext uri="{FF2B5EF4-FFF2-40B4-BE49-F238E27FC236}">
-                <a16:creationId xmlns:a16="http://schemas.microsoft.com/office/drawing/2014/main" id="{D2D6B2E7-0F62-2999-CF54-F65F2BD4336C}"/>
-              </a:ext>
-            </a:extLst>
-          </p:cNvPr>
-          <p:cNvSpPr txBox="1"/>
-          <p:nvPr/>
-        </p:nvSpPr>
-        <p:spPr>
-          <a:xfrm>
-            <a:off x="9807538" y="4325073"/>
-            <a:ext cx="981359" cy="369332"/>
-          </a:xfrm>
-          <a:prstGeom prst="rect">
-            <a:avLst/>
-          </a:prstGeom>
-          <a:noFill/>
-        </p:spPr>
-        <p:txBody>
-          <a:bodyPr wrap="none" rtlCol="0">
-            <a:spAutoFit/>
-          </a:bodyPr>
-          <a:lstStyle/>
-          <a:p>
-            <a:r>
-              <a:rPr lang="en-US" dirty="0" err="1"/>
-              <a:t>Tilemap</a:t>
-            </a:r>
-            <a:endParaRPr lang="nl-NL" dirty="0"/>
-          </a:p>
-        </p:txBody>
-      </p:sp>
-      <p:pic>
-        <p:nvPicPr>
-          <p:cNvPr id="1028" name="Picture 4" descr="Introduction to Tilemaps - Unity Learn">
-            <a:extLst>
-              <a:ext uri="{FF2B5EF4-FFF2-40B4-BE49-F238E27FC236}">
-                <a16:creationId xmlns:a16="http://schemas.microsoft.com/office/drawing/2014/main" id="{C675DF7F-0740-7EDB-A76F-820CD885E19F}"/>
-              </a:ext>
-            </a:extLst>
-          </p:cNvPr>
-          <p:cNvPicPr>
-            <a:picLocks noChangeAspect="1" noChangeArrowheads="1"/>
-          </p:cNvPicPr>
-          <p:nvPr/>
-        </p:nvPicPr>
-        <p:blipFill>
-          <a:blip r:embed="rId3">
-            <a:extLst>
-              <a:ext uri="{28A0092B-C50C-407E-A947-70E740481C1C}">
-                <a14:useLocalDpi xmlns:a14="http://schemas.microsoft.com/office/drawing/2010/main" val="0"/>
-              </a:ext>
-            </a:extLst>
-          </a:blip>
-          <a:srcRect/>
-          <a:stretch>
-            <a:fillRect/>
-          </a:stretch>
-        </p:blipFill>
-        <p:spPr bwMode="auto">
-          <a:xfrm>
-            <a:off x="5900442" y="1467482"/>
-            <a:ext cx="1714500" cy="2667000"/>
-          </a:xfrm>
-          <a:prstGeom prst="rect">
-            <a:avLst/>
-          </a:prstGeom>
-          <a:noFill/>
-          <a:extLst>
-            <a:ext uri="{909E8E84-426E-40DD-AFC4-6F175D3DCCD1}">
-              <a14:hiddenFill xmlns:a14="http://schemas.microsoft.com/office/drawing/2010/main">
-                <a:solidFill>
-                  <a:srgbClr val="FFFFFF"/>
-                </a:solidFill>
-              </a14:hiddenFill>
-            </a:ext>
-          </a:extLst>
-        </p:spPr>
-      </p:pic>
-      <p:sp>
-        <p:nvSpPr>
-          <p:cNvPr id="23" name="Tekstvak 22">
-            <a:extLst>
-              <a:ext uri="{FF2B5EF4-FFF2-40B4-BE49-F238E27FC236}">
-                <a16:creationId xmlns:a16="http://schemas.microsoft.com/office/drawing/2014/main" id="{E51EEAEE-DBA6-3D3D-4A73-7E980208A1A9}"/>
-              </a:ext>
-            </a:extLst>
-          </p:cNvPr>
-          <p:cNvSpPr txBox="1"/>
-          <p:nvPr/>
-        </p:nvSpPr>
-        <p:spPr>
-          <a:xfrm>
-            <a:off x="6118382" y="4325073"/>
-            <a:ext cx="1278620" cy="369332"/>
-          </a:xfrm>
-          <a:prstGeom prst="rect">
-            <a:avLst/>
-          </a:prstGeom>
-          <a:noFill/>
-        </p:spPr>
-        <p:txBody>
-          <a:bodyPr wrap="none" rtlCol="0">
-            <a:spAutoFit/>
-          </a:bodyPr>
-          <a:lstStyle/>
-          <a:p>
-            <a:r>
-              <a:rPr lang="en-US" dirty="0"/>
-              <a:t>Tile Palette</a:t>
-            </a:r>
-            <a:endParaRPr lang="nl-NL" dirty="0"/>
-          </a:p>
-        </p:txBody>
-      </p:sp>
-      <p:sp>
-        <p:nvSpPr>
-          <p:cNvPr id="24" name="Rechthoek 23">
-            <a:extLst>
-              <a:ext uri="{FF2B5EF4-FFF2-40B4-BE49-F238E27FC236}">
-                <a16:creationId xmlns:a16="http://schemas.microsoft.com/office/drawing/2014/main" id="{74CABFD4-BDFD-B882-8CA9-6F247858FA61}"/>
-              </a:ext>
-            </a:extLst>
-          </p:cNvPr>
-          <p:cNvSpPr/>
-          <p:nvPr/>
-        </p:nvSpPr>
-        <p:spPr>
-          <a:xfrm>
-            <a:off x="1302393" y="3832730"/>
-            <a:ext cx="301752" cy="301752"/>
-          </a:xfrm>
-          <a:prstGeom prst="rect">
-            <a:avLst/>
-          </a:prstGeom>
-          <a:solidFill>
-            <a:schemeClr val="bg1"/>
-          </a:solidFill>
-        </p:spPr>
-        <p:style>
-          <a:lnRef idx="2">
-            <a:schemeClr val="accent1">
-              <a:shade val="15000"/>
-            </a:schemeClr>
-          </a:lnRef>
-          <a:fillRef idx="1">
-            <a:schemeClr val="accent1"/>
-          </a:fillRef>
-          <a:effectRef idx="0">
-            <a:schemeClr val="accent1"/>
-          </a:effectRef>
-          <a:fontRef idx="minor">
-            <a:schemeClr val="lt1"/>
-          </a:fontRef>
-        </p:style>
-        <p:txBody>
-          <a:bodyPr rtlCol="0" anchor="ctr"/>
-          <a:lstStyle/>
-          <a:p>
-            <a:pPr algn="ctr"/>
-            <a:endParaRPr lang="en-US"/>
-          </a:p>
-        </p:txBody>
-      </p:sp>
-      <p:sp>
-        <p:nvSpPr>
-          <p:cNvPr id="25" name="Tekstvak 24">
-            <a:extLst>
-              <a:ext uri="{FF2B5EF4-FFF2-40B4-BE49-F238E27FC236}">
-                <a16:creationId xmlns:a16="http://schemas.microsoft.com/office/drawing/2014/main" id="{5A4FE018-0C5E-9B74-E2E3-9CCAFC6BBD9D}"/>
-              </a:ext>
-            </a:extLst>
-          </p:cNvPr>
-          <p:cNvSpPr txBox="1"/>
-          <p:nvPr/>
-        </p:nvSpPr>
-        <p:spPr>
-          <a:xfrm>
-            <a:off x="1187812" y="4325073"/>
-            <a:ext cx="530915" cy="369332"/>
-          </a:xfrm>
-          <a:prstGeom prst="rect">
-            <a:avLst/>
-          </a:prstGeom>
-          <a:noFill/>
-        </p:spPr>
-        <p:txBody>
-          <a:bodyPr wrap="none" rtlCol="0">
-            <a:spAutoFit/>
-          </a:bodyPr>
-          <a:lstStyle/>
-          <a:p>
-            <a:r>
-              <a:rPr lang="en-US" dirty="0"/>
-              <a:t>Tile</a:t>
-            </a:r>
-            <a:endParaRPr lang="nl-NL" dirty="0"/>
-          </a:p>
-        </p:txBody>
-      </p:sp>
-    </p:spTree>
-    <p:extLst>
-      <p:ext uri="{BB962C8B-B14F-4D97-AF65-F5344CB8AC3E}">
-        <p14:creationId xmlns:p14="http://schemas.microsoft.com/office/powerpoint/2010/main" val="4238619311"/>
-      </p:ext>
-    </p:extLst>
-  </p:cSld>
-  <p:clrMapOvr>
-    <a:masterClrMapping/>
-  </p:clrMapOvr>
-</p:sld>
-</file>
-
-<file path=ppt/slides/slide3.xml><?xml version="1.0" encoding="utf-8"?>
-<p:sld xmlns:a="http://schemas.openxmlformats.org/drawingml/2006/main" xmlns:r="http://schemas.openxmlformats.org/officeDocument/2006/relationships" xmlns:p="http://schemas.openxmlformats.org/presentationml/2006/main">
-  <p:cSld>
-    <p:bg>
-      <p:bgPr>
-        <a:solidFill>
-          <a:schemeClr val="bg1"/>
-        </a:solidFill>
-        <a:effectLst/>
-      </p:bgPr>
-    </p:bg>
-    <p:spTree>
-      <p:nvGrpSpPr>
-        <p:cNvPr id="1" name=""/>
-        <p:cNvGrpSpPr/>
-        <p:nvPr/>
-      </p:nvGrpSpPr>
-      <p:grpSpPr>
-        <a:xfrm>
-          <a:off x="0" y="0"/>
-          <a:ext cx="0" cy="0"/>
-          <a:chOff x="0" y="0"/>
-          <a:chExt cx="0" cy="0"/>
-        </a:xfrm>
-      </p:grpSpPr>
-      <p:sp useBgFill="1">
-        <p:nvSpPr>
-          <p:cNvPr id="11" name="Rectangle 10">
-            <a:extLst>
-              <a:ext uri="{FF2B5EF4-FFF2-40B4-BE49-F238E27FC236}">
-                <a16:creationId xmlns:a16="http://schemas.microsoft.com/office/drawing/2014/main" id="{8555C5B3-193A-4749-9AFD-682E53CDDE8F}"/>
-              </a:ext>
-              <a:ext uri="{C183D7F6-B498-43B3-948B-1728B52AA6E4}">
-                <adec:decorative xmlns:adec="http://schemas.microsoft.com/office/drawing/2017/decorative" val="1"/>
-              </a:ext>
-            </a:extLst>
-          </p:cNvPr>
-          <p:cNvSpPr>
-            <a:spLocks noGrp="1" noRot="1" noChangeAspect="1" noMove="1" noResize="1" noEditPoints="1" noAdjustHandles="1" noChangeArrowheads="1" noChangeShapeType="1" noTextEdit="1"/>
-          </p:cNvSpPr>
-          <p:nvPr>
-            <p:extLst>
-              <p:ext uri="{386F3935-93C4-4BCD-93E2-E3B085C9AB24}">
-                <p16:designElem xmlns:p16="http://schemas.microsoft.com/office/powerpoint/2015/main" val="1"/>
-              </p:ext>
-            </p:extLst>
-          </p:nvPr>
-        </p:nvSpPr>
-        <p:spPr>
-          <a:xfrm>
-            <a:off x="0" y="0"/>
-            <a:ext cx="12192000" cy="6858000"/>
-          </a:xfrm>
-          <a:prstGeom prst="rect">
-            <a:avLst/>
-          </a:prstGeom>
-          <a:ln w="12700" cap="flat" cmpd="sng" algn="ctr">
-            <a:noFill/>
-            <a:prstDash val="solid"/>
-            <a:miter lim="800000"/>
-          </a:ln>
-          <a:effectLst/>
-          <a:extLst>
-            <a:ext uri="{91240B29-F687-4F45-9708-019B960494DF}">
-              <a14:hiddenLine xmlns:a14="http://schemas.microsoft.com/office/drawing/2010/main" w="12700" cap="flat" cmpd="sng" algn="ctr">
-                <a:solidFill>
-                  <a:schemeClr val="accent1">
-                    <a:shade val="50000"/>
-                  </a:schemeClr>
-                </a:solidFill>
-                <a:prstDash val="solid"/>
-                <a:miter lim="800000"/>
-              </a14:hiddenLine>
-            </a:ext>
-          </a:extLst>
-        </p:spPr>
-        <p:style>
-          <a:lnRef idx="2">
-            <a:schemeClr val="accent1">
-              <a:shade val="50000"/>
-            </a:schemeClr>
-          </a:lnRef>
-          <a:fillRef idx="1">
-            <a:schemeClr val="accent1"/>
-          </a:fillRef>
-          <a:effectRef idx="0">
-            <a:schemeClr val="accent1"/>
-          </a:effectRef>
-          <a:fontRef idx="minor">
-            <a:schemeClr val="lt1"/>
-          </a:fontRef>
-        </p:style>
-        <p:txBody>
-          <a:bodyPr rtlCol="0" anchor="ctr"/>
-          <a:lstStyle/>
-          <a:p>
-            <a:pPr algn="ctr"/>
-            <a:endParaRPr lang="en-US" dirty="0"/>
-          </a:p>
-        </p:txBody>
-      </p:sp>
-      <p:sp>
-        <p:nvSpPr>
-          <p:cNvPr id="13" name="Rectangle 12">
-            <a:extLst>
-              <a:ext uri="{FF2B5EF4-FFF2-40B4-BE49-F238E27FC236}">
-                <a16:creationId xmlns:a16="http://schemas.microsoft.com/office/drawing/2014/main" id="{2EAE06A6-F76A-41C9-827A-C561B004485C}"/>
-              </a:ext>
-              <a:ext uri="{C183D7F6-B498-43B3-948B-1728B52AA6E4}">
-                <adec:decorative xmlns:adec="http://schemas.microsoft.com/office/drawing/2017/decorative" val="1"/>
-              </a:ext>
-            </a:extLst>
-          </p:cNvPr>
-          <p:cNvSpPr>
-            <a:spLocks noGrp="1" noRot="1" noChangeAspect="1" noMove="1" noResize="1" noEditPoints="1" noAdjustHandles="1" noChangeArrowheads="1" noChangeShapeType="1" noTextEdit="1"/>
-          </p:cNvSpPr>
-          <p:nvPr>
-            <p:extLst>
-              <p:ext uri="{386F3935-93C4-4BCD-93E2-E3B085C9AB24}">
-                <p16:designElem xmlns:p16="http://schemas.microsoft.com/office/powerpoint/2015/main" val="1"/>
-              </p:ext>
-            </p:extLst>
-          </p:nvPr>
-        </p:nvSpPr>
-        <p:spPr>
-          <a:xfrm flipH="1">
-            <a:off x="0" y="-3"/>
-            <a:ext cx="12192000" cy="6858000"/>
-          </a:xfrm>
-          <a:prstGeom prst="rect">
-            <a:avLst/>
-          </a:prstGeom>
-          <a:gradFill>
-            <a:gsLst>
-              <a:gs pos="0">
-                <a:srgbClr val="000000"/>
-              </a:gs>
-              <a:gs pos="100000">
-                <a:schemeClr val="accent1">
-                  <a:lumMod val="75000"/>
-                </a:schemeClr>
-              </a:gs>
-            </a:gsLst>
-            <a:lin ang="6600000" scaled="0"/>
-          </a:gradFill>
-          <a:ln>
-            <a:noFill/>
-          </a:ln>
-        </p:spPr>
-        <p:style>
-          <a:lnRef idx="2">
-            <a:schemeClr val="accent1">
-              <a:shade val="50000"/>
-            </a:schemeClr>
-          </a:lnRef>
-          <a:fillRef idx="1">
-            <a:schemeClr val="accent1"/>
-          </a:fillRef>
-          <a:effectRef idx="0">
-            <a:schemeClr val="accent1"/>
-          </a:effectRef>
-          <a:fontRef idx="minor">
-            <a:schemeClr val="lt1"/>
-          </a:fontRef>
-        </p:style>
-        <p:txBody>
-          <a:bodyPr rtlCol="0" anchor="ctr"/>
-          <a:lstStyle/>
-          <a:p>
-            <a:pPr algn="ctr"/>
-            <a:endParaRPr lang="en-US" dirty="0"/>
-          </a:p>
-        </p:txBody>
-      </p:sp>
-      <p:sp>
-        <p:nvSpPr>
-          <p:cNvPr id="15" name="Rectangle 14">
-            <a:extLst>
-              <a:ext uri="{FF2B5EF4-FFF2-40B4-BE49-F238E27FC236}">
-                <a16:creationId xmlns:a16="http://schemas.microsoft.com/office/drawing/2014/main" id="{89F9D4E8-0639-444B-949B-9518585061AF}"/>
-              </a:ext>
-              <a:ext uri="{C183D7F6-B498-43B3-948B-1728B52AA6E4}">
-                <adec:decorative xmlns:adec="http://schemas.microsoft.com/office/drawing/2017/decorative" val="1"/>
-              </a:ext>
-            </a:extLst>
-          </p:cNvPr>
-          <p:cNvSpPr>
-            <a:spLocks noGrp="1" noRot="1" noChangeAspect="1" noMove="1" noResize="1" noEditPoints="1" noAdjustHandles="1" noChangeArrowheads="1" noChangeShapeType="1" noTextEdit="1"/>
-          </p:cNvSpPr>
-          <p:nvPr>
-            <p:extLst>
-              <p:ext uri="{386F3935-93C4-4BCD-93E2-E3B085C9AB24}">
-                <p16:designElem xmlns:p16="http://schemas.microsoft.com/office/powerpoint/2015/main" val="1"/>
-              </p:ext>
-            </p:extLst>
-          </p:nvPr>
-        </p:nvSpPr>
-        <p:spPr>
-          <a:xfrm flipH="1">
-            <a:off x="480861" y="0"/>
-            <a:ext cx="7661934" cy="6858000"/>
-          </a:xfrm>
-          <a:prstGeom prst="rect">
-            <a:avLst/>
-          </a:prstGeom>
-          <a:gradFill>
-            <a:gsLst>
-              <a:gs pos="0">
-                <a:schemeClr val="accent1">
-                  <a:lumMod val="75000"/>
-                  <a:alpha val="45000"/>
-                </a:schemeClr>
-              </a:gs>
-              <a:gs pos="100000">
-                <a:srgbClr val="000000">
-                  <a:alpha val="29000"/>
-                </a:srgbClr>
-              </a:gs>
-            </a:gsLst>
-            <a:lin ang="12000000" scaled="0"/>
-          </a:gradFill>
-          <a:ln>
-            <a:noFill/>
-          </a:ln>
-        </p:spPr>
-        <p:style>
-          <a:lnRef idx="2">
-            <a:schemeClr val="accent1">
-              <a:shade val="50000"/>
-            </a:schemeClr>
-          </a:lnRef>
-          <a:fillRef idx="1">
-            <a:schemeClr val="accent1"/>
-          </a:fillRef>
-          <a:effectRef idx="0">
-            <a:schemeClr val="accent1"/>
-          </a:effectRef>
-          <a:fontRef idx="minor">
-            <a:schemeClr val="lt1"/>
-          </a:fontRef>
-        </p:style>
-        <p:txBody>
-          <a:bodyPr rtlCol="0" anchor="ctr"/>
-          <a:lstStyle/>
-          <a:p>
-            <a:pPr algn="ctr"/>
-            <a:endParaRPr lang="en-US" dirty="0"/>
-          </a:p>
-        </p:txBody>
-      </p:sp>
-      <p:sp>
-        <p:nvSpPr>
-          <p:cNvPr id="17" name="Rectangle 16">
-            <a:extLst>
-              <a:ext uri="{FF2B5EF4-FFF2-40B4-BE49-F238E27FC236}">
-                <a16:creationId xmlns:a16="http://schemas.microsoft.com/office/drawing/2014/main" id="{7E3DA7A2-ED70-4BBA-AB72-00AD461FA405}"/>
-              </a:ext>
-              <a:ext uri="{C183D7F6-B498-43B3-948B-1728B52AA6E4}">
-                <adec:decorative xmlns:adec="http://schemas.microsoft.com/office/drawing/2017/decorative" val="1"/>
-              </a:ext>
-            </a:extLst>
-          </p:cNvPr>
-          <p:cNvSpPr>
-            <a:spLocks noGrp="1" noRot="1" noChangeAspect="1" noMove="1" noResize="1" noEditPoints="1" noAdjustHandles="1" noChangeArrowheads="1" noChangeShapeType="1" noTextEdit="1"/>
-          </p:cNvSpPr>
-          <p:nvPr>
-            <p:extLst>
-              <p:ext uri="{386F3935-93C4-4BCD-93E2-E3B085C9AB24}">
-                <p16:designElem xmlns:p16="http://schemas.microsoft.com/office/powerpoint/2015/main" val="1"/>
-              </p:ext>
-            </p:extLst>
-          </p:nvPr>
-        </p:nvSpPr>
-        <p:spPr>
-          <a:xfrm rot="10800000" flipH="1">
-            <a:off x="480862" y="-6"/>
-            <a:ext cx="11711138" cy="6410334"/>
-          </a:xfrm>
-          <a:prstGeom prst="rect">
-            <a:avLst/>
-          </a:prstGeom>
-          <a:gradFill>
-            <a:gsLst>
-              <a:gs pos="0">
-                <a:schemeClr val="accent1">
-                  <a:alpha val="0"/>
-                </a:schemeClr>
-              </a:gs>
-              <a:gs pos="100000">
-                <a:srgbClr val="000000">
-                  <a:alpha val="41000"/>
-                </a:srgbClr>
-              </a:gs>
-            </a:gsLst>
-            <a:lin ang="18000000" scaled="0"/>
-          </a:gradFill>
-          <a:ln>
-            <a:noFill/>
-          </a:ln>
-        </p:spPr>
-        <p:style>
-          <a:lnRef idx="2">
-            <a:schemeClr val="accent1">
-              <a:shade val="50000"/>
-            </a:schemeClr>
-          </a:lnRef>
-          <a:fillRef idx="1">
-            <a:schemeClr val="accent1"/>
-          </a:fillRef>
-          <a:effectRef idx="0">
-            <a:schemeClr val="accent1"/>
-          </a:effectRef>
-          <a:fontRef idx="minor">
-            <a:schemeClr val="lt1"/>
-          </a:fontRef>
-        </p:style>
-        <p:txBody>
-          <a:bodyPr rtlCol="0" anchor="ctr"/>
-          <a:lstStyle/>
-          <a:p>
-            <a:pPr algn="ctr"/>
-            <a:endParaRPr lang="en-US" dirty="0"/>
-          </a:p>
-        </p:txBody>
-      </p:sp>
-      <p:sp>
-        <p:nvSpPr>
-          <p:cNvPr id="4" name="Titel 3">
-            <a:extLst>
-              <a:ext uri="{FF2B5EF4-FFF2-40B4-BE49-F238E27FC236}">
-                <a16:creationId xmlns:a16="http://schemas.microsoft.com/office/drawing/2014/main" id="{889A43D4-4D3C-1E05-E15E-4D5A7B1A7B7A}"/>
-              </a:ext>
-            </a:extLst>
-          </p:cNvPr>
-          <p:cNvSpPr>
-            <a:spLocks noGrp="1"/>
-          </p:cNvSpPr>
-          <p:nvPr>
-            <p:ph type="title"/>
-          </p:nvPr>
-        </p:nvSpPr>
-        <p:spPr>
-          <a:xfrm>
-            <a:off x="1127208" y="857251"/>
-            <a:ext cx="4747280" cy="3098061"/>
-          </a:xfrm>
-        </p:spPr>
-        <p:txBody>
-          <a:bodyPr vert="horz" lIns="91440" tIns="45720" rIns="91440" bIns="45720" rtlCol="0" anchor="b">
-            <a:normAutofit/>
-          </a:bodyPr>
-          <a:lstStyle/>
-          <a:p>
-            <a:r>
-              <a:rPr lang="en-US" sz="4800" kern="1200">
-                <a:solidFill>
-                  <a:srgbClr val="FFFFFF"/>
-                </a:solidFill>
-                <a:latin typeface="+mj-lt"/>
-                <a:ea typeface="+mj-ea"/>
-                <a:cs typeface="+mj-cs"/>
-              </a:rPr>
-              <a:t>De tilemap</a:t>
-            </a:r>
-          </a:p>
-        </p:txBody>
-      </p:sp>
-      <p:sp>
-        <p:nvSpPr>
-          <p:cNvPr id="19" name="Rectangle 18">
-            <a:extLst>
-              <a:ext uri="{FF2B5EF4-FFF2-40B4-BE49-F238E27FC236}">
-                <a16:creationId xmlns:a16="http://schemas.microsoft.com/office/drawing/2014/main" id="{FC485432-3647-4218-B5D3-15D3FA222B13}"/>
-              </a:ext>
-              <a:ext uri="{C183D7F6-B498-43B3-948B-1728B52AA6E4}">
-                <adec:decorative xmlns:adec="http://schemas.microsoft.com/office/drawing/2017/decorative" val="1"/>
-              </a:ext>
-            </a:extLst>
-          </p:cNvPr>
-          <p:cNvSpPr>
-            <a:spLocks noGrp="1" noRot="1" noChangeAspect="1" noMove="1" noResize="1" noEditPoints="1" noAdjustHandles="1" noChangeArrowheads="1" noChangeShapeType="1" noTextEdit="1"/>
-          </p:cNvSpPr>
-          <p:nvPr>
-            <p:extLst>
-              <p:ext uri="{386F3935-93C4-4BCD-93E2-E3B085C9AB24}">
-                <p16:designElem xmlns:p16="http://schemas.microsoft.com/office/powerpoint/2015/main" val="1"/>
-              </p:ext>
-            </p:extLst>
-          </p:nvPr>
-        </p:nvSpPr>
-        <p:spPr>
-          <a:xfrm rot="16200000">
-            <a:off x="4844797" y="-489206"/>
-            <a:ext cx="2502408" cy="12191998"/>
-          </a:xfrm>
-          <a:prstGeom prst="rect">
-            <a:avLst/>
-          </a:prstGeom>
-          <a:gradFill>
-            <a:gsLst>
-              <a:gs pos="0">
-                <a:schemeClr val="accent1">
-                  <a:alpha val="24000"/>
-                </a:schemeClr>
-              </a:gs>
-              <a:gs pos="78000">
-                <a:schemeClr val="accent1">
-                  <a:lumMod val="50000"/>
-                  <a:alpha val="0"/>
-                </a:schemeClr>
-              </a:gs>
-            </a:gsLst>
-            <a:lin ang="10200000" scaled="0"/>
-          </a:gradFill>
-          <a:ln>
-            <a:noFill/>
-          </a:ln>
-        </p:spPr>
-        <p:style>
-          <a:lnRef idx="2">
-            <a:schemeClr val="accent1">
-              <a:shade val="50000"/>
-            </a:schemeClr>
-          </a:lnRef>
-          <a:fillRef idx="1">
-            <a:schemeClr val="accent1"/>
-          </a:fillRef>
-          <a:effectRef idx="0">
-            <a:schemeClr val="accent1"/>
-          </a:effectRef>
-          <a:fontRef idx="minor">
-            <a:schemeClr val="lt1"/>
-          </a:fontRef>
-        </p:style>
-        <p:txBody>
-          <a:bodyPr rtlCol="0" anchor="ctr"/>
-          <a:lstStyle/>
-          <a:p>
-            <a:pPr algn="ctr"/>
-            <a:endParaRPr lang="en-US"/>
-          </a:p>
-        </p:txBody>
-      </p:sp>
-      <p:sp>
-        <p:nvSpPr>
-          <p:cNvPr id="5" name="Tijdelijke aanduiding voor tekst 4">
-            <a:extLst>
-              <a:ext uri="{FF2B5EF4-FFF2-40B4-BE49-F238E27FC236}">
-                <a16:creationId xmlns:a16="http://schemas.microsoft.com/office/drawing/2014/main" id="{29130633-EF9A-B9B3-1A1F-DFA039DD88D5}"/>
-              </a:ext>
-            </a:extLst>
-          </p:cNvPr>
-          <p:cNvSpPr>
-            <a:spLocks noGrp="1"/>
-          </p:cNvSpPr>
-          <p:nvPr>
-            <p:ph type="body" idx="1"/>
-          </p:nvPr>
-        </p:nvSpPr>
-        <p:spPr>
-          <a:xfrm>
-            <a:off x="1127208" y="4756265"/>
-            <a:ext cx="4393278" cy="1244483"/>
-          </a:xfrm>
-        </p:spPr>
-        <p:txBody>
-          <a:bodyPr vert="horz" lIns="91440" tIns="45720" rIns="91440" bIns="45720" rtlCol="0" anchor="t">
-            <a:normAutofit/>
-          </a:bodyPr>
-          <a:lstStyle/>
-          <a:p>
-            <a:r>
-              <a:rPr lang="en-US" kern="1200">
-                <a:solidFill>
-                  <a:srgbClr val="FFFFFF"/>
-                </a:solidFill>
-                <a:latin typeface="+mn-lt"/>
-                <a:ea typeface="+mn-ea"/>
-                <a:cs typeface="+mn-cs"/>
-              </a:rPr>
-              <a:t>Eigenschappen van de tilemap</a:t>
-            </a:r>
-          </a:p>
-        </p:txBody>
-      </p:sp>
-      <p:sp>
-        <p:nvSpPr>
-          <p:cNvPr id="21" name="Oval 20">
-            <a:extLst>
-              <a:ext uri="{FF2B5EF4-FFF2-40B4-BE49-F238E27FC236}">
-                <a16:creationId xmlns:a16="http://schemas.microsoft.com/office/drawing/2014/main" id="{F4AFDDCA-6ABA-4D23-8A5C-1BF0F4308148}"/>
-              </a:ext>
-              <a:ext uri="{C183D7F6-B498-43B3-948B-1728B52AA6E4}">
-                <adec:decorative xmlns:adec="http://schemas.microsoft.com/office/drawing/2017/decorative" val="1"/>
-              </a:ext>
-            </a:extLst>
-          </p:cNvPr>
-          <p:cNvSpPr>
-            <a:spLocks noGrp="1" noRot="1" noChangeAspect="1" noMove="1" noResize="1" noEditPoints="1" noAdjustHandles="1" noChangeArrowheads="1" noChangeShapeType="1" noTextEdit="1"/>
-          </p:cNvSpPr>
-          <p:nvPr>
-            <p:extLst>
-              <p:ext uri="{386F3935-93C4-4BCD-93E2-E3B085C9AB24}">
-                <p16:designElem xmlns:p16="http://schemas.microsoft.com/office/powerpoint/2015/main" val="1"/>
-              </p:ext>
-            </p:extLst>
-          </p:nvPr>
-        </p:nvSpPr>
-        <p:spPr>
-          <a:xfrm>
-            <a:off x="6390589" y="1062544"/>
-            <a:ext cx="4756162" cy="4756162"/>
-          </a:xfrm>
-          <a:prstGeom prst="ellipse">
-            <a:avLst/>
-          </a:prstGeom>
-          <a:solidFill>
-            <a:schemeClr val="bg1"/>
-          </a:solidFill>
-          <a:ln>
-            <a:noFill/>
-          </a:ln>
-        </p:spPr>
-        <p:style>
-          <a:lnRef idx="2">
-            <a:schemeClr val="accent1">
-              <a:shade val="50000"/>
-            </a:schemeClr>
-          </a:lnRef>
-          <a:fillRef idx="1">
-            <a:schemeClr val="accent1"/>
-          </a:fillRef>
-          <a:effectRef idx="0">
-            <a:schemeClr val="accent1"/>
-          </a:effectRef>
-          <a:fontRef idx="minor">
-            <a:schemeClr val="lt1"/>
-          </a:fontRef>
-        </p:style>
-        <p:txBody>
-          <a:bodyPr rtlCol="0" anchor="ctr"/>
-          <a:lstStyle/>
-          <a:p>
-            <a:pPr algn="ctr"/>
-            <a:endParaRPr lang="en-US"/>
-          </a:p>
-        </p:txBody>
-      </p:sp>
-      <p:pic>
-        <p:nvPicPr>
-          <p:cNvPr id="6" name="Picture 2" descr="Unity Tilemap | Unity Tutorial | NotSlot">
-            <a:extLst>
-              <a:ext uri="{FF2B5EF4-FFF2-40B4-BE49-F238E27FC236}">
-                <a16:creationId xmlns:a16="http://schemas.microsoft.com/office/drawing/2014/main" id="{EBC18240-EEA5-507E-2205-869626DA9B69}"/>
-              </a:ext>
-            </a:extLst>
-          </p:cNvPr>
-          <p:cNvPicPr>
-            <a:picLocks noChangeAspect="1" noChangeArrowheads="1"/>
-          </p:cNvPicPr>
-          <p:nvPr/>
-        </p:nvPicPr>
-        <p:blipFill>
-          <a:blip r:embed="rId2">
-            <a:extLst>
-              <a:ext uri="{28A0092B-C50C-407E-A947-70E740481C1C}">
-                <a14:useLocalDpi xmlns:a14="http://schemas.microsoft.com/office/drawing/2010/main" val="0"/>
-              </a:ext>
-            </a:extLst>
-          </a:blip>
-          <a:stretch>
-            <a:fillRect/>
-          </a:stretch>
-        </p:blipFill>
-        <p:spPr bwMode="auto">
-          <a:xfrm>
-            <a:off x="6920559" y="2389738"/>
-            <a:ext cx="3737164" cy="2092811"/>
-          </a:xfrm>
-          <a:prstGeom prst="rect">
-            <a:avLst/>
-          </a:prstGeom>
-          <a:noFill/>
-          <a:extLst>
-            <a:ext uri="{909E8E84-426E-40DD-AFC4-6F175D3DCCD1}">
-              <a14:hiddenFill xmlns:a14="http://schemas.microsoft.com/office/drawing/2010/main">
-                <a:solidFill>
-                  <a:srgbClr val="FFFFFF"/>
-                </a:solidFill>
-              </a14:hiddenFill>
-            </a:ext>
-          </a:extLst>
-        </p:spPr>
-      </p:pic>
-    </p:spTree>
-    <p:extLst>
-      <p:ext uri="{BB962C8B-B14F-4D97-AF65-F5344CB8AC3E}">
-        <p14:creationId xmlns:p14="http://schemas.microsoft.com/office/powerpoint/2010/main" val="256746609"/>
-      </p:ext>
-    </p:extLst>
-  </p:cSld>
-  <p:clrMapOvr>
-    <a:masterClrMapping/>
-  </p:clrMapOvr>
-</p:sld>
-</file>
-
-<file path=ppt/slides/slide4.xml><?xml version="1.0" encoding="utf-8"?>
 <p:sld xmlns:a="http://schemas.openxmlformats.org/drawingml/2006/main" xmlns:r="http://schemas.openxmlformats.org/officeDocument/2006/relationships" xmlns:p="http://schemas.openxmlformats.org/presentationml/2006/main">
   <p:cSld>
     <p:spTree>
@@ -6166,7 +4288,7 @@
 </p:sld>
 </file>
 
-<file path=ppt/slides/slide5.xml><?xml version="1.0" encoding="utf-8"?>
+<file path=ppt/slides/slide3.xml><?xml version="1.0" encoding="utf-8"?>
 <p:sld xmlns:a="http://schemas.openxmlformats.org/drawingml/2006/main" xmlns:r="http://schemas.openxmlformats.org/officeDocument/2006/relationships" xmlns:p="http://schemas.openxmlformats.org/presentationml/2006/main">
   <p:cSld>
     <p:spTree>
@@ -6484,7 +4606,7 @@
 </p:sld>
 </file>
 
-<file path=ppt/slides/slide6.xml><?xml version="1.0" encoding="utf-8"?>
+<file path=ppt/slides/slide4.xml><?xml version="1.0" encoding="utf-8"?>
 <p:sld xmlns:a="http://schemas.openxmlformats.org/drawingml/2006/main" xmlns:r="http://schemas.openxmlformats.org/officeDocument/2006/relationships" xmlns:p="http://schemas.openxmlformats.org/presentationml/2006/main">
   <p:cSld>
     <p:spTree>
@@ -6503,10 +4625,10 @@
       </p:grpSpPr>
       <p:sp>
         <p:nvSpPr>
-          <p:cNvPr id="2" name="Titel 1">
-            <a:extLst>
-              <a:ext uri="{FF2B5EF4-FFF2-40B4-BE49-F238E27FC236}">
-                <a16:creationId xmlns:a16="http://schemas.microsoft.com/office/drawing/2014/main" id="{2D27ED14-CDC6-93A9-CE11-A43635FE703F}"/>
+          <p:cNvPr id="4" name="Titel 3">
+            <a:extLst>
+              <a:ext uri="{FF2B5EF4-FFF2-40B4-BE49-F238E27FC236}">
+                <a16:creationId xmlns:a16="http://schemas.microsoft.com/office/drawing/2014/main" id="{D0E6194B-3C49-6719-D0E3-25D816093F6F}"/>
               </a:ext>
             </a:extLst>
           </p:cNvPr>
@@ -6523,12 +4645,12 @@
           <a:lstStyle/>
           <a:p>
             <a:r>
+              <a:rPr lang="en-US" dirty="0"/>
+              <a:t>De </a:t>
+            </a:r>
+            <a:r>
               <a:rPr lang="en-US" dirty="0" err="1"/>
-              <a:t>Opdracht</a:t>
-            </a:r>
-            <a:r>
-              <a:rPr lang="en-US" dirty="0"/>
-              <a:t> 1</a:t>
+              <a:t>cellBounds</a:t>
             </a:r>
             <a:endParaRPr lang="nl-NL" dirty="0"/>
           </a:p>
@@ -6536,92 +4658,306 @@
       </p:sp>
       <p:sp>
         <p:nvSpPr>
-          <p:cNvPr id="3" name="Tijdelijke aanduiding voor inhoud 2">
-            <a:extLst>
-              <a:ext uri="{FF2B5EF4-FFF2-40B4-BE49-F238E27FC236}">
-                <a16:creationId xmlns:a16="http://schemas.microsoft.com/office/drawing/2014/main" id="{DBD3B470-FCAE-284D-5F76-F0ACFAE01287}"/>
-              </a:ext>
-            </a:extLst>
-          </p:cNvPr>
-          <p:cNvSpPr>
-            <a:spLocks noGrp="1"/>
-          </p:cNvSpPr>
-          <p:nvPr>
-            <p:ph type="body" idx="1"/>
-          </p:nvPr>
-        </p:nvSpPr>
-        <p:spPr/>
-        <p:txBody>
-          <a:bodyPr/>
+          <p:cNvPr id="5" name="Tijdelijke aanduiding voor inhoud 4">
+            <a:extLst>
+              <a:ext uri="{FF2B5EF4-FFF2-40B4-BE49-F238E27FC236}">
+                <a16:creationId xmlns:a16="http://schemas.microsoft.com/office/drawing/2014/main" id="{2152DD7D-C7CB-F280-A447-595B9AB8891F}"/>
+              </a:ext>
+            </a:extLst>
+          </p:cNvPr>
+          <p:cNvSpPr>
+            <a:spLocks noGrp="1"/>
+          </p:cNvSpPr>
+          <p:nvPr>
+            <p:ph idx="1"/>
+          </p:nvPr>
+        </p:nvSpPr>
+        <p:spPr>
+          <a:solidFill>
+            <a:schemeClr val="bg1">
+              <a:lumMod val="85000"/>
+            </a:schemeClr>
+          </a:solidFill>
+        </p:spPr>
+        <p:txBody>
+          <a:bodyPr>
+            <a:normAutofit lnSpcReduction="10000"/>
+          </a:bodyPr>
           <a:lstStyle/>
           <a:p>
-            <a:r>
-              <a:rPr lang="en-US" dirty="0" err="1"/>
-              <a:t>Bepaal</a:t>
-            </a:r>
-            <a:r>
-              <a:rPr lang="en-US" dirty="0"/>
-              <a:t> de width </a:t>
-            </a:r>
-            <a:r>
-              <a:rPr lang="en-US" dirty="0" err="1"/>
-              <a:t>en</a:t>
-            </a:r>
-            <a:r>
-              <a:rPr lang="en-US" dirty="0"/>
-              <a:t> height van </a:t>
-            </a:r>
-            <a:r>
-              <a:rPr lang="en-US" dirty="0" err="1"/>
-              <a:t>een</a:t>
-            </a:r>
-            <a:r>
-              <a:rPr lang="en-US" dirty="0"/>
+            <a:pPr marL="0" indent="0">
+              <a:buNone/>
+            </a:pPr>
+            <a:r>
+              <a:rPr lang="nl-NL" dirty="0">
+                <a:latin typeface="Courier New" panose="02070309020205020404" pitchFamily="49" charset="0"/>
+                <a:cs typeface="Courier New" panose="02070309020205020404" pitchFamily="49" charset="0"/>
+              </a:rPr>
+              <a:t> [</a:t>
+            </a:r>
+            <a:r>
+              <a:rPr lang="nl-NL" dirty="0" err="1">
+                <a:latin typeface="Courier New" panose="02070309020205020404" pitchFamily="49" charset="0"/>
+                <a:cs typeface="Courier New" panose="02070309020205020404" pitchFamily="49" charset="0"/>
+              </a:rPr>
+              <a:t>SerializeField</a:t>
+            </a:r>
+            <a:r>
+              <a:rPr lang="nl-NL" dirty="0">
+                <a:latin typeface="Courier New" panose="02070309020205020404" pitchFamily="49" charset="0"/>
+                <a:cs typeface="Courier New" panose="02070309020205020404" pitchFamily="49" charset="0"/>
+              </a:rPr>
+              <a:t>] </a:t>
+            </a:r>
+            <a:r>
+              <a:rPr lang="nl-NL" b="1" dirty="0" err="1">
+                <a:latin typeface="Courier New" panose="02070309020205020404" pitchFamily="49" charset="0"/>
+                <a:cs typeface="Courier New" panose="02070309020205020404" pitchFamily="49" charset="0"/>
+              </a:rPr>
+              <a:t>Tilemap</a:t>
+            </a:r>
+            <a:r>
+              <a:rPr lang="nl-NL" dirty="0">
+                <a:latin typeface="Courier New" panose="02070309020205020404" pitchFamily="49" charset="0"/>
+                <a:cs typeface="Courier New" panose="02070309020205020404" pitchFamily="49" charset="0"/>
+              </a:rPr>
               <a:t> </a:t>
             </a:r>
             <a:r>
-              <a:rPr lang="en-US" dirty="0" err="1"/>
-              <a:t>tilemap</a:t>
-            </a:r>
-            <a:endParaRPr lang="en-US" dirty="0"/>
-          </a:p>
-          <a:p>
-            <a:r>
-              <a:rPr lang="en-US" dirty="0" err="1"/>
-              <a:t>Bepaal</a:t>
-            </a:r>
-            <a:r>
-              <a:rPr lang="en-US" dirty="0"/>
-              <a:t> de </a:t>
-            </a:r>
-            <a:r>
-              <a:rPr lang="en-US" dirty="0" err="1"/>
-              <a:t>cellpositie</a:t>
-            </a:r>
-            <a:r>
-              <a:rPr lang="en-US" dirty="0"/>
-              <a:t> van de tile </a:t>
-            </a:r>
-            <a:r>
-              <a:rPr lang="en-US" dirty="0" err="1"/>
-              <a:t>linksboven</a:t>
-            </a:r>
-            <a:r>
-              <a:rPr lang="en-US" dirty="0"/>
-              <a:t> van de </a:t>
-            </a:r>
-            <a:r>
-              <a:rPr lang="en-US" dirty="0" err="1"/>
-              <a:t>tilemap</a:t>
-            </a:r>
-            <a:endParaRPr lang="nl-NL" dirty="0"/>
-          </a:p>
-        </p:txBody>
-      </p:sp>
+              <a:rPr lang="nl-NL" dirty="0" err="1">
+                <a:latin typeface="Courier New" panose="02070309020205020404" pitchFamily="49" charset="0"/>
+                <a:cs typeface="Courier New" panose="02070309020205020404" pitchFamily="49" charset="0"/>
+              </a:rPr>
+              <a:t>myTilemap</a:t>
+            </a:r>
+            <a:r>
+              <a:rPr lang="nl-NL" dirty="0">
+                <a:latin typeface="Courier New" panose="02070309020205020404" pitchFamily="49" charset="0"/>
+                <a:cs typeface="Courier New" panose="02070309020205020404" pitchFamily="49" charset="0"/>
+              </a:rPr>
+              <a:t>;</a:t>
+            </a:r>
+          </a:p>
+          <a:p>
+            <a:pPr marL="0" indent="0">
+              <a:buNone/>
+            </a:pPr>
+            <a:endParaRPr lang="nl-NL" dirty="0">
+              <a:latin typeface="Courier New" panose="02070309020205020404" pitchFamily="49" charset="0"/>
+              <a:cs typeface="Courier New" panose="02070309020205020404" pitchFamily="49" charset="0"/>
+            </a:endParaRPr>
+          </a:p>
+          <a:p>
+            <a:pPr marL="0" indent="0">
+              <a:buNone/>
+            </a:pPr>
+            <a:r>
+              <a:rPr lang="nl-NL" dirty="0">
+                <a:latin typeface="Courier New" panose="02070309020205020404" pitchFamily="49" charset="0"/>
+                <a:cs typeface="Courier New" panose="02070309020205020404" pitchFamily="49" charset="0"/>
+              </a:rPr>
+              <a:t>    </a:t>
+            </a:r>
+            <a:r>
+              <a:rPr lang="nl-NL" b="1" dirty="0" err="1">
+                <a:latin typeface="Courier New" panose="02070309020205020404" pitchFamily="49" charset="0"/>
+                <a:cs typeface="Courier New" panose="02070309020205020404" pitchFamily="49" charset="0"/>
+              </a:rPr>
+              <a:t>BoundsInt</a:t>
+            </a:r>
+            <a:r>
+              <a:rPr lang="nl-NL" dirty="0">
+                <a:latin typeface="Courier New" panose="02070309020205020404" pitchFamily="49" charset="0"/>
+                <a:cs typeface="Courier New" panose="02070309020205020404" pitchFamily="49" charset="0"/>
+              </a:rPr>
+              <a:t> </a:t>
+            </a:r>
+            <a:r>
+              <a:rPr lang="nl-NL" dirty="0" err="1">
+                <a:latin typeface="Courier New" panose="02070309020205020404" pitchFamily="49" charset="0"/>
+                <a:cs typeface="Courier New" panose="02070309020205020404" pitchFamily="49" charset="0"/>
+              </a:rPr>
+              <a:t>bounds</a:t>
+            </a:r>
+            <a:r>
+              <a:rPr lang="nl-NL" dirty="0">
+                <a:latin typeface="Courier New" panose="02070309020205020404" pitchFamily="49" charset="0"/>
+                <a:cs typeface="Courier New" panose="02070309020205020404" pitchFamily="49" charset="0"/>
+              </a:rPr>
+              <a:t>;</a:t>
+            </a:r>
+          </a:p>
+          <a:p>
+            <a:pPr marL="0" indent="0">
+              <a:buNone/>
+            </a:pPr>
+            <a:r>
+              <a:rPr lang="nl-NL" dirty="0">
+                <a:latin typeface="Courier New" panose="02070309020205020404" pitchFamily="49" charset="0"/>
+                <a:cs typeface="Courier New" panose="02070309020205020404" pitchFamily="49" charset="0"/>
+              </a:rPr>
+              <a:t>    </a:t>
+            </a:r>
+          </a:p>
+          <a:p>
+            <a:pPr marL="0" indent="0">
+              <a:buNone/>
+            </a:pPr>
+            <a:r>
+              <a:rPr lang="nl-NL" dirty="0" err="1">
+                <a:latin typeface="Courier New" panose="02070309020205020404" pitchFamily="49" charset="0"/>
+                <a:cs typeface="Courier New" panose="02070309020205020404" pitchFamily="49" charset="0"/>
+              </a:rPr>
+              <a:t>void</a:t>
+            </a:r>
+            <a:r>
+              <a:rPr lang="nl-NL" dirty="0">
+                <a:latin typeface="Courier New" panose="02070309020205020404" pitchFamily="49" charset="0"/>
+                <a:cs typeface="Courier New" panose="02070309020205020404" pitchFamily="49" charset="0"/>
+              </a:rPr>
+              <a:t> Start()</a:t>
+            </a:r>
+          </a:p>
+          <a:p>
+            <a:pPr marL="0" indent="0">
+              <a:buNone/>
+            </a:pPr>
+            <a:r>
+              <a:rPr lang="nl-NL" dirty="0">
+                <a:latin typeface="Courier New" panose="02070309020205020404" pitchFamily="49" charset="0"/>
+                <a:cs typeface="Courier New" panose="02070309020205020404" pitchFamily="49" charset="0"/>
+              </a:rPr>
+              <a:t>    {</a:t>
+            </a:r>
+          </a:p>
+          <a:p>
+            <a:pPr marL="0" indent="0">
+              <a:buNone/>
+            </a:pPr>
+            <a:r>
+              <a:rPr lang="nl-NL" dirty="0">
+                <a:latin typeface="Courier New" panose="02070309020205020404" pitchFamily="49" charset="0"/>
+                <a:cs typeface="Courier New" panose="02070309020205020404" pitchFamily="49" charset="0"/>
+              </a:rPr>
+              <a:t>        </a:t>
+            </a:r>
+            <a:r>
+              <a:rPr lang="nl-NL" dirty="0" err="1">
+                <a:latin typeface="Courier New" panose="02070309020205020404" pitchFamily="49" charset="0"/>
+                <a:cs typeface="Courier New" panose="02070309020205020404" pitchFamily="49" charset="0"/>
+              </a:rPr>
+              <a:t>bounds</a:t>
+            </a:r>
+            <a:r>
+              <a:rPr lang="nl-NL" dirty="0">
+                <a:latin typeface="Courier New" panose="02070309020205020404" pitchFamily="49" charset="0"/>
+                <a:cs typeface="Courier New" panose="02070309020205020404" pitchFamily="49" charset="0"/>
+              </a:rPr>
+              <a:t> = </a:t>
+            </a:r>
+            <a:r>
+              <a:rPr lang="nl-NL" dirty="0" err="1">
+                <a:latin typeface="Courier New" panose="02070309020205020404" pitchFamily="49" charset="0"/>
+                <a:cs typeface="Courier New" panose="02070309020205020404" pitchFamily="49" charset="0"/>
+              </a:rPr>
+              <a:t>myTilemap.cellBounds</a:t>
+            </a:r>
+            <a:r>
+              <a:rPr lang="nl-NL" dirty="0">
+                <a:latin typeface="Courier New" panose="02070309020205020404" pitchFamily="49" charset="0"/>
+                <a:cs typeface="Courier New" panose="02070309020205020404" pitchFamily="49" charset="0"/>
+              </a:rPr>
+              <a:t>;</a:t>
+            </a:r>
+          </a:p>
+          <a:p>
+            <a:pPr marL="0" indent="0">
+              <a:buNone/>
+            </a:pPr>
+            <a:r>
+              <a:rPr lang="nl-NL" dirty="0">
+                <a:latin typeface="Courier New" panose="02070309020205020404" pitchFamily="49" charset="0"/>
+                <a:cs typeface="Courier New" panose="02070309020205020404" pitchFamily="49" charset="0"/>
+              </a:rPr>
+              <a:t>        </a:t>
+            </a:r>
+            <a:r>
+              <a:rPr lang="nl-NL" dirty="0" err="1">
+                <a:latin typeface="Courier New" panose="02070309020205020404" pitchFamily="49" charset="0"/>
+                <a:cs typeface="Courier New" panose="02070309020205020404" pitchFamily="49" charset="0"/>
+              </a:rPr>
+              <a:t>Debug.Log</a:t>
+            </a:r>
+            <a:r>
+              <a:rPr lang="nl-NL" dirty="0">
+                <a:latin typeface="Courier New" panose="02070309020205020404" pitchFamily="49" charset="0"/>
+                <a:cs typeface="Courier New" panose="02070309020205020404" pitchFamily="49" charset="0"/>
+              </a:rPr>
+              <a:t>(</a:t>
+            </a:r>
+            <a:r>
+              <a:rPr lang="nl-NL" dirty="0" err="1">
+                <a:latin typeface="Courier New" panose="02070309020205020404" pitchFamily="49" charset="0"/>
+                <a:cs typeface="Courier New" panose="02070309020205020404" pitchFamily="49" charset="0"/>
+              </a:rPr>
+              <a:t>bounds</a:t>
+            </a:r>
+            <a:r>
+              <a:rPr lang="nl-NL" dirty="0">
+                <a:latin typeface="Courier New" panose="02070309020205020404" pitchFamily="49" charset="0"/>
+                <a:cs typeface="Courier New" panose="02070309020205020404" pitchFamily="49" charset="0"/>
+              </a:rPr>
+              <a:t>);</a:t>
+            </a:r>
+          </a:p>
+          <a:p>
+            <a:pPr marL="0" indent="0">
+              <a:buNone/>
+            </a:pPr>
+            <a:r>
+              <a:rPr lang="nl-NL" dirty="0">
+                <a:latin typeface="Courier New" panose="02070309020205020404" pitchFamily="49" charset="0"/>
+                <a:cs typeface="Courier New" panose="02070309020205020404" pitchFamily="49" charset="0"/>
+              </a:rPr>
+              <a:t>    }</a:t>
+            </a:r>
+          </a:p>
+        </p:txBody>
+      </p:sp>
+      <p:pic>
+        <p:nvPicPr>
+          <p:cNvPr id="7" name="Afbeelding 6">
+            <a:extLst>
+              <a:ext uri="{FF2B5EF4-FFF2-40B4-BE49-F238E27FC236}">
+                <a16:creationId xmlns:a16="http://schemas.microsoft.com/office/drawing/2014/main" id="{AA7C7541-79CF-D833-CCE4-536CAB93CA9A}"/>
+              </a:ext>
+            </a:extLst>
+          </p:cNvPr>
+          <p:cNvPicPr>
+            <a:picLocks noChangeAspect="1"/>
+          </p:cNvPicPr>
+          <p:nvPr/>
+        </p:nvPicPr>
+        <p:blipFill>
+          <a:blip r:embed="rId2"/>
+          <a:stretch>
+            <a:fillRect/>
+          </a:stretch>
+        </p:blipFill>
+        <p:spPr>
+          <a:xfrm>
+            <a:off x="7398784" y="5307249"/>
+            <a:ext cx="4534533" cy="1457528"/>
+          </a:xfrm>
+          <a:prstGeom prst="rect">
+            <a:avLst/>
+          </a:prstGeom>
+        </p:spPr>
+      </p:pic>
     </p:spTree>
     <p:extLst>
       <p:ext uri="{BB962C8B-B14F-4D97-AF65-F5344CB8AC3E}">
-        <p14:creationId xmlns:p14="http://schemas.microsoft.com/office/powerpoint/2010/main" val="13667862"/>
+        <p14:creationId xmlns:p14="http://schemas.microsoft.com/office/powerpoint/2010/main" val="2545989669"/>
       </p:ext>
     </p:extLst>
   </p:cSld>
@@ -6631,7 +4967,7 @@
 </p:sld>
 </file>
 
-<file path=ppt/slides/slide7.xml><?xml version="1.0" encoding="utf-8"?>
+<file path=ppt/slides/slide5.xml><?xml version="1.0" encoding="utf-8"?>
 <p:sld xmlns:a="http://schemas.openxmlformats.org/drawingml/2006/main" xmlns:r="http://schemas.openxmlformats.org/officeDocument/2006/relationships" xmlns:p="http://schemas.openxmlformats.org/presentationml/2006/main">
   <p:cSld>
     <p:spTree>
@@ -7440,6 +5776,767 @@
 </p:sld>
 </file>
 
+<file path=ppt/slides/slide6.xml><?xml version="1.0" encoding="utf-8"?>
+<p:sld xmlns:a="http://schemas.openxmlformats.org/drawingml/2006/main" xmlns:r="http://schemas.openxmlformats.org/officeDocument/2006/relationships" xmlns:p="http://schemas.openxmlformats.org/presentationml/2006/main">
+  <p:cSld>
+    <p:spTree>
+      <p:nvGrpSpPr>
+        <p:cNvPr id="1" name=""/>
+        <p:cNvGrpSpPr/>
+        <p:nvPr/>
+      </p:nvGrpSpPr>
+      <p:grpSpPr>
+        <a:xfrm>
+          <a:off x="0" y="0"/>
+          <a:ext cx="0" cy="0"/>
+          <a:chOff x="0" y="0"/>
+          <a:chExt cx="0" cy="0"/>
+        </a:xfrm>
+      </p:grpSpPr>
+      <p:sp>
+        <p:nvSpPr>
+          <p:cNvPr id="2" name="Titel 1">
+            <a:extLst>
+              <a:ext uri="{FF2B5EF4-FFF2-40B4-BE49-F238E27FC236}">
+                <a16:creationId xmlns:a16="http://schemas.microsoft.com/office/drawing/2014/main" id="{FE45CA3E-C9D6-04E4-C92D-157A40F1CBB5}"/>
+              </a:ext>
+            </a:extLst>
+          </p:cNvPr>
+          <p:cNvSpPr>
+            <a:spLocks noGrp="1"/>
+          </p:cNvSpPr>
+          <p:nvPr>
+            <p:ph type="title"/>
+          </p:nvPr>
+        </p:nvSpPr>
+        <p:spPr/>
+        <p:txBody>
+          <a:bodyPr/>
+          <a:lstStyle/>
+          <a:p>
+            <a:r>
+              <a:rPr lang="en-US" dirty="0" err="1"/>
+              <a:t>Declareren</a:t>
+            </a:r>
+            <a:r>
+              <a:rPr lang="en-US" dirty="0"/>
+              <a:t> van de </a:t>
+            </a:r>
+            <a:r>
+              <a:rPr lang="en-US" dirty="0" err="1"/>
+              <a:t>CellBounds</a:t>
+            </a:r>
+            <a:endParaRPr lang="nl-NL" dirty="0"/>
+          </a:p>
+        </p:txBody>
+      </p:sp>
+      <p:sp>
+        <p:nvSpPr>
+          <p:cNvPr id="3" name="Tijdelijke aanduiding voor inhoud 2">
+            <a:extLst>
+              <a:ext uri="{FF2B5EF4-FFF2-40B4-BE49-F238E27FC236}">
+                <a16:creationId xmlns:a16="http://schemas.microsoft.com/office/drawing/2014/main" id="{662A7417-122E-94DF-F517-CEF372CF421F}"/>
+              </a:ext>
+            </a:extLst>
+          </p:cNvPr>
+          <p:cNvSpPr>
+            <a:spLocks noGrp="1"/>
+          </p:cNvSpPr>
+          <p:nvPr>
+            <p:ph idx="1"/>
+          </p:nvPr>
+        </p:nvSpPr>
+        <p:spPr/>
+        <p:txBody>
+          <a:bodyPr>
+            <a:normAutofit fontScale="62500" lnSpcReduction="20000"/>
+          </a:bodyPr>
+          <a:lstStyle/>
+          <a:p>
+            <a:pPr marL="0" indent="0">
+              <a:buNone/>
+            </a:pPr>
+            <a:r>
+              <a:rPr lang="nl-NL" dirty="0">
+                <a:latin typeface="Courier New" panose="02070309020205020404" pitchFamily="49" charset="0"/>
+                <a:cs typeface="Courier New" panose="02070309020205020404" pitchFamily="49" charset="0"/>
+              </a:rPr>
+              <a:t> [</a:t>
+            </a:r>
+            <a:r>
+              <a:rPr lang="nl-NL" dirty="0" err="1">
+                <a:solidFill>
+                  <a:srgbClr val="FF0000"/>
+                </a:solidFill>
+                <a:latin typeface="Courier New" panose="02070309020205020404" pitchFamily="49" charset="0"/>
+                <a:cs typeface="Courier New" panose="02070309020205020404" pitchFamily="49" charset="0"/>
+              </a:rPr>
+              <a:t>SerializeField</a:t>
+            </a:r>
+            <a:r>
+              <a:rPr lang="nl-NL" dirty="0">
+                <a:latin typeface="Courier New" panose="02070309020205020404" pitchFamily="49" charset="0"/>
+                <a:cs typeface="Courier New" panose="02070309020205020404" pitchFamily="49" charset="0"/>
+              </a:rPr>
+              <a:t>] </a:t>
+            </a:r>
+            <a:r>
+              <a:rPr lang="nl-NL" b="1" dirty="0" err="1">
+                <a:latin typeface="Courier New" panose="02070309020205020404" pitchFamily="49" charset="0"/>
+                <a:cs typeface="Courier New" panose="02070309020205020404" pitchFamily="49" charset="0"/>
+              </a:rPr>
+              <a:t>Tilemap</a:t>
+            </a:r>
+            <a:r>
+              <a:rPr lang="nl-NL" dirty="0">
+                <a:latin typeface="Courier New" panose="02070309020205020404" pitchFamily="49" charset="0"/>
+                <a:cs typeface="Courier New" panose="02070309020205020404" pitchFamily="49" charset="0"/>
+              </a:rPr>
+              <a:t> </a:t>
+            </a:r>
+            <a:r>
+              <a:rPr lang="nl-NL" dirty="0" err="1">
+                <a:latin typeface="Courier New" panose="02070309020205020404" pitchFamily="49" charset="0"/>
+                <a:cs typeface="Courier New" panose="02070309020205020404" pitchFamily="49" charset="0"/>
+              </a:rPr>
+              <a:t>myTilemap</a:t>
+            </a:r>
+            <a:r>
+              <a:rPr lang="nl-NL" dirty="0">
+                <a:latin typeface="Courier New" panose="02070309020205020404" pitchFamily="49" charset="0"/>
+                <a:cs typeface="Courier New" panose="02070309020205020404" pitchFamily="49" charset="0"/>
+              </a:rPr>
+              <a:t>;</a:t>
+            </a:r>
+          </a:p>
+          <a:p>
+            <a:pPr marL="0" indent="0">
+              <a:buNone/>
+            </a:pPr>
+            <a:r>
+              <a:rPr lang="nl-NL" dirty="0">
+                <a:latin typeface="Courier New" panose="02070309020205020404" pitchFamily="49" charset="0"/>
+                <a:cs typeface="Courier New" panose="02070309020205020404" pitchFamily="49" charset="0"/>
+              </a:rPr>
+              <a:t>    </a:t>
+            </a:r>
+            <a:r>
+              <a:rPr lang="nl-NL" b="1" dirty="0" err="1">
+                <a:latin typeface="Courier New" panose="02070309020205020404" pitchFamily="49" charset="0"/>
+                <a:cs typeface="Courier New" panose="02070309020205020404" pitchFamily="49" charset="0"/>
+              </a:rPr>
+              <a:t>BoundsInt</a:t>
+            </a:r>
+            <a:r>
+              <a:rPr lang="nl-NL" dirty="0">
+                <a:latin typeface="Courier New" panose="02070309020205020404" pitchFamily="49" charset="0"/>
+                <a:cs typeface="Courier New" panose="02070309020205020404" pitchFamily="49" charset="0"/>
+              </a:rPr>
+              <a:t> </a:t>
+            </a:r>
+            <a:r>
+              <a:rPr lang="nl-NL" dirty="0" err="1">
+                <a:latin typeface="Courier New" panose="02070309020205020404" pitchFamily="49" charset="0"/>
+                <a:cs typeface="Courier New" panose="02070309020205020404" pitchFamily="49" charset="0"/>
+              </a:rPr>
+              <a:t>bounds</a:t>
+            </a:r>
+            <a:r>
+              <a:rPr lang="nl-NL" dirty="0">
+                <a:latin typeface="Courier New" panose="02070309020205020404" pitchFamily="49" charset="0"/>
+                <a:cs typeface="Courier New" panose="02070309020205020404" pitchFamily="49" charset="0"/>
+              </a:rPr>
+              <a:t>;</a:t>
+            </a:r>
+          </a:p>
+          <a:p>
+            <a:pPr marL="0" indent="0">
+              <a:buNone/>
+            </a:pPr>
+            <a:r>
+              <a:rPr lang="nl-NL" dirty="0">
+                <a:latin typeface="Courier New" panose="02070309020205020404" pitchFamily="49" charset="0"/>
+                <a:cs typeface="Courier New" panose="02070309020205020404" pitchFamily="49" charset="0"/>
+              </a:rPr>
+              <a:t>    </a:t>
+            </a:r>
+            <a:r>
+              <a:rPr lang="nl-NL" b="1" dirty="0">
+                <a:latin typeface="Courier New" panose="02070309020205020404" pitchFamily="49" charset="0"/>
+                <a:cs typeface="Courier New" panose="02070309020205020404" pitchFamily="49" charset="0"/>
+              </a:rPr>
+              <a:t>int</a:t>
+            </a:r>
+            <a:r>
+              <a:rPr lang="nl-NL" dirty="0">
+                <a:latin typeface="Courier New" panose="02070309020205020404" pitchFamily="49" charset="0"/>
+                <a:cs typeface="Courier New" panose="02070309020205020404" pitchFamily="49" charset="0"/>
+              </a:rPr>
+              <a:t> </a:t>
+            </a:r>
+            <a:r>
+              <a:rPr lang="nl-NL" dirty="0" err="1">
+                <a:latin typeface="Courier New" panose="02070309020205020404" pitchFamily="49" charset="0"/>
+                <a:cs typeface="Courier New" panose="02070309020205020404" pitchFamily="49" charset="0"/>
+              </a:rPr>
+              <a:t>width</a:t>
+            </a:r>
+            <a:r>
+              <a:rPr lang="nl-NL" dirty="0">
+                <a:latin typeface="Courier New" panose="02070309020205020404" pitchFamily="49" charset="0"/>
+                <a:cs typeface="Courier New" panose="02070309020205020404" pitchFamily="49" charset="0"/>
+              </a:rPr>
+              <a:t>, </a:t>
+            </a:r>
+            <a:r>
+              <a:rPr lang="nl-NL" dirty="0" err="1">
+                <a:latin typeface="Courier New" panose="02070309020205020404" pitchFamily="49" charset="0"/>
+                <a:cs typeface="Courier New" panose="02070309020205020404" pitchFamily="49" charset="0"/>
+              </a:rPr>
+              <a:t>height</a:t>
+            </a:r>
+            <a:r>
+              <a:rPr lang="nl-NL" dirty="0">
+                <a:latin typeface="Courier New" panose="02070309020205020404" pitchFamily="49" charset="0"/>
+                <a:cs typeface="Courier New" panose="02070309020205020404" pitchFamily="49" charset="0"/>
+              </a:rPr>
+              <a:t>;</a:t>
+            </a:r>
+          </a:p>
+          <a:p>
+            <a:pPr marL="0" indent="0">
+              <a:buNone/>
+            </a:pPr>
+            <a:r>
+              <a:rPr lang="nl-NL" dirty="0">
+                <a:latin typeface="Courier New" panose="02070309020205020404" pitchFamily="49" charset="0"/>
+                <a:cs typeface="Courier New" panose="02070309020205020404" pitchFamily="49" charset="0"/>
+              </a:rPr>
+              <a:t>    </a:t>
+            </a:r>
+            <a:r>
+              <a:rPr lang="nl-NL" b="1" dirty="0">
+                <a:latin typeface="Courier New" panose="02070309020205020404" pitchFamily="49" charset="0"/>
+                <a:cs typeface="Courier New" panose="02070309020205020404" pitchFamily="49" charset="0"/>
+              </a:rPr>
+              <a:t>int</a:t>
+            </a:r>
+            <a:r>
+              <a:rPr lang="nl-NL" dirty="0">
+                <a:latin typeface="Courier New" panose="02070309020205020404" pitchFamily="49" charset="0"/>
+                <a:cs typeface="Courier New" panose="02070309020205020404" pitchFamily="49" charset="0"/>
+              </a:rPr>
+              <a:t> x0, y0;</a:t>
+            </a:r>
+          </a:p>
+          <a:p>
+            <a:pPr marL="0" indent="0">
+              <a:buNone/>
+            </a:pPr>
+            <a:endParaRPr lang="nl-NL" dirty="0">
+              <a:latin typeface="Courier New" panose="02070309020205020404" pitchFamily="49" charset="0"/>
+              <a:cs typeface="Courier New" panose="02070309020205020404" pitchFamily="49" charset="0"/>
+            </a:endParaRPr>
+          </a:p>
+          <a:p>
+            <a:pPr marL="0" indent="0">
+              <a:buNone/>
+            </a:pPr>
+            <a:r>
+              <a:rPr lang="nl-NL" dirty="0">
+                <a:latin typeface="Courier New" panose="02070309020205020404" pitchFamily="49" charset="0"/>
+                <a:cs typeface="Courier New" panose="02070309020205020404" pitchFamily="49" charset="0"/>
+              </a:rPr>
+              <a:t>    </a:t>
+            </a:r>
+            <a:r>
+              <a:rPr lang="nl-NL" dirty="0" err="1">
+                <a:latin typeface="Courier New" panose="02070309020205020404" pitchFamily="49" charset="0"/>
+                <a:cs typeface="Courier New" panose="02070309020205020404" pitchFamily="49" charset="0"/>
+              </a:rPr>
+              <a:t>void</a:t>
+            </a:r>
+            <a:r>
+              <a:rPr lang="nl-NL" dirty="0">
+                <a:latin typeface="Courier New" panose="02070309020205020404" pitchFamily="49" charset="0"/>
+                <a:cs typeface="Courier New" panose="02070309020205020404" pitchFamily="49" charset="0"/>
+              </a:rPr>
+              <a:t> Start()</a:t>
+            </a:r>
+          </a:p>
+          <a:p>
+            <a:pPr marL="0" indent="0">
+              <a:buNone/>
+            </a:pPr>
+            <a:r>
+              <a:rPr lang="nl-NL" dirty="0">
+                <a:latin typeface="Courier New" panose="02070309020205020404" pitchFamily="49" charset="0"/>
+                <a:cs typeface="Courier New" panose="02070309020205020404" pitchFamily="49" charset="0"/>
+              </a:rPr>
+              <a:t>    {</a:t>
+            </a:r>
+          </a:p>
+          <a:p>
+            <a:pPr marL="0" indent="0">
+              <a:buNone/>
+            </a:pPr>
+            <a:r>
+              <a:rPr lang="nl-NL" dirty="0">
+                <a:latin typeface="Courier New" panose="02070309020205020404" pitchFamily="49" charset="0"/>
+                <a:cs typeface="Courier New" panose="02070309020205020404" pitchFamily="49" charset="0"/>
+              </a:rPr>
+              <a:t>        </a:t>
+            </a:r>
+            <a:r>
+              <a:rPr lang="nl-NL" dirty="0" err="1">
+                <a:latin typeface="Courier New" panose="02070309020205020404" pitchFamily="49" charset="0"/>
+                <a:cs typeface="Courier New" panose="02070309020205020404" pitchFamily="49" charset="0"/>
+              </a:rPr>
+              <a:t>bounds</a:t>
+            </a:r>
+            <a:r>
+              <a:rPr lang="nl-NL" dirty="0">
+                <a:latin typeface="Courier New" panose="02070309020205020404" pitchFamily="49" charset="0"/>
+                <a:cs typeface="Courier New" panose="02070309020205020404" pitchFamily="49" charset="0"/>
+              </a:rPr>
+              <a:t> = </a:t>
+            </a:r>
+            <a:r>
+              <a:rPr lang="nl-NL" dirty="0" err="1">
+                <a:latin typeface="Courier New" panose="02070309020205020404" pitchFamily="49" charset="0"/>
+                <a:cs typeface="Courier New" panose="02070309020205020404" pitchFamily="49" charset="0"/>
+              </a:rPr>
+              <a:t>myTilemap.cellBounds</a:t>
+            </a:r>
+            <a:r>
+              <a:rPr lang="nl-NL" dirty="0">
+                <a:latin typeface="Courier New" panose="02070309020205020404" pitchFamily="49" charset="0"/>
+                <a:cs typeface="Courier New" panose="02070309020205020404" pitchFamily="49" charset="0"/>
+              </a:rPr>
+              <a:t>;</a:t>
+            </a:r>
+          </a:p>
+          <a:p>
+            <a:pPr marL="0" indent="0">
+              <a:buNone/>
+            </a:pPr>
+            <a:r>
+              <a:rPr lang="nl-NL" dirty="0">
+                <a:latin typeface="Courier New" panose="02070309020205020404" pitchFamily="49" charset="0"/>
+                <a:cs typeface="Courier New" panose="02070309020205020404" pitchFamily="49" charset="0"/>
+              </a:rPr>
+              <a:t>        </a:t>
+            </a:r>
+            <a:r>
+              <a:rPr lang="nl-NL" dirty="0" err="1">
+                <a:latin typeface="Courier New" panose="02070309020205020404" pitchFamily="49" charset="0"/>
+                <a:cs typeface="Courier New" panose="02070309020205020404" pitchFamily="49" charset="0"/>
+              </a:rPr>
+              <a:t>width</a:t>
+            </a:r>
+            <a:r>
+              <a:rPr lang="nl-NL" dirty="0">
+                <a:latin typeface="Courier New" panose="02070309020205020404" pitchFamily="49" charset="0"/>
+                <a:cs typeface="Courier New" panose="02070309020205020404" pitchFamily="49" charset="0"/>
+              </a:rPr>
+              <a:t> = </a:t>
+            </a:r>
+            <a:r>
+              <a:rPr lang="nl-NL" dirty="0" err="1">
+                <a:latin typeface="Courier New" panose="02070309020205020404" pitchFamily="49" charset="0"/>
+                <a:cs typeface="Courier New" panose="02070309020205020404" pitchFamily="49" charset="0"/>
+              </a:rPr>
+              <a:t>bounds.size.x</a:t>
+            </a:r>
+            <a:r>
+              <a:rPr lang="nl-NL" dirty="0">
+                <a:latin typeface="Courier New" panose="02070309020205020404" pitchFamily="49" charset="0"/>
+                <a:cs typeface="Courier New" panose="02070309020205020404" pitchFamily="49" charset="0"/>
+              </a:rPr>
+              <a:t>;</a:t>
+            </a:r>
+          </a:p>
+          <a:p>
+            <a:pPr marL="0" indent="0">
+              <a:buNone/>
+            </a:pPr>
+            <a:r>
+              <a:rPr lang="nl-NL" dirty="0">
+                <a:latin typeface="Courier New" panose="02070309020205020404" pitchFamily="49" charset="0"/>
+                <a:cs typeface="Courier New" panose="02070309020205020404" pitchFamily="49" charset="0"/>
+              </a:rPr>
+              <a:t>        </a:t>
+            </a:r>
+            <a:r>
+              <a:rPr lang="nl-NL" dirty="0" err="1">
+                <a:latin typeface="Courier New" panose="02070309020205020404" pitchFamily="49" charset="0"/>
+                <a:cs typeface="Courier New" panose="02070309020205020404" pitchFamily="49" charset="0"/>
+              </a:rPr>
+              <a:t>height</a:t>
+            </a:r>
+            <a:r>
+              <a:rPr lang="nl-NL" dirty="0">
+                <a:latin typeface="Courier New" panose="02070309020205020404" pitchFamily="49" charset="0"/>
+                <a:cs typeface="Courier New" panose="02070309020205020404" pitchFamily="49" charset="0"/>
+              </a:rPr>
+              <a:t> = </a:t>
+            </a:r>
+            <a:r>
+              <a:rPr lang="nl-NL" dirty="0" err="1">
+                <a:latin typeface="Courier New" panose="02070309020205020404" pitchFamily="49" charset="0"/>
+                <a:cs typeface="Courier New" panose="02070309020205020404" pitchFamily="49" charset="0"/>
+              </a:rPr>
+              <a:t>bounds.size.y</a:t>
+            </a:r>
+            <a:r>
+              <a:rPr lang="nl-NL" dirty="0">
+                <a:latin typeface="Courier New" panose="02070309020205020404" pitchFamily="49" charset="0"/>
+                <a:cs typeface="Courier New" panose="02070309020205020404" pitchFamily="49" charset="0"/>
+              </a:rPr>
+              <a:t>;</a:t>
+            </a:r>
+          </a:p>
+          <a:p>
+            <a:pPr marL="0" indent="0">
+              <a:buNone/>
+            </a:pPr>
+            <a:r>
+              <a:rPr lang="nl-NL" dirty="0">
+                <a:latin typeface="Courier New" panose="02070309020205020404" pitchFamily="49" charset="0"/>
+                <a:cs typeface="Courier New" panose="02070309020205020404" pitchFamily="49" charset="0"/>
+              </a:rPr>
+              <a:t>        x0 = </a:t>
+            </a:r>
+            <a:r>
+              <a:rPr lang="nl-NL" dirty="0" err="1">
+                <a:latin typeface="Courier New" panose="02070309020205020404" pitchFamily="49" charset="0"/>
+                <a:cs typeface="Courier New" panose="02070309020205020404" pitchFamily="49" charset="0"/>
+              </a:rPr>
+              <a:t>bounds.xMin</a:t>
+            </a:r>
+            <a:r>
+              <a:rPr lang="nl-NL" dirty="0">
+                <a:latin typeface="Courier New" panose="02070309020205020404" pitchFamily="49" charset="0"/>
+                <a:cs typeface="Courier New" panose="02070309020205020404" pitchFamily="49" charset="0"/>
+              </a:rPr>
+              <a:t>;</a:t>
+            </a:r>
+          </a:p>
+          <a:p>
+            <a:pPr marL="0" indent="0">
+              <a:buNone/>
+            </a:pPr>
+            <a:r>
+              <a:rPr lang="nl-NL" dirty="0">
+                <a:latin typeface="Courier New" panose="02070309020205020404" pitchFamily="49" charset="0"/>
+                <a:cs typeface="Courier New" panose="02070309020205020404" pitchFamily="49" charset="0"/>
+              </a:rPr>
+              <a:t>        y0 = </a:t>
+            </a:r>
+            <a:r>
+              <a:rPr lang="nl-NL" dirty="0" err="1">
+                <a:latin typeface="Courier New" panose="02070309020205020404" pitchFamily="49" charset="0"/>
+                <a:cs typeface="Courier New" panose="02070309020205020404" pitchFamily="49" charset="0"/>
+              </a:rPr>
+              <a:t>bounds.yMin</a:t>
+            </a:r>
+            <a:r>
+              <a:rPr lang="nl-NL" dirty="0">
+                <a:latin typeface="Courier New" panose="02070309020205020404" pitchFamily="49" charset="0"/>
+                <a:cs typeface="Courier New" panose="02070309020205020404" pitchFamily="49" charset="0"/>
+              </a:rPr>
+              <a:t>;</a:t>
+            </a:r>
+          </a:p>
+          <a:p>
+            <a:pPr marL="0" indent="0">
+              <a:buNone/>
+            </a:pPr>
+            <a:r>
+              <a:rPr lang="nl-NL" dirty="0">
+                <a:latin typeface="Courier New" panose="02070309020205020404" pitchFamily="49" charset="0"/>
+                <a:cs typeface="Courier New" panose="02070309020205020404" pitchFamily="49" charset="0"/>
+              </a:rPr>
+              <a:t>    }</a:t>
+            </a:r>
+          </a:p>
+        </p:txBody>
+      </p:sp>
+    </p:spTree>
+    <p:extLst>
+      <p:ext uri="{BB962C8B-B14F-4D97-AF65-F5344CB8AC3E}">
+        <p14:creationId xmlns:p14="http://schemas.microsoft.com/office/powerpoint/2010/main" val="3861025813"/>
+      </p:ext>
+    </p:extLst>
+  </p:cSld>
+  <p:clrMapOvr>
+    <a:masterClrMapping/>
+  </p:clrMapOvr>
+</p:sld>
+</file>
+
+<file path=ppt/slides/slide7.xml><?xml version="1.0" encoding="utf-8"?>
+<p:sld xmlns:a="http://schemas.openxmlformats.org/drawingml/2006/main" xmlns:r="http://schemas.openxmlformats.org/officeDocument/2006/relationships" xmlns:p="http://schemas.openxmlformats.org/presentationml/2006/main">
+  <p:cSld>
+    <p:spTree>
+      <p:nvGrpSpPr>
+        <p:cNvPr id="1" name=""/>
+        <p:cNvGrpSpPr/>
+        <p:nvPr/>
+      </p:nvGrpSpPr>
+      <p:grpSpPr>
+        <a:xfrm>
+          <a:off x="0" y="0"/>
+          <a:ext cx="0" cy="0"/>
+          <a:chOff x="0" y="0"/>
+          <a:chExt cx="0" cy="0"/>
+        </a:xfrm>
+      </p:grpSpPr>
+      <p:sp>
+        <p:nvSpPr>
+          <p:cNvPr id="2" name="Titel 1">
+            <a:extLst>
+              <a:ext uri="{FF2B5EF4-FFF2-40B4-BE49-F238E27FC236}">
+                <a16:creationId xmlns:a16="http://schemas.microsoft.com/office/drawing/2014/main" id="{5C20D8FC-382C-B5EA-D779-45349483328B}"/>
+              </a:ext>
+            </a:extLst>
+          </p:cNvPr>
+          <p:cNvSpPr>
+            <a:spLocks noGrp="1"/>
+          </p:cNvSpPr>
+          <p:nvPr>
+            <p:ph type="title"/>
+          </p:nvPr>
+        </p:nvSpPr>
+        <p:spPr/>
+        <p:txBody>
+          <a:bodyPr/>
+          <a:lstStyle/>
+          <a:p>
+            <a:r>
+              <a:rPr lang="en-US" dirty="0"/>
+              <a:t>Itereren door de </a:t>
+            </a:r>
+            <a:r>
+              <a:rPr lang="en-US" dirty="0" err="1"/>
+              <a:t>tileMap</a:t>
+            </a:r>
+            <a:endParaRPr lang="nl-NL" dirty="0"/>
+          </a:p>
+        </p:txBody>
+      </p:sp>
+      <p:sp>
+        <p:nvSpPr>
+          <p:cNvPr id="3" name="Tijdelijke aanduiding voor inhoud 2">
+            <a:extLst>
+              <a:ext uri="{FF2B5EF4-FFF2-40B4-BE49-F238E27FC236}">
+                <a16:creationId xmlns:a16="http://schemas.microsoft.com/office/drawing/2014/main" id="{79F7A839-018C-2BAB-AD78-0E33900F6878}"/>
+              </a:ext>
+            </a:extLst>
+          </p:cNvPr>
+          <p:cNvSpPr>
+            <a:spLocks noGrp="1"/>
+          </p:cNvSpPr>
+          <p:nvPr>
+            <p:ph idx="1"/>
+          </p:nvPr>
+        </p:nvSpPr>
+        <p:spPr/>
+        <p:txBody>
+          <a:bodyPr>
+            <a:normAutofit/>
+          </a:bodyPr>
+          <a:lstStyle/>
+          <a:p>
+            <a:pPr marL="0" indent="0">
+              <a:buNone/>
+            </a:pPr>
+            <a:r>
+              <a:rPr lang="nl-NL" sz="2400" dirty="0" err="1">
+                <a:latin typeface="Courier New" panose="02070309020205020404" pitchFamily="49" charset="0"/>
+                <a:cs typeface="Courier New" panose="02070309020205020404" pitchFamily="49" charset="0"/>
+              </a:rPr>
+              <a:t>for</a:t>
+            </a:r>
+            <a:r>
+              <a:rPr lang="nl-NL" sz="2400" dirty="0">
+                <a:latin typeface="Courier New" panose="02070309020205020404" pitchFamily="49" charset="0"/>
+                <a:cs typeface="Courier New" panose="02070309020205020404" pitchFamily="49" charset="0"/>
+              </a:rPr>
+              <a:t>(</a:t>
+            </a:r>
+            <a:r>
+              <a:rPr lang="nl-NL" sz="2400" b="1" dirty="0">
+                <a:latin typeface="Courier New" panose="02070309020205020404" pitchFamily="49" charset="0"/>
+                <a:cs typeface="Courier New" panose="02070309020205020404" pitchFamily="49" charset="0"/>
+              </a:rPr>
+              <a:t>int</a:t>
+            </a:r>
+            <a:r>
+              <a:rPr lang="nl-NL" sz="2400" dirty="0">
+                <a:latin typeface="Courier New" panose="02070309020205020404" pitchFamily="49" charset="0"/>
+                <a:cs typeface="Courier New" panose="02070309020205020404" pitchFamily="49" charset="0"/>
+              </a:rPr>
+              <a:t> i = 0 + x0; i &lt; </a:t>
+            </a:r>
+            <a:r>
+              <a:rPr lang="nl-NL" sz="2400" dirty="0" err="1">
+                <a:latin typeface="Courier New" panose="02070309020205020404" pitchFamily="49" charset="0"/>
+                <a:cs typeface="Courier New" panose="02070309020205020404" pitchFamily="49" charset="0"/>
+              </a:rPr>
+              <a:t>bounds.size.x</a:t>
+            </a:r>
+            <a:r>
+              <a:rPr lang="nl-NL" sz="2400" dirty="0">
+                <a:latin typeface="Courier New" panose="02070309020205020404" pitchFamily="49" charset="0"/>
+                <a:cs typeface="Courier New" panose="02070309020205020404" pitchFamily="49" charset="0"/>
+              </a:rPr>
+              <a:t>; i++)</a:t>
+            </a:r>
+          </a:p>
+          <a:p>
+            <a:pPr marL="0" indent="0">
+              <a:buNone/>
+            </a:pPr>
+            <a:r>
+              <a:rPr lang="nl-NL" sz="2400" dirty="0">
+                <a:latin typeface="Courier New" panose="02070309020205020404" pitchFamily="49" charset="0"/>
+                <a:cs typeface="Courier New" panose="02070309020205020404" pitchFamily="49" charset="0"/>
+              </a:rPr>
+              <a:t>{</a:t>
+            </a:r>
+          </a:p>
+          <a:p>
+            <a:pPr marL="914400" lvl="2" indent="0">
+              <a:buNone/>
+            </a:pPr>
+            <a:r>
+              <a:rPr lang="en-US" sz="2400" dirty="0">
+                <a:latin typeface="Courier New" panose="02070309020205020404" pitchFamily="49" charset="0"/>
+                <a:cs typeface="Courier New" panose="02070309020205020404" pitchFamily="49" charset="0"/>
+              </a:rPr>
+              <a:t>for (</a:t>
+            </a:r>
+            <a:r>
+              <a:rPr lang="en-US" sz="2400" b="1" dirty="0">
+                <a:latin typeface="Courier New" panose="02070309020205020404" pitchFamily="49" charset="0"/>
+                <a:cs typeface="Courier New" panose="02070309020205020404" pitchFamily="49" charset="0"/>
+              </a:rPr>
+              <a:t>int</a:t>
+            </a:r>
+            <a:r>
+              <a:rPr lang="en-US" sz="2400" dirty="0">
+                <a:latin typeface="Courier New" panose="02070309020205020404" pitchFamily="49" charset="0"/>
+                <a:cs typeface="Courier New" panose="02070309020205020404" pitchFamily="49" charset="0"/>
+              </a:rPr>
+              <a:t> j = 0 + y0; j &lt; </a:t>
+            </a:r>
+            <a:r>
+              <a:rPr lang="en-US" sz="2400" dirty="0" err="1">
+                <a:latin typeface="Courier New" panose="02070309020205020404" pitchFamily="49" charset="0"/>
+                <a:cs typeface="Courier New" panose="02070309020205020404" pitchFamily="49" charset="0"/>
+              </a:rPr>
+              <a:t>bounds.size.y</a:t>
+            </a:r>
+            <a:r>
+              <a:rPr lang="en-US" sz="2400" dirty="0">
+                <a:latin typeface="Courier New" panose="02070309020205020404" pitchFamily="49" charset="0"/>
+                <a:cs typeface="Courier New" panose="02070309020205020404" pitchFamily="49" charset="0"/>
+              </a:rPr>
+              <a:t>; </a:t>
+            </a:r>
+            <a:r>
+              <a:rPr lang="en-US" sz="2400" dirty="0" err="1">
+                <a:latin typeface="Courier New" panose="02070309020205020404" pitchFamily="49" charset="0"/>
+                <a:cs typeface="Courier New" panose="02070309020205020404" pitchFamily="49" charset="0"/>
+              </a:rPr>
+              <a:t>j++</a:t>
+            </a:r>
+            <a:r>
+              <a:rPr lang="en-US" sz="2400" dirty="0">
+                <a:latin typeface="Courier New" panose="02070309020205020404" pitchFamily="49" charset="0"/>
+                <a:cs typeface="Courier New" panose="02070309020205020404" pitchFamily="49" charset="0"/>
+              </a:rPr>
+              <a:t>)</a:t>
+            </a:r>
+          </a:p>
+          <a:p>
+            <a:pPr marL="0" indent="0">
+              <a:buNone/>
+            </a:pPr>
+            <a:r>
+              <a:rPr lang="nl-NL" sz="2400" dirty="0">
+                <a:latin typeface="Courier New" panose="02070309020205020404" pitchFamily="49" charset="0"/>
+                <a:cs typeface="Courier New" panose="02070309020205020404" pitchFamily="49" charset="0"/>
+              </a:rPr>
+              <a:t>	 {</a:t>
+            </a:r>
+          </a:p>
+          <a:p>
+            <a:pPr marL="0" indent="0">
+              <a:buNone/>
+            </a:pPr>
+            <a:r>
+              <a:rPr lang="nl-NL" sz="2400" dirty="0">
+                <a:latin typeface="Courier New" panose="02070309020205020404" pitchFamily="49" charset="0"/>
+                <a:cs typeface="Courier New" panose="02070309020205020404" pitchFamily="49" charset="0"/>
+              </a:rPr>
+              <a:t>		</a:t>
+            </a:r>
+            <a:r>
+              <a:rPr lang="nl-NL" sz="2400" b="1" dirty="0">
+                <a:latin typeface="Courier New" panose="02070309020205020404" pitchFamily="49" charset="0"/>
+                <a:cs typeface="Courier New" panose="02070309020205020404" pitchFamily="49" charset="0"/>
+              </a:rPr>
+              <a:t>Vector3Int</a:t>
+            </a:r>
+            <a:r>
+              <a:rPr lang="nl-NL" sz="2400" dirty="0">
+                <a:latin typeface="Courier New" panose="02070309020205020404" pitchFamily="49" charset="0"/>
+                <a:cs typeface="Courier New" panose="02070309020205020404" pitchFamily="49" charset="0"/>
+              </a:rPr>
+              <a:t> pos = new Vector3Int(i, j, 0);</a:t>
+            </a:r>
+          </a:p>
+          <a:p>
+            <a:pPr marL="0" indent="0">
+              <a:buNone/>
+            </a:pPr>
+            <a:r>
+              <a:rPr lang="nl-NL" sz="2400" dirty="0">
+                <a:latin typeface="Courier New" panose="02070309020205020404" pitchFamily="49" charset="0"/>
+                <a:cs typeface="Courier New" panose="02070309020205020404" pitchFamily="49" charset="0"/>
+              </a:rPr>
+              <a:t>	}</a:t>
+            </a:r>
+          </a:p>
+          <a:p>
+            <a:pPr marL="0" indent="0">
+              <a:buNone/>
+            </a:pPr>
+            <a:r>
+              <a:rPr lang="nl-NL" sz="2400" dirty="0">
+                <a:latin typeface="Courier New" panose="02070309020205020404" pitchFamily="49" charset="0"/>
+                <a:cs typeface="Courier New" panose="02070309020205020404" pitchFamily="49" charset="0"/>
+              </a:rPr>
+              <a:t>}</a:t>
+            </a:r>
+          </a:p>
+        </p:txBody>
+      </p:sp>
+    </p:spTree>
+    <p:extLst>
+      <p:ext uri="{BB962C8B-B14F-4D97-AF65-F5344CB8AC3E}">
+        <p14:creationId xmlns:p14="http://schemas.microsoft.com/office/powerpoint/2010/main" val="786513594"/>
+      </p:ext>
+    </p:extLst>
+  </p:cSld>
+  <p:clrMapOvr>
+    <a:masterClrMapping/>
+  </p:clrMapOvr>
+</p:sld>
+</file>
+
 <file path=ppt/slides/slide8.xml><?xml version="1.0" encoding="utf-8"?>
 <p:sld xmlns:a="http://schemas.openxmlformats.org/drawingml/2006/main" xmlns:r="http://schemas.openxmlformats.org/officeDocument/2006/relationships" xmlns:p="http://schemas.openxmlformats.org/presentationml/2006/main">
   <p:cSld>
@@ -7459,10 +6556,10 @@
       </p:grpSpPr>
       <p:sp>
         <p:nvSpPr>
-          <p:cNvPr id="4" name="Titel 3">
-            <a:extLst>
-              <a:ext uri="{FF2B5EF4-FFF2-40B4-BE49-F238E27FC236}">
-                <a16:creationId xmlns:a16="http://schemas.microsoft.com/office/drawing/2014/main" id="{D0E6194B-3C49-6719-D0E3-25D816093F6F}"/>
+          <p:cNvPr id="2" name="Titel 1">
+            <a:extLst>
+              <a:ext uri="{FF2B5EF4-FFF2-40B4-BE49-F238E27FC236}">
+                <a16:creationId xmlns:a16="http://schemas.microsoft.com/office/drawing/2014/main" id="{2D27ED14-CDC6-93A9-CE11-A43635FE703F}"/>
               </a:ext>
             </a:extLst>
           </p:cNvPr>
@@ -7479,12 +6576,8 @@
           <a:lstStyle/>
           <a:p>
             <a:r>
-              <a:rPr lang="en-US" dirty="0"/>
-              <a:t>De </a:t>
-            </a:r>
-            <a:r>
               <a:rPr lang="en-US" dirty="0" err="1"/>
-              <a:t>cellBounds</a:t>
+              <a:t>Opdracht</a:t>
             </a:r>
             <a:endParaRPr lang="nl-NL" dirty="0"/>
           </a:p>
@@ -7492,452 +6585,170 @@
       </p:sp>
       <p:sp>
         <p:nvSpPr>
-          <p:cNvPr id="5" name="Tijdelijke aanduiding voor inhoud 4">
-            <a:extLst>
-              <a:ext uri="{FF2B5EF4-FFF2-40B4-BE49-F238E27FC236}">
-                <a16:creationId xmlns:a16="http://schemas.microsoft.com/office/drawing/2014/main" id="{2152DD7D-C7CB-F280-A447-595B9AB8891F}"/>
-              </a:ext>
-            </a:extLst>
-          </p:cNvPr>
-          <p:cNvSpPr>
-            <a:spLocks noGrp="1"/>
-          </p:cNvSpPr>
-          <p:nvPr>
-            <p:ph idx="1"/>
-          </p:nvPr>
-        </p:nvSpPr>
-        <p:spPr>
-          <a:solidFill>
-            <a:schemeClr val="bg1">
-              <a:lumMod val="85000"/>
-            </a:schemeClr>
-          </a:solidFill>
-        </p:spPr>
+          <p:cNvPr id="3" name="Tijdelijke aanduiding voor inhoud 2">
+            <a:extLst>
+              <a:ext uri="{FF2B5EF4-FFF2-40B4-BE49-F238E27FC236}">
+                <a16:creationId xmlns:a16="http://schemas.microsoft.com/office/drawing/2014/main" id="{DBD3B470-FCAE-284D-5F76-F0ACFAE01287}"/>
+              </a:ext>
+            </a:extLst>
+          </p:cNvPr>
+          <p:cNvSpPr>
+            <a:spLocks noGrp="1"/>
+          </p:cNvSpPr>
+          <p:nvPr>
+            <p:ph type="body" idx="1"/>
+          </p:nvPr>
+        </p:nvSpPr>
+        <p:spPr/>
         <p:txBody>
           <a:bodyPr>
             <a:normAutofit lnSpcReduction="10000"/>
           </a:bodyPr>
           <a:lstStyle/>
           <a:p>
-            <a:pPr marL="0" indent="0">
-              <a:buNone/>
+            <a:r>
+              <a:rPr lang="en-US" dirty="0" err="1"/>
+              <a:t>Itereer</a:t>
+            </a:r>
+            <a:r>
+              <a:rPr lang="en-US" dirty="0"/>
+              <a:t> </a:t>
+            </a:r>
+            <a:r>
+              <a:rPr lang="en-US" dirty="0" err="1"/>
+              <a:t>bij</a:t>
+            </a:r>
+            <a:r>
+              <a:rPr lang="en-US" dirty="0"/>
+              <a:t> </a:t>
+            </a:r>
+            <a:r>
+              <a:rPr lang="en-US" dirty="0" err="1"/>
+              <a:t>een</a:t>
+            </a:r>
+            <a:r>
+              <a:rPr lang="en-US" dirty="0"/>
+              <a:t> </a:t>
+            </a:r>
+            <a:r>
+              <a:rPr lang="en-US" dirty="0" err="1"/>
+              <a:t>muisklik</a:t>
+            </a:r>
+            <a:r>
+              <a:rPr lang="en-US" dirty="0"/>
+              <a:t> door de </a:t>
+            </a:r>
+            <a:r>
+              <a:rPr lang="en-US" dirty="0" err="1"/>
+              <a:t>tilemap</a:t>
+            </a:r>
+            <a:r>
+              <a:rPr lang="en-US" dirty="0"/>
+              <a:t> </a:t>
+            </a:r>
+            <a:r>
+              <a:rPr lang="en-US" dirty="0" err="1"/>
+              <a:t>en</a:t>
+            </a:r>
+            <a:endParaRPr lang="en-US" dirty="0"/>
+          </a:p>
+          <a:p>
+            <a:pPr marL="800100" lvl="1" indent="-342900">
+              <a:buFont typeface="Arial" panose="020B0604020202020204" pitchFamily="34" charset="0"/>
+              <a:buChar char="•"/>
             </a:pPr>
             <a:r>
-              <a:rPr lang="nl-NL" dirty="0">
-                <a:latin typeface="Courier New" panose="02070309020205020404" pitchFamily="49" charset="0"/>
-                <a:cs typeface="Courier New" panose="02070309020205020404" pitchFamily="49" charset="0"/>
-              </a:rPr>
-              <a:t> [</a:t>
-            </a:r>
-            <a:r>
-              <a:rPr lang="nl-NL" dirty="0" err="1">
-                <a:latin typeface="Courier New" panose="02070309020205020404" pitchFamily="49" charset="0"/>
-                <a:cs typeface="Courier New" panose="02070309020205020404" pitchFamily="49" charset="0"/>
-              </a:rPr>
-              <a:t>SerializeField</a:t>
-            </a:r>
-            <a:r>
-              <a:rPr lang="nl-NL" dirty="0">
-                <a:latin typeface="Courier New" panose="02070309020205020404" pitchFamily="49" charset="0"/>
-                <a:cs typeface="Courier New" panose="02070309020205020404" pitchFamily="49" charset="0"/>
-              </a:rPr>
-              <a:t>] </a:t>
-            </a:r>
-            <a:r>
-              <a:rPr lang="nl-NL" b="1" dirty="0" err="1">
-                <a:latin typeface="Courier New" panose="02070309020205020404" pitchFamily="49" charset="0"/>
-                <a:cs typeface="Courier New" panose="02070309020205020404" pitchFamily="49" charset="0"/>
-              </a:rPr>
-              <a:t>Tilemap</a:t>
-            </a:r>
-            <a:r>
-              <a:rPr lang="nl-NL" dirty="0">
-                <a:latin typeface="Courier New" panose="02070309020205020404" pitchFamily="49" charset="0"/>
-                <a:cs typeface="Courier New" panose="02070309020205020404" pitchFamily="49" charset="0"/>
-              </a:rPr>
+              <a:rPr lang="en-US" dirty="0" err="1"/>
+              <a:t>kleur</a:t>
+            </a:r>
+            <a:r>
+              <a:rPr lang="en-US" dirty="0"/>
+              <a:t> de cell die de </a:t>
+            </a:r>
+            <a:r>
+              <a:rPr lang="en-US" dirty="0" err="1"/>
+              <a:t>muis</a:t>
+            </a:r>
+            <a:r>
+              <a:rPr lang="en-US" dirty="0"/>
               <a:t> </a:t>
             </a:r>
             <a:r>
-              <a:rPr lang="nl-NL" dirty="0" err="1">
-                <a:latin typeface="Courier New" panose="02070309020205020404" pitchFamily="49" charset="0"/>
-                <a:cs typeface="Courier New" panose="02070309020205020404" pitchFamily="49" charset="0"/>
-              </a:rPr>
-              <a:t>myTilemap</a:t>
-            </a:r>
-            <a:r>
-              <a:rPr lang="nl-NL" dirty="0">
-                <a:latin typeface="Courier New" panose="02070309020205020404" pitchFamily="49" charset="0"/>
-                <a:cs typeface="Courier New" panose="02070309020205020404" pitchFamily="49" charset="0"/>
-              </a:rPr>
-              <a:t>;</a:t>
-            </a:r>
-          </a:p>
-          <a:p>
-            <a:pPr marL="0" indent="0">
-              <a:buNone/>
+              <a:rPr lang="en-US" dirty="0" err="1"/>
+              <a:t>aanwijst</a:t>
+            </a:r>
+            <a:r>
+              <a:rPr lang="en-US" dirty="0"/>
+              <a:t> rood</a:t>
+            </a:r>
+          </a:p>
+          <a:p>
+            <a:pPr marL="800100" lvl="1" indent="-342900">
+              <a:buFont typeface="Arial" panose="020B0604020202020204" pitchFamily="34" charset="0"/>
+              <a:buChar char="•"/>
             </a:pPr>
-            <a:endParaRPr lang="nl-NL" dirty="0">
-              <a:latin typeface="Courier New" panose="02070309020205020404" pitchFamily="49" charset="0"/>
-              <a:cs typeface="Courier New" panose="02070309020205020404" pitchFamily="49" charset="0"/>
-            </a:endParaRPr>
-          </a:p>
-          <a:p>
-            <a:pPr marL="0" indent="0">
-              <a:buNone/>
-            </a:pPr>
-            <a:r>
-              <a:rPr lang="nl-NL" dirty="0">
-                <a:latin typeface="Courier New" panose="02070309020205020404" pitchFamily="49" charset="0"/>
-                <a:cs typeface="Courier New" panose="02070309020205020404" pitchFamily="49" charset="0"/>
-              </a:rPr>
-              <a:t>    </a:t>
-            </a:r>
-            <a:r>
-              <a:rPr lang="nl-NL" b="1" dirty="0" err="1">
-                <a:latin typeface="Courier New" panose="02070309020205020404" pitchFamily="49" charset="0"/>
-                <a:cs typeface="Courier New" panose="02070309020205020404" pitchFamily="49" charset="0"/>
-              </a:rPr>
-              <a:t>BoundsInt</a:t>
-            </a:r>
-            <a:r>
-              <a:rPr lang="nl-NL" dirty="0">
-                <a:latin typeface="Courier New" panose="02070309020205020404" pitchFamily="49" charset="0"/>
-                <a:cs typeface="Courier New" panose="02070309020205020404" pitchFamily="49" charset="0"/>
-              </a:rPr>
+            <a:r>
+              <a:rPr lang="en-US" dirty="0" err="1"/>
+              <a:t>kleur</a:t>
+            </a:r>
+            <a:r>
+              <a:rPr lang="en-US" dirty="0"/>
+              <a:t> alle </a:t>
+            </a:r>
+            <a:r>
+              <a:rPr lang="en-US" dirty="0" err="1"/>
+              <a:t>andere</a:t>
+            </a:r>
+            <a:r>
+              <a:rPr lang="en-US" dirty="0"/>
               <a:t> </a:t>
             </a:r>
             <a:r>
-              <a:rPr lang="nl-NL" dirty="0" err="1">
-                <a:latin typeface="Courier New" panose="02070309020205020404" pitchFamily="49" charset="0"/>
-                <a:cs typeface="Courier New" panose="02070309020205020404" pitchFamily="49" charset="0"/>
-              </a:rPr>
-              <a:t>bounds</a:t>
-            </a:r>
-            <a:r>
-              <a:rPr lang="nl-NL" dirty="0">
-                <a:latin typeface="Courier New" panose="02070309020205020404" pitchFamily="49" charset="0"/>
-                <a:cs typeface="Courier New" panose="02070309020205020404" pitchFamily="49" charset="0"/>
-              </a:rPr>
-              <a:t>;</a:t>
-            </a:r>
-          </a:p>
-          <a:p>
-            <a:pPr marL="0" indent="0">
-              <a:buNone/>
-            </a:pPr>
-            <a:r>
-              <a:rPr lang="nl-NL" dirty="0">
-                <a:latin typeface="Courier New" panose="02070309020205020404" pitchFamily="49" charset="0"/>
-                <a:cs typeface="Courier New" panose="02070309020205020404" pitchFamily="49" charset="0"/>
-              </a:rPr>
-              <a:t>    </a:t>
-            </a:r>
-          </a:p>
-          <a:p>
-            <a:pPr marL="0" indent="0">
-              <a:buNone/>
-            </a:pPr>
-            <a:r>
-              <a:rPr lang="nl-NL" dirty="0" err="1">
-                <a:latin typeface="Courier New" panose="02070309020205020404" pitchFamily="49" charset="0"/>
-                <a:cs typeface="Courier New" panose="02070309020205020404" pitchFamily="49" charset="0"/>
-              </a:rPr>
-              <a:t>void</a:t>
-            </a:r>
-            <a:r>
-              <a:rPr lang="nl-NL" dirty="0">
-                <a:latin typeface="Courier New" panose="02070309020205020404" pitchFamily="49" charset="0"/>
-                <a:cs typeface="Courier New" panose="02070309020205020404" pitchFamily="49" charset="0"/>
-              </a:rPr>
-              <a:t> Start()</a:t>
-            </a:r>
-          </a:p>
-          <a:p>
-            <a:pPr marL="0" indent="0">
-              <a:buNone/>
-            </a:pPr>
-            <a:r>
-              <a:rPr lang="nl-NL" dirty="0">
-                <a:latin typeface="Courier New" panose="02070309020205020404" pitchFamily="49" charset="0"/>
-                <a:cs typeface="Courier New" panose="02070309020205020404" pitchFamily="49" charset="0"/>
-              </a:rPr>
-              <a:t>    {</a:t>
-            </a:r>
-          </a:p>
-          <a:p>
-            <a:pPr marL="0" indent="0">
-              <a:buNone/>
-            </a:pPr>
-            <a:r>
-              <a:rPr lang="nl-NL" dirty="0">
-                <a:latin typeface="Courier New" panose="02070309020205020404" pitchFamily="49" charset="0"/>
-                <a:cs typeface="Courier New" panose="02070309020205020404" pitchFamily="49" charset="0"/>
-              </a:rPr>
-              <a:t>        </a:t>
-            </a:r>
-            <a:r>
-              <a:rPr lang="nl-NL" dirty="0" err="1">
-                <a:latin typeface="Courier New" panose="02070309020205020404" pitchFamily="49" charset="0"/>
-                <a:cs typeface="Courier New" panose="02070309020205020404" pitchFamily="49" charset="0"/>
-              </a:rPr>
-              <a:t>bounds</a:t>
-            </a:r>
-            <a:r>
-              <a:rPr lang="nl-NL" dirty="0">
-                <a:latin typeface="Courier New" panose="02070309020205020404" pitchFamily="49" charset="0"/>
-                <a:cs typeface="Courier New" panose="02070309020205020404" pitchFamily="49" charset="0"/>
-              </a:rPr>
-              <a:t> = </a:t>
-            </a:r>
-            <a:r>
-              <a:rPr lang="nl-NL" dirty="0" err="1">
-                <a:latin typeface="Courier New" panose="02070309020205020404" pitchFamily="49" charset="0"/>
-                <a:cs typeface="Courier New" panose="02070309020205020404" pitchFamily="49" charset="0"/>
-              </a:rPr>
-              <a:t>myTilemap.cellBounds</a:t>
-            </a:r>
-            <a:r>
-              <a:rPr lang="nl-NL" dirty="0">
-                <a:latin typeface="Courier New" panose="02070309020205020404" pitchFamily="49" charset="0"/>
-                <a:cs typeface="Courier New" panose="02070309020205020404" pitchFamily="49" charset="0"/>
-              </a:rPr>
-              <a:t>;</a:t>
-            </a:r>
-          </a:p>
-          <a:p>
-            <a:pPr marL="0" indent="0">
-              <a:buNone/>
-            </a:pPr>
-            <a:r>
-              <a:rPr lang="nl-NL" dirty="0">
-                <a:latin typeface="Courier New" panose="02070309020205020404" pitchFamily="49" charset="0"/>
-                <a:cs typeface="Courier New" panose="02070309020205020404" pitchFamily="49" charset="0"/>
-              </a:rPr>
-              <a:t>        </a:t>
-            </a:r>
-            <a:r>
-              <a:rPr lang="nl-NL" dirty="0" err="1">
-                <a:latin typeface="Courier New" panose="02070309020205020404" pitchFamily="49" charset="0"/>
-                <a:cs typeface="Courier New" panose="02070309020205020404" pitchFamily="49" charset="0"/>
-              </a:rPr>
-              <a:t>Debug.Log</a:t>
-            </a:r>
-            <a:r>
-              <a:rPr lang="nl-NL" dirty="0">
-                <a:latin typeface="Courier New" panose="02070309020205020404" pitchFamily="49" charset="0"/>
-                <a:cs typeface="Courier New" panose="02070309020205020404" pitchFamily="49" charset="0"/>
-              </a:rPr>
-              <a:t>(</a:t>
-            </a:r>
-            <a:r>
-              <a:rPr lang="nl-NL" dirty="0" err="1">
-                <a:latin typeface="Courier New" panose="02070309020205020404" pitchFamily="49" charset="0"/>
-                <a:cs typeface="Courier New" panose="02070309020205020404" pitchFamily="49" charset="0"/>
-              </a:rPr>
-              <a:t>bounds</a:t>
-            </a:r>
-            <a:r>
-              <a:rPr lang="nl-NL" dirty="0">
-                <a:latin typeface="Courier New" panose="02070309020205020404" pitchFamily="49" charset="0"/>
-                <a:cs typeface="Courier New" panose="02070309020205020404" pitchFamily="49" charset="0"/>
-              </a:rPr>
-              <a:t>);</a:t>
-            </a:r>
-          </a:p>
-          <a:p>
-            <a:pPr marL="0" indent="0">
-              <a:buNone/>
-            </a:pPr>
-            <a:r>
-              <a:rPr lang="nl-NL" dirty="0">
-                <a:latin typeface="Courier New" panose="02070309020205020404" pitchFamily="49" charset="0"/>
-                <a:cs typeface="Courier New" panose="02070309020205020404" pitchFamily="49" charset="0"/>
-              </a:rPr>
-              <a:t>    }</a:t>
-            </a:r>
-          </a:p>
-        </p:txBody>
-      </p:sp>
-      <p:pic>
-        <p:nvPicPr>
-          <p:cNvPr id="7" name="Afbeelding 6">
-            <a:extLst>
-              <a:ext uri="{FF2B5EF4-FFF2-40B4-BE49-F238E27FC236}">
-                <a16:creationId xmlns:a16="http://schemas.microsoft.com/office/drawing/2014/main" id="{AA7C7541-79CF-D833-CCE4-536CAB93CA9A}"/>
-              </a:ext>
-            </a:extLst>
-          </p:cNvPr>
-          <p:cNvPicPr>
-            <a:picLocks noChangeAspect="1"/>
-          </p:cNvPicPr>
-          <p:nvPr/>
-        </p:nvPicPr>
-        <p:blipFill>
-          <a:blip r:embed="rId2"/>
-          <a:stretch>
-            <a:fillRect/>
-          </a:stretch>
-        </p:blipFill>
-        <p:spPr>
-          <a:xfrm>
-            <a:off x="7398784" y="5307249"/>
-            <a:ext cx="4534533" cy="1457528"/>
-          </a:xfrm>
-          <a:prstGeom prst="rect">
-            <a:avLst/>
-          </a:prstGeom>
-        </p:spPr>
-      </p:pic>
+              <a:rPr lang="en-US" dirty="0" err="1"/>
+              <a:t>cellen</a:t>
+            </a:r>
+            <a:r>
+              <a:rPr lang="en-US" dirty="0"/>
+              <a:t> (die </a:t>
+            </a:r>
+            <a:r>
+              <a:rPr lang="en-US" dirty="0" err="1"/>
+              <a:t>niet</a:t>
+            </a:r>
+            <a:r>
+              <a:rPr lang="en-US" dirty="0"/>
+              <a:t> </a:t>
+            </a:r>
+            <a:r>
+              <a:rPr lang="en-US" dirty="0" err="1"/>
+              <a:t>aangewezen</a:t>
+            </a:r>
+            <a:r>
+              <a:rPr lang="en-US" dirty="0"/>
+              <a:t> </a:t>
+            </a:r>
+            <a:r>
+              <a:rPr lang="en-US" dirty="0" err="1"/>
+              <a:t>worden</a:t>
+            </a:r>
+            <a:r>
+              <a:rPr lang="en-US" dirty="0"/>
+              <a:t>) wit</a:t>
+            </a:r>
+          </a:p>
+          <a:p>
+            <a:r>
+              <a:rPr lang="en-US" dirty="0"/>
+              <a:t>	</a:t>
+            </a:r>
+            <a:endParaRPr lang="nl-NL" dirty="0"/>
+          </a:p>
+        </p:txBody>
+      </p:sp>
     </p:spTree>
     <p:extLst>
       <p:ext uri="{BB962C8B-B14F-4D97-AF65-F5344CB8AC3E}">
-        <p14:creationId xmlns:p14="http://schemas.microsoft.com/office/powerpoint/2010/main" val="2545989669"/>
-      </p:ext>
-    </p:extLst>
-  </p:cSld>
-  <p:clrMapOvr>
-    <a:masterClrMapping/>
-  </p:clrMapOvr>
-</p:sld>
-</file>
-
-<file path=ppt/slides/slide9.xml><?xml version="1.0" encoding="utf-8"?>
-<p:sld xmlns:a="http://schemas.openxmlformats.org/drawingml/2006/main" xmlns:r="http://schemas.openxmlformats.org/officeDocument/2006/relationships" xmlns:p="http://schemas.openxmlformats.org/presentationml/2006/main">
-  <p:cSld>
-    <p:spTree>
-      <p:nvGrpSpPr>
-        <p:cNvPr id="1" name="">
-          <a:extLst>
-            <a:ext uri="{FF2B5EF4-FFF2-40B4-BE49-F238E27FC236}">
-              <a16:creationId xmlns:a16="http://schemas.microsoft.com/office/drawing/2014/main" id="{55DA3EF3-E0B4-7908-EFFC-0F430D71A5B8}"/>
-            </a:ext>
-          </a:extLst>
-        </p:cNvPr>
-        <p:cNvGrpSpPr/>
-        <p:nvPr/>
-      </p:nvGrpSpPr>
-      <p:grpSpPr>
-        <a:xfrm>
-          <a:off x="0" y="0"/>
-          <a:ext cx="0" cy="0"/>
-          <a:chOff x="0" y="0"/>
-          <a:chExt cx="0" cy="0"/>
-        </a:xfrm>
-      </p:grpSpPr>
-      <p:sp>
-        <p:nvSpPr>
-          <p:cNvPr id="2" name="Titel 1">
-            <a:extLst>
-              <a:ext uri="{FF2B5EF4-FFF2-40B4-BE49-F238E27FC236}">
-                <a16:creationId xmlns:a16="http://schemas.microsoft.com/office/drawing/2014/main" id="{BE411CBB-16F0-EF8C-AB9D-4942AAB78262}"/>
-              </a:ext>
-            </a:extLst>
-          </p:cNvPr>
-          <p:cNvSpPr>
-            <a:spLocks noGrp="1"/>
-          </p:cNvSpPr>
-          <p:nvPr>
-            <p:ph type="title"/>
-          </p:nvPr>
-        </p:nvSpPr>
-        <p:spPr/>
-        <p:txBody>
-          <a:bodyPr/>
-          <a:lstStyle/>
-          <a:p>
-            <a:r>
-              <a:rPr lang="en-US" dirty="0" err="1"/>
-              <a:t>Opdracht</a:t>
-            </a:r>
-            <a:r>
-              <a:rPr lang="en-US" dirty="0"/>
-              <a:t> 2</a:t>
-            </a:r>
-            <a:endParaRPr lang="nl-NL" dirty="0"/>
-          </a:p>
-        </p:txBody>
-      </p:sp>
-      <p:sp>
-        <p:nvSpPr>
-          <p:cNvPr id="3" name="Tijdelijke aanduiding voor inhoud 2">
-            <a:extLst>
-              <a:ext uri="{FF2B5EF4-FFF2-40B4-BE49-F238E27FC236}">
-                <a16:creationId xmlns:a16="http://schemas.microsoft.com/office/drawing/2014/main" id="{FBD413E2-DE23-14D8-BC46-69BD3C956E91}"/>
-              </a:ext>
-            </a:extLst>
-          </p:cNvPr>
-          <p:cNvSpPr>
-            <a:spLocks noGrp="1"/>
-          </p:cNvSpPr>
-          <p:nvPr>
-            <p:ph type="body" idx="1"/>
-          </p:nvPr>
-        </p:nvSpPr>
-        <p:spPr/>
-        <p:txBody>
-          <a:bodyPr/>
-          <a:lstStyle/>
-          <a:p>
-            <a:r>
-              <a:rPr lang="en-US" dirty="0" err="1"/>
-              <a:t>Geef</a:t>
-            </a:r>
-            <a:r>
-              <a:rPr lang="en-US" dirty="0"/>
-              <a:t> de cell die </a:t>
-            </a:r>
-            <a:r>
-              <a:rPr lang="en-US" dirty="0" err="1"/>
-              <a:t>aangewezen</a:t>
-            </a:r>
-            <a:r>
-              <a:rPr lang="en-US" dirty="0"/>
-              <a:t> </a:t>
-            </a:r>
-            <a:r>
-              <a:rPr lang="en-US" dirty="0" err="1"/>
-              <a:t>wordt</a:t>
-            </a:r>
-            <a:r>
-              <a:rPr lang="en-US" dirty="0"/>
-              <a:t> met de </a:t>
-            </a:r>
-            <a:r>
-              <a:rPr lang="en-US" dirty="0" err="1"/>
-              <a:t>muis</a:t>
-            </a:r>
-            <a:r>
-              <a:rPr lang="en-US" dirty="0"/>
-              <a:t> </a:t>
-            </a:r>
-            <a:r>
-              <a:rPr lang="en-US" dirty="0" err="1"/>
-              <a:t>een</a:t>
-            </a:r>
-            <a:r>
-              <a:rPr lang="en-US" dirty="0"/>
-              <a:t> </a:t>
-            </a:r>
-            <a:r>
-              <a:rPr lang="en-US" dirty="0" err="1"/>
-              <a:t>andere</a:t>
-            </a:r>
-            <a:r>
-              <a:rPr lang="en-US" dirty="0"/>
-              <a:t> </a:t>
-            </a:r>
-            <a:r>
-              <a:rPr lang="en-US" dirty="0" err="1"/>
-              <a:t>kleur</a:t>
-            </a:r>
-            <a:endParaRPr lang="nl-NL" dirty="0"/>
-          </a:p>
-        </p:txBody>
-      </p:sp>
-    </p:spTree>
-    <p:extLst>
-      <p:ext uri="{BB962C8B-B14F-4D97-AF65-F5344CB8AC3E}">
-        <p14:creationId xmlns:p14="http://schemas.microsoft.com/office/powerpoint/2010/main" val="919530093"/>
+        <p14:creationId xmlns:p14="http://schemas.microsoft.com/office/powerpoint/2010/main" val="13667862"/>
       </p:ext>
     </p:extLst>
   </p:cSld>
@@ -8263,14 +7074,6 @@
 </file>
 
 <file path=customXml/item1.xml><?xml version="1.0" encoding="utf-8"?>
-<p:properties xmlns:p="http://schemas.microsoft.com/office/2006/metadata/properties" xmlns:xsi="http://www.w3.org/2001/XMLSchema-instance" xmlns:pc="http://schemas.microsoft.com/office/infopath/2007/PartnerControls">
-  <documentManagement>
-    <_activity xmlns="0ea95f8c-d148-44ae-916f-e4fae07bb092" xsi:nil="true"/>
-  </documentManagement>
-</p:properties>
-</file>
-
-<file path=customXml/item2.xml><?xml version="1.0" encoding="utf-8"?>
 <ct:contentTypeSchema xmlns:ct="http://schemas.microsoft.com/office/2006/metadata/contentType" xmlns:ma="http://schemas.microsoft.com/office/2006/metadata/properties/metaAttributes" ct:_="" ma:_="" ma:contentTypeName="Document" ma:contentTypeID="0x0101003D382338EF70044D9C062BABC4AAC4F2" ma:contentTypeVersion="18" ma:contentTypeDescription="Een nieuw document maken." ma:contentTypeScope="" ma:versionID="1e53bdee3ced94a1d85284f686879e7d">
   <xsd:schema xmlns:xsd="http://www.w3.org/2001/XMLSchema" xmlns:xs="http://www.w3.org/2001/XMLSchema" xmlns:p="http://schemas.microsoft.com/office/2006/metadata/properties" xmlns:ns3="07db6276-f26f-4be5-81e0-f9ee6746fca8" xmlns:ns4="0ea95f8c-d148-44ae-916f-e4fae07bb092" targetNamespace="http://schemas.microsoft.com/office/2006/metadata/properties" ma:root="true" ma:fieldsID="4f339d748e41cee103f7abe631a1b5e5" ns3:_="" ns4:_="">
     <xsd:import namespace="07db6276-f26f-4be5-81e0-f9ee6746fca8"/>
@@ -8523,6 +7326,14 @@
 </ct:contentTypeSchema>
 </file>
 
+<file path=customXml/item2.xml><?xml version="1.0" encoding="utf-8"?>
+<p:properties xmlns:p="http://schemas.microsoft.com/office/2006/metadata/properties" xmlns:xsi="http://www.w3.org/2001/XMLSchema-instance" xmlns:pc="http://schemas.microsoft.com/office/infopath/2007/PartnerControls">
+  <documentManagement>
+    <_activity xmlns="0ea95f8c-d148-44ae-916f-e4fae07bb092" xsi:nil="true"/>
+  </documentManagement>
+</p:properties>
+</file>
+
 <file path=customXml/item3.xml><?xml version="1.0" encoding="utf-8"?>
 <?mso-contentType ?>
 <FormTemplates xmlns="http://schemas.microsoft.com/sharepoint/v3/contenttype/forms">
@@ -8533,23 +7344,6 @@
 </file>
 
 <file path=customXml/itemProps1.xml><?xml version="1.0" encoding="utf-8"?>
-<ds:datastoreItem xmlns:ds="http://schemas.openxmlformats.org/officeDocument/2006/customXml" ds:itemID="{4AE02E84-4242-4C95-906B-10487FB4E1EE}">
-  <ds:schemaRefs>
-    <ds:schemaRef ds:uri="http://purl.org/dc/elements/1.1/"/>
-    <ds:schemaRef ds:uri="http://purl.org/dc/dcmitype/"/>
-    <ds:schemaRef ds:uri="http://schemas.microsoft.com/office/2006/metadata/properties"/>
-    <ds:schemaRef ds:uri="http://schemas.microsoft.com/office/2006/documentManagement/types"/>
-    <ds:schemaRef ds:uri="07db6276-f26f-4be5-81e0-f9ee6746fca8"/>
-    <ds:schemaRef ds:uri="http://schemas.microsoft.com/office/infopath/2007/PartnerControls"/>
-    <ds:schemaRef ds:uri="http://schemas.openxmlformats.org/package/2006/metadata/core-properties"/>
-    <ds:schemaRef ds:uri="0ea95f8c-d148-44ae-916f-e4fae07bb092"/>
-    <ds:schemaRef ds:uri="http://www.w3.org/XML/1998/namespace"/>
-    <ds:schemaRef ds:uri="http://purl.org/dc/terms/"/>
-  </ds:schemaRefs>
-</ds:datastoreItem>
-</file>
-
-<file path=customXml/itemProps2.xml><?xml version="1.0" encoding="utf-8"?>
 <ds:datastoreItem xmlns:ds="http://schemas.openxmlformats.org/officeDocument/2006/customXml" ds:itemID="{17E89673-DD47-4BE7-84CC-D4AA7D41630F}">
   <ds:schemaRefs>
     <ds:schemaRef ds:uri="http://schemas.microsoft.com/office/2006/metadata/contentType"/>
@@ -8568,6 +7362,23 @@
 </ds:datastoreItem>
 </file>
 
+<file path=customXml/itemProps2.xml><?xml version="1.0" encoding="utf-8"?>
+<ds:datastoreItem xmlns:ds="http://schemas.openxmlformats.org/officeDocument/2006/customXml" ds:itemID="{4AE02E84-4242-4C95-906B-10487FB4E1EE}">
+  <ds:schemaRefs>
+    <ds:schemaRef ds:uri="http://purl.org/dc/elements/1.1/"/>
+    <ds:schemaRef ds:uri="http://purl.org/dc/dcmitype/"/>
+    <ds:schemaRef ds:uri="http://schemas.microsoft.com/office/2006/metadata/properties"/>
+    <ds:schemaRef ds:uri="http://schemas.microsoft.com/office/2006/documentManagement/types"/>
+    <ds:schemaRef ds:uri="07db6276-f26f-4be5-81e0-f9ee6746fca8"/>
+    <ds:schemaRef ds:uri="http://schemas.microsoft.com/office/infopath/2007/PartnerControls"/>
+    <ds:schemaRef ds:uri="http://schemas.openxmlformats.org/package/2006/metadata/core-properties"/>
+    <ds:schemaRef ds:uri="0ea95f8c-d148-44ae-916f-e4fae07bb092"/>
+    <ds:schemaRef ds:uri="http://www.w3.org/XML/1998/namespace"/>
+    <ds:schemaRef ds:uri="http://purl.org/dc/terms/"/>
+  </ds:schemaRefs>
+</ds:datastoreItem>
+</file>
+
 <file path=customXml/itemProps3.xml><?xml version="1.0" encoding="utf-8"?>
 <ds:datastoreItem xmlns:ds="http://schemas.openxmlformats.org/officeDocument/2006/customXml" ds:itemID="{FE951165-B379-4FBD-9FD8-D14F0F4D64C9}">
   <ds:schemaRefs>

--- a/M4/GDV_2D_Gym/les3/gdv-2d-gym-les2.pptx
+++ b/M4/GDV_2D_Gym/les3/gdv-2d-gym-les2.pptx
@@ -6,15 +6,13 @@
   </p:sldMasterIdLst>
   <p:sldIdLst>
     <p:sldId id="256" r:id="rId5"/>
-    <p:sldId id="257" r:id="rId6"/>
-    <p:sldId id="259" r:id="rId7"/>
-    <p:sldId id="260" r:id="rId8"/>
-    <p:sldId id="267" r:id="rId9"/>
-    <p:sldId id="261" r:id="rId10"/>
-    <p:sldId id="258" r:id="rId11"/>
-    <p:sldId id="268" r:id="rId12"/>
-    <p:sldId id="270" r:id="rId13"/>
-    <p:sldId id="269" r:id="rId14"/>
+    <p:sldId id="260" r:id="rId6"/>
+    <p:sldId id="267" r:id="rId7"/>
+    <p:sldId id="261" r:id="rId8"/>
+    <p:sldId id="268" r:id="rId9"/>
+    <p:sldId id="258" r:id="rId10"/>
+    <p:sldId id="270" r:id="rId11"/>
+    <p:sldId id="269" r:id="rId12"/>
   </p:sldIdLst>
   <p:sldSz cx="12192000" cy="6858000"/>
   <p:notesSz cx="6858000" cy="9144000"/>
@@ -270,7 +268,7 @@
           <a:p>
             <a:fld id="{7F6255D4-ABB5-456D-9970-B21DD0297007}" type="datetimeFigureOut">
               <a:rPr lang="en-US" smtClean="0"/>
-              <a:t>5/12/2026</a:t>
+              <a:t>18-May-26</a:t>
             </a:fld>
             <a:endParaRPr lang="en-US"/>
           </a:p>
@@ -470,7 +468,7 @@
           <a:p>
             <a:fld id="{7F6255D4-ABB5-456D-9970-B21DD0297007}" type="datetimeFigureOut">
               <a:rPr lang="en-US" smtClean="0"/>
-              <a:t>5/12/2026</a:t>
+              <a:t>18-May-26</a:t>
             </a:fld>
             <a:endParaRPr lang="en-US"/>
           </a:p>
@@ -680,7 +678,7 @@
           <a:p>
             <a:fld id="{7F6255D4-ABB5-456D-9970-B21DD0297007}" type="datetimeFigureOut">
               <a:rPr lang="en-US" smtClean="0"/>
-              <a:t>5/12/2026</a:t>
+              <a:t>18-May-26</a:t>
             </a:fld>
             <a:endParaRPr lang="en-US"/>
           </a:p>
@@ -880,7 +878,7 @@
           <a:p>
             <a:fld id="{7F6255D4-ABB5-456D-9970-B21DD0297007}" type="datetimeFigureOut">
               <a:rPr lang="en-US" smtClean="0"/>
-              <a:t>5/12/2026</a:t>
+              <a:t>18-May-26</a:t>
             </a:fld>
             <a:endParaRPr lang="en-US"/>
           </a:p>
@@ -1156,7 +1154,7 @@
           <a:p>
             <a:fld id="{7F6255D4-ABB5-456D-9970-B21DD0297007}" type="datetimeFigureOut">
               <a:rPr lang="en-US" smtClean="0"/>
-              <a:t>5/12/2026</a:t>
+              <a:t>18-May-26</a:t>
             </a:fld>
             <a:endParaRPr lang="en-US"/>
           </a:p>
@@ -1424,7 +1422,7 @@
           <a:p>
             <a:fld id="{7F6255D4-ABB5-456D-9970-B21DD0297007}" type="datetimeFigureOut">
               <a:rPr lang="en-US" smtClean="0"/>
-              <a:t>5/12/2026</a:t>
+              <a:t>18-May-26</a:t>
             </a:fld>
             <a:endParaRPr lang="en-US"/>
           </a:p>
@@ -1839,7 +1837,7 @@
           <a:p>
             <a:fld id="{7F6255D4-ABB5-456D-9970-B21DD0297007}" type="datetimeFigureOut">
               <a:rPr lang="en-US" smtClean="0"/>
-              <a:t>5/12/2026</a:t>
+              <a:t>18-May-26</a:t>
             </a:fld>
             <a:endParaRPr lang="en-US"/>
           </a:p>
@@ -1981,7 +1979,7 @@
           <a:p>
             <a:fld id="{7F6255D4-ABB5-456D-9970-B21DD0297007}" type="datetimeFigureOut">
               <a:rPr lang="en-US" smtClean="0"/>
-              <a:t>5/12/2026</a:t>
+              <a:t>18-May-26</a:t>
             </a:fld>
             <a:endParaRPr lang="en-US"/>
           </a:p>
@@ -2094,7 +2092,7 @@
           <a:p>
             <a:fld id="{7F6255D4-ABB5-456D-9970-B21DD0297007}" type="datetimeFigureOut">
               <a:rPr lang="en-US" smtClean="0"/>
-              <a:t>5/12/2026</a:t>
+              <a:t>18-May-26</a:t>
             </a:fld>
             <a:endParaRPr lang="en-US"/>
           </a:p>
@@ -2407,7 +2405,7 @@
           <a:p>
             <a:fld id="{7F6255D4-ABB5-456D-9970-B21DD0297007}" type="datetimeFigureOut">
               <a:rPr lang="en-US" smtClean="0"/>
-              <a:t>5/12/2026</a:t>
+              <a:t>18-May-26</a:t>
             </a:fld>
             <a:endParaRPr lang="en-US"/>
           </a:p>
@@ -2696,7 +2694,7 @@
           <a:p>
             <a:fld id="{7F6255D4-ABB5-456D-9970-B21DD0297007}" type="datetimeFigureOut">
               <a:rPr lang="en-US" smtClean="0"/>
-              <a:t>5/12/2026</a:t>
+              <a:t>18-May-26</a:t>
             </a:fld>
             <a:endParaRPr lang="en-US"/>
           </a:p>
@@ -2939,7 +2937,7 @@
           <a:p>
             <a:fld id="{7F6255D4-ABB5-456D-9970-B21DD0297007}" type="datetimeFigureOut">
               <a:rPr lang="en-US" smtClean="0"/>
-              <a:t>5/12/2026</a:t>
+              <a:t>18-May-26</a:t>
             </a:fld>
             <a:endParaRPr lang="en-US"/>
           </a:p>
@@ -4212,1883 +4210,7 @@
 </p:sld>
 </file>
 
-<file path=ppt/slides/slide10.xml><?xml version="1.0" encoding="utf-8"?>
-<p:sld xmlns:a="http://schemas.openxmlformats.org/drawingml/2006/main" xmlns:r="http://schemas.openxmlformats.org/officeDocument/2006/relationships" xmlns:p="http://schemas.openxmlformats.org/presentationml/2006/main">
-  <p:cSld>
-    <p:spTree>
-      <p:nvGrpSpPr>
-        <p:cNvPr id="1" name=""/>
-        <p:cNvGrpSpPr/>
-        <p:nvPr/>
-      </p:nvGrpSpPr>
-      <p:grpSpPr>
-        <a:xfrm>
-          <a:off x="0" y="0"/>
-          <a:ext cx="0" cy="0"/>
-          <a:chOff x="0" y="0"/>
-          <a:chExt cx="0" cy="0"/>
-        </a:xfrm>
-      </p:grpSpPr>
-      <p:sp>
-        <p:nvSpPr>
-          <p:cNvPr id="2" name="Titel 1">
-            <a:extLst>
-              <a:ext uri="{FF2B5EF4-FFF2-40B4-BE49-F238E27FC236}">
-                <a16:creationId xmlns:a16="http://schemas.microsoft.com/office/drawing/2014/main" id="{FE45CA3E-C9D6-04E4-C92D-157A40F1CBB5}"/>
-              </a:ext>
-            </a:extLst>
-          </p:cNvPr>
-          <p:cNvSpPr>
-            <a:spLocks noGrp="1"/>
-          </p:cNvSpPr>
-          <p:nvPr>
-            <p:ph type="title"/>
-          </p:nvPr>
-        </p:nvSpPr>
-        <p:spPr/>
-        <p:txBody>
-          <a:bodyPr/>
-          <a:lstStyle/>
-          <a:p>
-            <a:endParaRPr lang="nl-NL"/>
-          </a:p>
-        </p:txBody>
-      </p:sp>
-      <p:sp>
-        <p:nvSpPr>
-          <p:cNvPr id="3" name="Tijdelijke aanduiding voor inhoud 2">
-            <a:extLst>
-              <a:ext uri="{FF2B5EF4-FFF2-40B4-BE49-F238E27FC236}">
-                <a16:creationId xmlns:a16="http://schemas.microsoft.com/office/drawing/2014/main" id="{662A7417-122E-94DF-F517-CEF372CF421F}"/>
-              </a:ext>
-            </a:extLst>
-          </p:cNvPr>
-          <p:cNvSpPr>
-            <a:spLocks noGrp="1"/>
-          </p:cNvSpPr>
-          <p:nvPr>
-            <p:ph idx="1"/>
-          </p:nvPr>
-        </p:nvSpPr>
-        <p:spPr/>
-        <p:txBody>
-          <a:bodyPr/>
-          <a:lstStyle/>
-          <a:p>
-            <a:endParaRPr lang="nl-NL"/>
-          </a:p>
-        </p:txBody>
-      </p:sp>
-    </p:spTree>
-    <p:extLst>
-      <p:ext uri="{BB962C8B-B14F-4D97-AF65-F5344CB8AC3E}">
-        <p14:creationId xmlns:p14="http://schemas.microsoft.com/office/powerpoint/2010/main" val="3861025813"/>
-      </p:ext>
-    </p:extLst>
-  </p:cSld>
-  <p:clrMapOvr>
-    <a:masterClrMapping/>
-  </p:clrMapOvr>
-</p:sld>
-</file>
-
 <file path=ppt/slides/slide2.xml><?xml version="1.0" encoding="utf-8"?>
-<p:sld xmlns:a="http://schemas.openxmlformats.org/drawingml/2006/main" xmlns:r="http://schemas.openxmlformats.org/officeDocument/2006/relationships" xmlns:p="http://schemas.openxmlformats.org/presentationml/2006/main">
-  <p:cSld>
-    <p:spTree>
-      <p:nvGrpSpPr>
-        <p:cNvPr id="1" name=""/>
-        <p:cNvGrpSpPr/>
-        <p:nvPr/>
-      </p:nvGrpSpPr>
-      <p:grpSpPr>
-        <a:xfrm>
-          <a:off x="0" y="0"/>
-          <a:ext cx="0" cy="0"/>
-          <a:chOff x="0" y="0"/>
-          <a:chExt cx="0" cy="0"/>
-        </a:xfrm>
-      </p:grpSpPr>
-      <p:sp>
-        <p:nvSpPr>
-          <p:cNvPr id="2" name="Titel 1">
-            <a:extLst>
-              <a:ext uri="{FF2B5EF4-FFF2-40B4-BE49-F238E27FC236}">
-                <a16:creationId xmlns:a16="http://schemas.microsoft.com/office/drawing/2014/main" id="{E1AFACB2-DA6C-BDD7-71E2-314506816300}"/>
-              </a:ext>
-            </a:extLst>
-          </p:cNvPr>
-          <p:cNvSpPr>
-            <a:spLocks noGrp="1"/>
-          </p:cNvSpPr>
-          <p:nvPr>
-            <p:ph type="title"/>
-          </p:nvPr>
-        </p:nvSpPr>
-        <p:spPr/>
-        <p:txBody>
-          <a:bodyPr/>
-          <a:lstStyle/>
-          <a:p>
-            <a:r>
-              <a:rPr lang="en-US" dirty="0" err="1"/>
-              <a:t>Gebruikte</a:t>
-            </a:r>
-            <a:r>
-              <a:rPr lang="en-US" dirty="0"/>
-              <a:t> termen</a:t>
-            </a:r>
-          </a:p>
-        </p:txBody>
-      </p:sp>
-      <p:grpSp>
-        <p:nvGrpSpPr>
-          <p:cNvPr id="26" name="Groep 25">
-            <a:extLst>
-              <a:ext uri="{FF2B5EF4-FFF2-40B4-BE49-F238E27FC236}">
-                <a16:creationId xmlns:a16="http://schemas.microsoft.com/office/drawing/2014/main" id="{692C2740-6E09-FE8D-A09F-FE27B192559F}"/>
-              </a:ext>
-            </a:extLst>
-          </p:cNvPr>
-          <p:cNvGrpSpPr/>
-          <p:nvPr/>
-        </p:nvGrpSpPr>
-        <p:grpSpPr>
-          <a:xfrm>
-            <a:off x="2671945" y="3529883"/>
-            <a:ext cx="2388389" cy="605693"/>
-            <a:chOff x="1160815" y="2247009"/>
-            <a:chExt cx="2388389" cy="605693"/>
-          </a:xfrm>
-        </p:grpSpPr>
-        <p:sp>
-          <p:nvSpPr>
-            <p:cNvPr id="4" name="Rechthoek 3">
-              <a:extLst>
-                <a:ext uri="{FF2B5EF4-FFF2-40B4-BE49-F238E27FC236}">
-                  <a16:creationId xmlns:a16="http://schemas.microsoft.com/office/drawing/2014/main" id="{3D7F51DA-0BDF-8AF6-37AB-630133EAE4A4}"/>
-                </a:ext>
-              </a:extLst>
-            </p:cNvPr>
-            <p:cNvSpPr/>
-            <p:nvPr/>
-          </p:nvSpPr>
-          <p:spPr>
-            <a:xfrm>
-              <a:off x="1160815" y="2248761"/>
-              <a:ext cx="301752" cy="301752"/>
-            </a:xfrm>
-            <a:prstGeom prst="rect">
-              <a:avLst/>
-            </a:prstGeom>
-            <a:solidFill>
-              <a:schemeClr val="bg1"/>
-            </a:solidFill>
-          </p:spPr>
-          <p:style>
-            <a:lnRef idx="2">
-              <a:schemeClr val="accent1">
-                <a:shade val="15000"/>
-              </a:schemeClr>
-            </a:lnRef>
-            <a:fillRef idx="1">
-              <a:schemeClr val="accent1"/>
-            </a:fillRef>
-            <a:effectRef idx="0">
-              <a:schemeClr val="accent1"/>
-            </a:effectRef>
-            <a:fontRef idx="minor">
-              <a:schemeClr val="lt1"/>
-            </a:fontRef>
-          </p:style>
-          <p:txBody>
-            <a:bodyPr rtlCol="0" anchor="ctr"/>
-            <a:lstStyle/>
-            <a:p>
-              <a:pPr algn="ctr"/>
-              <a:endParaRPr lang="en-US"/>
-            </a:p>
-          </p:txBody>
-        </p:sp>
-        <p:sp>
-          <p:nvSpPr>
-            <p:cNvPr id="5" name="Rechthoek 4">
-              <a:extLst>
-                <a:ext uri="{FF2B5EF4-FFF2-40B4-BE49-F238E27FC236}">
-                  <a16:creationId xmlns:a16="http://schemas.microsoft.com/office/drawing/2014/main" id="{E5D06084-9E44-40F2-2BE3-75FCA6C0B28A}"/>
-                </a:ext>
-              </a:extLst>
-            </p:cNvPr>
-            <p:cNvSpPr/>
-            <p:nvPr/>
-          </p:nvSpPr>
-          <p:spPr>
-            <a:xfrm>
-              <a:off x="1461805" y="2248761"/>
-              <a:ext cx="301752" cy="301752"/>
-            </a:xfrm>
-            <a:prstGeom prst="rect">
-              <a:avLst/>
-            </a:prstGeom>
-            <a:solidFill>
-              <a:schemeClr val="bg1">
-                <a:lumMod val="95000"/>
-              </a:schemeClr>
-            </a:solidFill>
-          </p:spPr>
-          <p:style>
-            <a:lnRef idx="2">
-              <a:schemeClr val="accent1">
-                <a:shade val="15000"/>
-              </a:schemeClr>
-            </a:lnRef>
-            <a:fillRef idx="1">
-              <a:schemeClr val="accent1"/>
-            </a:fillRef>
-            <a:effectRef idx="0">
-              <a:schemeClr val="accent1"/>
-            </a:effectRef>
-            <a:fontRef idx="minor">
-              <a:schemeClr val="lt1"/>
-            </a:fontRef>
-          </p:style>
-          <p:txBody>
-            <a:bodyPr rtlCol="0" anchor="ctr"/>
-            <a:lstStyle/>
-            <a:p>
-              <a:pPr algn="ctr"/>
-              <a:endParaRPr lang="en-US"/>
-            </a:p>
-          </p:txBody>
-        </p:sp>
-        <p:sp>
-          <p:nvSpPr>
-            <p:cNvPr id="6" name="Rechthoek 5">
-              <a:extLst>
-                <a:ext uri="{FF2B5EF4-FFF2-40B4-BE49-F238E27FC236}">
-                  <a16:creationId xmlns:a16="http://schemas.microsoft.com/office/drawing/2014/main" id="{2B414635-EA8B-13AB-4B72-675F7CBD5324}"/>
-                </a:ext>
-              </a:extLst>
-            </p:cNvPr>
-            <p:cNvSpPr/>
-            <p:nvPr/>
-          </p:nvSpPr>
-          <p:spPr>
-            <a:xfrm>
-              <a:off x="1763557" y="2248761"/>
-              <a:ext cx="301752" cy="301752"/>
-            </a:xfrm>
-            <a:prstGeom prst="rect">
-              <a:avLst/>
-            </a:prstGeom>
-            <a:solidFill>
-              <a:schemeClr val="bg1">
-                <a:lumMod val="85000"/>
-              </a:schemeClr>
-            </a:solidFill>
-          </p:spPr>
-          <p:style>
-            <a:lnRef idx="2">
-              <a:schemeClr val="accent1">
-                <a:shade val="15000"/>
-              </a:schemeClr>
-            </a:lnRef>
-            <a:fillRef idx="1">
-              <a:schemeClr val="accent1"/>
-            </a:fillRef>
-            <a:effectRef idx="0">
-              <a:schemeClr val="accent1"/>
-            </a:effectRef>
-            <a:fontRef idx="minor">
-              <a:schemeClr val="lt1"/>
-            </a:fontRef>
-          </p:style>
-          <p:txBody>
-            <a:bodyPr rtlCol="0" anchor="ctr"/>
-            <a:lstStyle/>
-            <a:p>
-              <a:pPr algn="ctr"/>
-              <a:endParaRPr lang="en-US"/>
-            </a:p>
-          </p:txBody>
-        </p:sp>
-        <p:sp>
-          <p:nvSpPr>
-            <p:cNvPr id="7" name="Rechthoek 6">
-              <a:extLst>
-                <a:ext uri="{FF2B5EF4-FFF2-40B4-BE49-F238E27FC236}">
-                  <a16:creationId xmlns:a16="http://schemas.microsoft.com/office/drawing/2014/main" id="{88274186-8DC8-E4C9-524E-402767E8A421}"/>
-                </a:ext>
-              </a:extLst>
-            </p:cNvPr>
-            <p:cNvSpPr/>
-            <p:nvPr/>
-          </p:nvSpPr>
-          <p:spPr>
-            <a:xfrm>
-              <a:off x="2051565" y="2248761"/>
-              <a:ext cx="301752" cy="301752"/>
-            </a:xfrm>
-            <a:prstGeom prst="rect">
-              <a:avLst/>
-            </a:prstGeom>
-            <a:solidFill>
-              <a:schemeClr val="bg1">
-                <a:lumMod val="75000"/>
-              </a:schemeClr>
-            </a:solidFill>
-          </p:spPr>
-          <p:style>
-            <a:lnRef idx="2">
-              <a:schemeClr val="accent1">
-                <a:shade val="15000"/>
-              </a:schemeClr>
-            </a:lnRef>
-            <a:fillRef idx="1">
-              <a:schemeClr val="accent1"/>
-            </a:fillRef>
-            <a:effectRef idx="0">
-              <a:schemeClr val="accent1"/>
-            </a:effectRef>
-            <a:fontRef idx="minor">
-              <a:schemeClr val="lt1"/>
-            </a:fontRef>
-          </p:style>
-          <p:txBody>
-            <a:bodyPr rtlCol="0" anchor="ctr"/>
-            <a:lstStyle/>
-            <a:p>
-              <a:pPr algn="ctr"/>
-              <a:endParaRPr lang="en-US"/>
-            </a:p>
-          </p:txBody>
-        </p:sp>
-        <p:sp>
-          <p:nvSpPr>
-            <p:cNvPr id="8" name="Rechthoek 7">
-              <a:extLst>
-                <a:ext uri="{FF2B5EF4-FFF2-40B4-BE49-F238E27FC236}">
-                  <a16:creationId xmlns:a16="http://schemas.microsoft.com/office/drawing/2014/main" id="{0B377830-B6F0-8DCF-03CD-0EBB6AD921E1}"/>
-                </a:ext>
-              </a:extLst>
-            </p:cNvPr>
-            <p:cNvSpPr/>
-            <p:nvPr/>
-          </p:nvSpPr>
-          <p:spPr>
-            <a:xfrm>
-              <a:off x="2353317" y="2247009"/>
-              <a:ext cx="301752" cy="301752"/>
-            </a:xfrm>
-            <a:prstGeom prst="rect">
-              <a:avLst/>
-            </a:prstGeom>
-            <a:solidFill>
-              <a:schemeClr val="bg1">
-                <a:lumMod val="65000"/>
-              </a:schemeClr>
-            </a:solidFill>
-          </p:spPr>
-          <p:style>
-            <a:lnRef idx="2">
-              <a:schemeClr val="accent1">
-                <a:shade val="15000"/>
-              </a:schemeClr>
-            </a:lnRef>
-            <a:fillRef idx="1">
-              <a:schemeClr val="accent1"/>
-            </a:fillRef>
-            <a:effectRef idx="0">
-              <a:schemeClr val="accent1"/>
-            </a:effectRef>
-            <a:fontRef idx="minor">
-              <a:schemeClr val="lt1"/>
-            </a:fontRef>
-          </p:style>
-          <p:txBody>
-            <a:bodyPr rtlCol="0" anchor="ctr"/>
-            <a:lstStyle/>
-            <a:p>
-              <a:pPr algn="ctr"/>
-              <a:endParaRPr lang="en-US"/>
-            </a:p>
-          </p:txBody>
-        </p:sp>
-        <p:sp>
-          <p:nvSpPr>
-            <p:cNvPr id="9" name="Rechthoek 8">
-              <a:extLst>
-                <a:ext uri="{FF2B5EF4-FFF2-40B4-BE49-F238E27FC236}">
-                  <a16:creationId xmlns:a16="http://schemas.microsoft.com/office/drawing/2014/main" id="{13550900-7AF9-81C7-38FA-35BE4B3F83B7}"/>
-                </a:ext>
-              </a:extLst>
-            </p:cNvPr>
-            <p:cNvSpPr/>
-            <p:nvPr/>
-          </p:nvSpPr>
-          <p:spPr>
-            <a:xfrm>
-              <a:off x="2655069" y="2247009"/>
-              <a:ext cx="301752" cy="301752"/>
-            </a:xfrm>
-            <a:prstGeom prst="rect">
-              <a:avLst/>
-            </a:prstGeom>
-            <a:solidFill>
-              <a:schemeClr val="bg1">
-                <a:lumMod val="50000"/>
-              </a:schemeClr>
-            </a:solidFill>
-          </p:spPr>
-          <p:style>
-            <a:lnRef idx="2">
-              <a:schemeClr val="accent1">
-                <a:shade val="15000"/>
-              </a:schemeClr>
-            </a:lnRef>
-            <a:fillRef idx="1">
-              <a:schemeClr val="accent1"/>
-            </a:fillRef>
-            <a:effectRef idx="0">
-              <a:schemeClr val="accent1"/>
-            </a:effectRef>
-            <a:fontRef idx="minor">
-              <a:schemeClr val="lt1"/>
-            </a:fontRef>
-          </p:style>
-          <p:txBody>
-            <a:bodyPr rtlCol="0" anchor="ctr"/>
-            <a:lstStyle/>
-            <a:p>
-              <a:pPr algn="ctr"/>
-              <a:endParaRPr lang="en-US"/>
-            </a:p>
-          </p:txBody>
-        </p:sp>
-        <p:sp>
-          <p:nvSpPr>
-            <p:cNvPr id="10" name="Rechthoek 9">
-              <a:extLst>
-                <a:ext uri="{FF2B5EF4-FFF2-40B4-BE49-F238E27FC236}">
-                  <a16:creationId xmlns:a16="http://schemas.microsoft.com/office/drawing/2014/main" id="{35B630B2-AD89-3F9C-6568-7AD944D7B30E}"/>
-                </a:ext>
-              </a:extLst>
-            </p:cNvPr>
-            <p:cNvSpPr/>
-            <p:nvPr/>
-          </p:nvSpPr>
-          <p:spPr>
-            <a:xfrm>
-              <a:off x="2943077" y="2247009"/>
-              <a:ext cx="301752" cy="301752"/>
-            </a:xfrm>
-            <a:prstGeom prst="rect">
-              <a:avLst/>
-            </a:prstGeom>
-            <a:solidFill>
-              <a:schemeClr val="bg2">
-                <a:lumMod val="90000"/>
-              </a:schemeClr>
-            </a:solidFill>
-          </p:spPr>
-          <p:style>
-            <a:lnRef idx="2">
-              <a:schemeClr val="accent1">
-                <a:shade val="15000"/>
-              </a:schemeClr>
-            </a:lnRef>
-            <a:fillRef idx="1">
-              <a:schemeClr val="accent1"/>
-            </a:fillRef>
-            <a:effectRef idx="0">
-              <a:schemeClr val="accent1"/>
-            </a:effectRef>
-            <a:fontRef idx="minor">
-              <a:schemeClr val="lt1"/>
-            </a:fontRef>
-          </p:style>
-          <p:txBody>
-            <a:bodyPr rtlCol="0" anchor="ctr"/>
-            <a:lstStyle/>
-            <a:p>
-              <a:pPr algn="ctr"/>
-              <a:endParaRPr lang="en-US"/>
-            </a:p>
-          </p:txBody>
-        </p:sp>
-        <p:sp>
-          <p:nvSpPr>
-            <p:cNvPr id="11" name="Rechthoek 10">
-              <a:extLst>
-                <a:ext uri="{FF2B5EF4-FFF2-40B4-BE49-F238E27FC236}">
-                  <a16:creationId xmlns:a16="http://schemas.microsoft.com/office/drawing/2014/main" id="{8FAF3625-8F65-2B18-1842-892C5319FBCD}"/>
-                </a:ext>
-              </a:extLst>
-            </p:cNvPr>
-            <p:cNvSpPr/>
-            <p:nvPr/>
-          </p:nvSpPr>
-          <p:spPr>
-            <a:xfrm>
-              <a:off x="3245547" y="2247009"/>
-              <a:ext cx="301752" cy="301752"/>
-            </a:xfrm>
-            <a:prstGeom prst="rect">
-              <a:avLst/>
-            </a:prstGeom>
-            <a:solidFill>
-              <a:schemeClr val="bg2"/>
-            </a:solidFill>
-          </p:spPr>
-          <p:style>
-            <a:lnRef idx="2">
-              <a:schemeClr val="accent1">
-                <a:shade val="15000"/>
-              </a:schemeClr>
-            </a:lnRef>
-            <a:fillRef idx="1">
-              <a:schemeClr val="accent1"/>
-            </a:fillRef>
-            <a:effectRef idx="0">
-              <a:schemeClr val="accent1"/>
-            </a:effectRef>
-            <a:fontRef idx="minor">
-              <a:schemeClr val="lt1"/>
-            </a:fontRef>
-          </p:style>
-          <p:txBody>
-            <a:bodyPr rtlCol="0" anchor="ctr"/>
-            <a:lstStyle/>
-            <a:p>
-              <a:pPr algn="ctr"/>
-              <a:endParaRPr lang="en-US"/>
-            </a:p>
-          </p:txBody>
-        </p:sp>
-        <p:sp>
-          <p:nvSpPr>
-            <p:cNvPr id="12" name="Rechthoek 11">
-              <a:extLst>
-                <a:ext uri="{FF2B5EF4-FFF2-40B4-BE49-F238E27FC236}">
-                  <a16:creationId xmlns:a16="http://schemas.microsoft.com/office/drawing/2014/main" id="{D4904885-8C13-8233-1FA6-F1FAEF8960F4}"/>
-                </a:ext>
-              </a:extLst>
-            </p:cNvPr>
-            <p:cNvSpPr/>
-            <p:nvPr/>
-          </p:nvSpPr>
-          <p:spPr>
-            <a:xfrm>
-              <a:off x="1160815" y="2550950"/>
-              <a:ext cx="301752" cy="301752"/>
-            </a:xfrm>
-            <a:prstGeom prst="rect">
-              <a:avLst/>
-            </a:prstGeom>
-            <a:solidFill>
-              <a:schemeClr val="bg2">
-                <a:lumMod val="25000"/>
-              </a:schemeClr>
-            </a:solidFill>
-          </p:spPr>
-          <p:style>
-            <a:lnRef idx="2">
-              <a:schemeClr val="accent1">
-                <a:shade val="15000"/>
-              </a:schemeClr>
-            </a:lnRef>
-            <a:fillRef idx="1">
-              <a:schemeClr val="accent1"/>
-            </a:fillRef>
-            <a:effectRef idx="0">
-              <a:schemeClr val="accent1"/>
-            </a:effectRef>
-            <a:fontRef idx="minor">
-              <a:schemeClr val="lt1"/>
-            </a:fontRef>
-          </p:style>
-          <p:txBody>
-            <a:bodyPr rtlCol="0" anchor="ctr"/>
-            <a:lstStyle/>
-            <a:p>
-              <a:pPr algn="ctr"/>
-              <a:endParaRPr lang="en-US"/>
-            </a:p>
-          </p:txBody>
-        </p:sp>
-        <p:sp>
-          <p:nvSpPr>
-            <p:cNvPr id="13" name="Rechthoek 12">
-              <a:extLst>
-                <a:ext uri="{FF2B5EF4-FFF2-40B4-BE49-F238E27FC236}">
-                  <a16:creationId xmlns:a16="http://schemas.microsoft.com/office/drawing/2014/main" id="{C5BD4AC2-48E5-FE4F-1B85-6EB533F9FE81}"/>
-                </a:ext>
-              </a:extLst>
-            </p:cNvPr>
-            <p:cNvSpPr/>
-            <p:nvPr/>
-          </p:nvSpPr>
-          <p:spPr>
-            <a:xfrm>
-              <a:off x="1461805" y="2550950"/>
-              <a:ext cx="301752" cy="301752"/>
-            </a:xfrm>
-            <a:prstGeom prst="rect">
-              <a:avLst/>
-            </a:prstGeom>
-            <a:solidFill>
-              <a:schemeClr val="bg2">
-                <a:lumMod val="10000"/>
-              </a:schemeClr>
-            </a:solidFill>
-          </p:spPr>
-          <p:style>
-            <a:lnRef idx="2">
-              <a:schemeClr val="accent1">
-                <a:shade val="15000"/>
-              </a:schemeClr>
-            </a:lnRef>
-            <a:fillRef idx="1">
-              <a:schemeClr val="accent1"/>
-            </a:fillRef>
-            <a:effectRef idx="0">
-              <a:schemeClr val="accent1"/>
-            </a:effectRef>
-            <a:fontRef idx="minor">
-              <a:schemeClr val="lt1"/>
-            </a:fontRef>
-          </p:style>
-          <p:txBody>
-            <a:bodyPr rtlCol="0" anchor="ctr"/>
-            <a:lstStyle/>
-            <a:p>
-              <a:pPr algn="ctr"/>
-              <a:endParaRPr lang="en-US"/>
-            </a:p>
-          </p:txBody>
-        </p:sp>
-        <p:sp>
-          <p:nvSpPr>
-            <p:cNvPr id="14" name="Rechthoek 13">
-              <a:extLst>
-                <a:ext uri="{FF2B5EF4-FFF2-40B4-BE49-F238E27FC236}">
-                  <a16:creationId xmlns:a16="http://schemas.microsoft.com/office/drawing/2014/main" id="{6C4F9075-E3DA-3E32-22F3-8C729E249E0A}"/>
-                </a:ext>
-              </a:extLst>
-            </p:cNvPr>
-            <p:cNvSpPr/>
-            <p:nvPr/>
-          </p:nvSpPr>
-          <p:spPr>
-            <a:xfrm>
-              <a:off x="1763557" y="2550950"/>
-              <a:ext cx="301752" cy="301752"/>
-            </a:xfrm>
-            <a:prstGeom prst="rect">
-              <a:avLst/>
-            </a:prstGeom>
-            <a:solidFill>
-              <a:schemeClr val="bg2">
-                <a:lumMod val="50000"/>
-              </a:schemeClr>
-            </a:solidFill>
-          </p:spPr>
-          <p:style>
-            <a:lnRef idx="2">
-              <a:schemeClr val="accent1">
-                <a:shade val="15000"/>
-              </a:schemeClr>
-            </a:lnRef>
-            <a:fillRef idx="1">
-              <a:schemeClr val="accent1"/>
-            </a:fillRef>
-            <a:effectRef idx="0">
-              <a:schemeClr val="accent1"/>
-            </a:effectRef>
-            <a:fontRef idx="minor">
-              <a:schemeClr val="lt1"/>
-            </a:fontRef>
-          </p:style>
-          <p:txBody>
-            <a:bodyPr rtlCol="0" anchor="ctr"/>
-            <a:lstStyle/>
-            <a:p>
-              <a:pPr algn="ctr"/>
-              <a:endParaRPr lang="en-US"/>
-            </a:p>
-          </p:txBody>
-        </p:sp>
-        <p:sp>
-          <p:nvSpPr>
-            <p:cNvPr id="15" name="Rechthoek 14">
-              <a:extLst>
-                <a:ext uri="{FF2B5EF4-FFF2-40B4-BE49-F238E27FC236}">
-                  <a16:creationId xmlns:a16="http://schemas.microsoft.com/office/drawing/2014/main" id="{4BE23436-7B74-FCCD-F8B6-AC078CDBF081}"/>
-                </a:ext>
-              </a:extLst>
-            </p:cNvPr>
-            <p:cNvSpPr/>
-            <p:nvPr/>
-          </p:nvSpPr>
-          <p:spPr>
-            <a:xfrm>
-              <a:off x="2051565" y="2550950"/>
-              <a:ext cx="301752" cy="301752"/>
-            </a:xfrm>
-            <a:prstGeom prst="rect">
-              <a:avLst/>
-            </a:prstGeom>
-            <a:solidFill>
-              <a:schemeClr val="tx1">
-                <a:lumMod val="85000"/>
-                <a:lumOff val="15000"/>
-              </a:schemeClr>
-            </a:solidFill>
-          </p:spPr>
-          <p:style>
-            <a:lnRef idx="2">
-              <a:schemeClr val="accent1">
-                <a:shade val="15000"/>
-              </a:schemeClr>
-            </a:lnRef>
-            <a:fillRef idx="1">
-              <a:schemeClr val="accent1"/>
-            </a:fillRef>
-            <a:effectRef idx="0">
-              <a:schemeClr val="accent1"/>
-            </a:effectRef>
-            <a:fontRef idx="minor">
-              <a:schemeClr val="lt1"/>
-            </a:fontRef>
-          </p:style>
-          <p:txBody>
-            <a:bodyPr rtlCol="0" anchor="ctr"/>
-            <a:lstStyle/>
-            <a:p>
-              <a:pPr algn="ctr"/>
-              <a:endParaRPr lang="en-US"/>
-            </a:p>
-          </p:txBody>
-        </p:sp>
-        <p:sp>
-          <p:nvSpPr>
-            <p:cNvPr id="16" name="Rechthoek 15">
-              <a:extLst>
-                <a:ext uri="{FF2B5EF4-FFF2-40B4-BE49-F238E27FC236}">
-                  <a16:creationId xmlns:a16="http://schemas.microsoft.com/office/drawing/2014/main" id="{707ED4D9-79B8-D961-C5DD-635AEBE843C0}"/>
-                </a:ext>
-              </a:extLst>
-            </p:cNvPr>
-            <p:cNvSpPr/>
-            <p:nvPr/>
-          </p:nvSpPr>
-          <p:spPr>
-            <a:xfrm>
-              <a:off x="2353317" y="2549198"/>
-              <a:ext cx="301752" cy="301752"/>
-            </a:xfrm>
-            <a:prstGeom prst="rect">
-              <a:avLst/>
-            </a:prstGeom>
-            <a:solidFill>
-              <a:schemeClr val="tx1">
-                <a:lumMod val="75000"/>
-                <a:lumOff val="25000"/>
-              </a:schemeClr>
-            </a:solidFill>
-          </p:spPr>
-          <p:style>
-            <a:lnRef idx="2">
-              <a:schemeClr val="accent1">
-                <a:shade val="15000"/>
-              </a:schemeClr>
-            </a:lnRef>
-            <a:fillRef idx="1">
-              <a:schemeClr val="accent1"/>
-            </a:fillRef>
-            <a:effectRef idx="0">
-              <a:schemeClr val="accent1"/>
-            </a:effectRef>
-            <a:fontRef idx="minor">
-              <a:schemeClr val="lt1"/>
-            </a:fontRef>
-          </p:style>
-          <p:txBody>
-            <a:bodyPr rtlCol="0" anchor="ctr"/>
-            <a:lstStyle/>
-            <a:p>
-              <a:pPr algn="ctr"/>
-              <a:endParaRPr lang="en-US"/>
-            </a:p>
-          </p:txBody>
-        </p:sp>
-        <p:sp>
-          <p:nvSpPr>
-            <p:cNvPr id="17" name="Rechthoek 16">
-              <a:extLst>
-                <a:ext uri="{FF2B5EF4-FFF2-40B4-BE49-F238E27FC236}">
-                  <a16:creationId xmlns:a16="http://schemas.microsoft.com/office/drawing/2014/main" id="{669B7264-6470-C013-C25E-3BE69B7361D5}"/>
-                </a:ext>
-              </a:extLst>
-            </p:cNvPr>
-            <p:cNvSpPr/>
-            <p:nvPr/>
-          </p:nvSpPr>
-          <p:spPr>
-            <a:xfrm>
-              <a:off x="2655069" y="2549198"/>
-              <a:ext cx="301752" cy="301752"/>
-            </a:xfrm>
-            <a:prstGeom prst="rect">
-              <a:avLst/>
-            </a:prstGeom>
-            <a:solidFill>
-              <a:schemeClr val="tx1">
-                <a:lumMod val="65000"/>
-                <a:lumOff val="35000"/>
-              </a:schemeClr>
-            </a:solidFill>
-          </p:spPr>
-          <p:style>
-            <a:lnRef idx="2">
-              <a:schemeClr val="accent1">
-                <a:shade val="15000"/>
-              </a:schemeClr>
-            </a:lnRef>
-            <a:fillRef idx="1">
-              <a:schemeClr val="accent1"/>
-            </a:fillRef>
-            <a:effectRef idx="0">
-              <a:schemeClr val="accent1"/>
-            </a:effectRef>
-            <a:fontRef idx="minor">
-              <a:schemeClr val="lt1"/>
-            </a:fontRef>
-          </p:style>
-          <p:txBody>
-            <a:bodyPr rtlCol="0" anchor="ctr"/>
-            <a:lstStyle/>
-            <a:p>
-              <a:pPr algn="ctr"/>
-              <a:endParaRPr lang="en-US"/>
-            </a:p>
-          </p:txBody>
-        </p:sp>
-        <p:sp>
-          <p:nvSpPr>
-            <p:cNvPr id="18" name="Rechthoek 17">
-              <a:extLst>
-                <a:ext uri="{FF2B5EF4-FFF2-40B4-BE49-F238E27FC236}">
-                  <a16:creationId xmlns:a16="http://schemas.microsoft.com/office/drawing/2014/main" id="{BC1B9FE4-8C78-634A-C87F-5EF27F9CBB87}"/>
-                </a:ext>
-              </a:extLst>
-            </p:cNvPr>
-            <p:cNvSpPr/>
-            <p:nvPr/>
-          </p:nvSpPr>
-          <p:spPr>
-            <a:xfrm>
-              <a:off x="2943077" y="2549198"/>
-              <a:ext cx="301752" cy="301752"/>
-            </a:xfrm>
-            <a:prstGeom prst="rect">
-              <a:avLst/>
-            </a:prstGeom>
-            <a:solidFill>
-              <a:schemeClr val="tx1">
-                <a:lumMod val="50000"/>
-                <a:lumOff val="50000"/>
-              </a:schemeClr>
-            </a:solidFill>
-          </p:spPr>
-          <p:style>
-            <a:lnRef idx="2">
-              <a:schemeClr val="accent1">
-                <a:shade val="15000"/>
-              </a:schemeClr>
-            </a:lnRef>
-            <a:fillRef idx="1">
-              <a:schemeClr val="accent1"/>
-            </a:fillRef>
-            <a:effectRef idx="0">
-              <a:schemeClr val="accent1"/>
-            </a:effectRef>
-            <a:fontRef idx="minor">
-              <a:schemeClr val="lt1"/>
-            </a:fontRef>
-          </p:style>
-          <p:txBody>
-            <a:bodyPr rtlCol="0" anchor="ctr"/>
-            <a:lstStyle/>
-            <a:p>
-              <a:pPr algn="ctr"/>
-              <a:endParaRPr lang="en-US"/>
-            </a:p>
-          </p:txBody>
-        </p:sp>
-        <p:sp>
-          <p:nvSpPr>
-            <p:cNvPr id="19" name="Rechthoek 18">
-              <a:extLst>
-                <a:ext uri="{FF2B5EF4-FFF2-40B4-BE49-F238E27FC236}">
-                  <a16:creationId xmlns:a16="http://schemas.microsoft.com/office/drawing/2014/main" id="{55388109-F9EC-B7CF-D2E3-63679B7A8E78}"/>
-                </a:ext>
-              </a:extLst>
-            </p:cNvPr>
-            <p:cNvSpPr/>
-            <p:nvPr/>
-          </p:nvSpPr>
-          <p:spPr>
-            <a:xfrm>
-              <a:off x="3247452" y="2549198"/>
-              <a:ext cx="301752" cy="301752"/>
-            </a:xfrm>
-            <a:prstGeom prst="rect">
-              <a:avLst/>
-            </a:prstGeom>
-            <a:solidFill>
-              <a:schemeClr val="tx1"/>
-            </a:solidFill>
-            <a:ln>
-              <a:solidFill>
-                <a:srgbClr val="7030A0"/>
-              </a:solidFill>
-            </a:ln>
-          </p:spPr>
-          <p:style>
-            <a:lnRef idx="2">
-              <a:schemeClr val="accent1">
-                <a:shade val="15000"/>
-              </a:schemeClr>
-            </a:lnRef>
-            <a:fillRef idx="1">
-              <a:schemeClr val="accent1"/>
-            </a:fillRef>
-            <a:effectRef idx="0">
-              <a:schemeClr val="accent1"/>
-            </a:effectRef>
-            <a:fontRef idx="minor">
-              <a:schemeClr val="lt1"/>
-            </a:fontRef>
-          </p:style>
-          <p:txBody>
-            <a:bodyPr rtlCol="0" anchor="ctr"/>
-            <a:lstStyle/>
-            <a:p>
-              <a:pPr algn="ctr"/>
-              <a:endParaRPr lang="en-US"/>
-            </a:p>
-          </p:txBody>
-        </p:sp>
-      </p:grpSp>
-      <p:sp>
-        <p:nvSpPr>
-          <p:cNvPr id="21" name="Tekstvak 20">
-            <a:extLst>
-              <a:ext uri="{FF2B5EF4-FFF2-40B4-BE49-F238E27FC236}">
-                <a16:creationId xmlns:a16="http://schemas.microsoft.com/office/drawing/2014/main" id="{0654BD71-B84A-8ECC-62A1-0DD2C1F00147}"/>
-              </a:ext>
-            </a:extLst>
-          </p:cNvPr>
-          <p:cNvSpPr txBox="1"/>
-          <p:nvPr/>
-        </p:nvSpPr>
-        <p:spPr>
-          <a:xfrm>
-            <a:off x="3572422" y="4325073"/>
-            <a:ext cx="857927" cy="369332"/>
-          </a:xfrm>
-          <a:prstGeom prst="rect">
-            <a:avLst/>
-          </a:prstGeom>
-          <a:noFill/>
-        </p:spPr>
-        <p:txBody>
-          <a:bodyPr wrap="none" rtlCol="0">
-            <a:spAutoFit/>
-          </a:bodyPr>
-          <a:lstStyle/>
-          <a:p>
-            <a:r>
-              <a:rPr lang="en-US" dirty="0" err="1"/>
-              <a:t>Tileset</a:t>
-            </a:r>
-            <a:endParaRPr lang="nl-NL" dirty="0"/>
-          </a:p>
-        </p:txBody>
-      </p:sp>
-      <p:pic>
-        <p:nvPicPr>
-          <p:cNvPr id="1026" name="Picture 2" descr="Unity Tilemap | Unity Tutorial | NotSlot">
-            <a:extLst>
-              <a:ext uri="{FF2B5EF4-FFF2-40B4-BE49-F238E27FC236}">
-                <a16:creationId xmlns:a16="http://schemas.microsoft.com/office/drawing/2014/main" id="{43AEABFB-9FD5-086D-B9B0-9718A14C06F8}"/>
-              </a:ext>
-            </a:extLst>
-          </p:cNvPr>
-          <p:cNvPicPr>
-            <a:picLocks noChangeAspect="1" noChangeArrowheads="1"/>
-          </p:cNvPicPr>
-          <p:nvPr/>
-        </p:nvPicPr>
-        <p:blipFill>
-          <a:blip r:embed="rId2">
-            <a:extLst>
-              <a:ext uri="{28A0092B-C50C-407E-A947-70E740481C1C}">
-                <a14:useLocalDpi xmlns:a14="http://schemas.microsoft.com/office/drawing/2010/main" val="0"/>
-              </a:ext>
-            </a:extLst>
-          </a:blip>
-          <a:srcRect/>
-          <a:stretch>
-            <a:fillRect/>
-          </a:stretch>
-        </p:blipFill>
-        <p:spPr bwMode="auto">
-          <a:xfrm>
-            <a:off x="8869467" y="2532927"/>
-            <a:ext cx="2857500" cy="1600200"/>
-          </a:xfrm>
-          <a:prstGeom prst="rect">
-            <a:avLst/>
-          </a:prstGeom>
-          <a:noFill/>
-          <a:extLst>
-            <a:ext uri="{909E8E84-426E-40DD-AFC4-6F175D3DCCD1}">
-              <a14:hiddenFill xmlns:a14="http://schemas.microsoft.com/office/drawing/2010/main">
-                <a:solidFill>
-                  <a:srgbClr val="FFFFFF"/>
-                </a:solidFill>
-              </a14:hiddenFill>
-            </a:ext>
-          </a:extLst>
-        </p:spPr>
-      </p:pic>
-      <p:sp>
-        <p:nvSpPr>
-          <p:cNvPr id="22" name="Tekstvak 21">
-            <a:extLst>
-              <a:ext uri="{FF2B5EF4-FFF2-40B4-BE49-F238E27FC236}">
-                <a16:creationId xmlns:a16="http://schemas.microsoft.com/office/drawing/2014/main" id="{D2D6B2E7-0F62-2999-CF54-F65F2BD4336C}"/>
-              </a:ext>
-            </a:extLst>
-          </p:cNvPr>
-          <p:cNvSpPr txBox="1"/>
-          <p:nvPr/>
-        </p:nvSpPr>
-        <p:spPr>
-          <a:xfrm>
-            <a:off x="9807538" y="4325073"/>
-            <a:ext cx="981359" cy="369332"/>
-          </a:xfrm>
-          <a:prstGeom prst="rect">
-            <a:avLst/>
-          </a:prstGeom>
-          <a:noFill/>
-        </p:spPr>
-        <p:txBody>
-          <a:bodyPr wrap="none" rtlCol="0">
-            <a:spAutoFit/>
-          </a:bodyPr>
-          <a:lstStyle/>
-          <a:p>
-            <a:r>
-              <a:rPr lang="en-US" dirty="0" err="1"/>
-              <a:t>Tilemap</a:t>
-            </a:r>
-            <a:endParaRPr lang="nl-NL" dirty="0"/>
-          </a:p>
-        </p:txBody>
-      </p:sp>
-      <p:pic>
-        <p:nvPicPr>
-          <p:cNvPr id="1028" name="Picture 4" descr="Introduction to Tilemaps - Unity Learn">
-            <a:extLst>
-              <a:ext uri="{FF2B5EF4-FFF2-40B4-BE49-F238E27FC236}">
-                <a16:creationId xmlns:a16="http://schemas.microsoft.com/office/drawing/2014/main" id="{C675DF7F-0740-7EDB-A76F-820CD885E19F}"/>
-              </a:ext>
-            </a:extLst>
-          </p:cNvPr>
-          <p:cNvPicPr>
-            <a:picLocks noChangeAspect="1" noChangeArrowheads="1"/>
-          </p:cNvPicPr>
-          <p:nvPr/>
-        </p:nvPicPr>
-        <p:blipFill>
-          <a:blip r:embed="rId3">
-            <a:extLst>
-              <a:ext uri="{28A0092B-C50C-407E-A947-70E740481C1C}">
-                <a14:useLocalDpi xmlns:a14="http://schemas.microsoft.com/office/drawing/2010/main" val="0"/>
-              </a:ext>
-            </a:extLst>
-          </a:blip>
-          <a:srcRect/>
-          <a:stretch>
-            <a:fillRect/>
-          </a:stretch>
-        </p:blipFill>
-        <p:spPr bwMode="auto">
-          <a:xfrm>
-            <a:off x="5900442" y="1467482"/>
-            <a:ext cx="1714500" cy="2667000"/>
-          </a:xfrm>
-          <a:prstGeom prst="rect">
-            <a:avLst/>
-          </a:prstGeom>
-          <a:noFill/>
-          <a:extLst>
-            <a:ext uri="{909E8E84-426E-40DD-AFC4-6F175D3DCCD1}">
-              <a14:hiddenFill xmlns:a14="http://schemas.microsoft.com/office/drawing/2010/main">
-                <a:solidFill>
-                  <a:srgbClr val="FFFFFF"/>
-                </a:solidFill>
-              </a14:hiddenFill>
-            </a:ext>
-          </a:extLst>
-        </p:spPr>
-      </p:pic>
-      <p:sp>
-        <p:nvSpPr>
-          <p:cNvPr id="23" name="Tekstvak 22">
-            <a:extLst>
-              <a:ext uri="{FF2B5EF4-FFF2-40B4-BE49-F238E27FC236}">
-                <a16:creationId xmlns:a16="http://schemas.microsoft.com/office/drawing/2014/main" id="{E51EEAEE-DBA6-3D3D-4A73-7E980208A1A9}"/>
-              </a:ext>
-            </a:extLst>
-          </p:cNvPr>
-          <p:cNvSpPr txBox="1"/>
-          <p:nvPr/>
-        </p:nvSpPr>
-        <p:spPr>
-          <a:xfrm>
-            <a:off x="6118382" y="4325073"/>
-            <a:ext cx="1278620" cy="369332"/>
-          </a:xfrm>
-          <a:prstGeom prst="rect">
-            <a:avLst/>
-          </a:prstGeom>
-          <a:noFill/>
-        </p:spPr>
-        <p:txBody>
-          <a:bodyPr wrap="none" rtlCol="0">
-            <a:spAutoFit/>
-          </a:bodyPr>
-          <a:lstStyle/>
-          <a:p>
-            <a:r>
-              <a:rPr lang="en-US" dirty="0"/>
-              <a:t>Tile Palette</a:t>
-            </a:r>
-            <a:endParaRPr lang="nl-NL" dirty="0"/>
-          </a:p>
-        </p:txBody>
-      </p:sp>
-      <p:sp>
-        <p:nvSpPr>
-          <p:cNvPr id="24" name="Rechthoek 23">
-            <a:extLst>
-              <a:ext uri="{FF2B5EF4-FFF2-40B4-BE49-F238E27FC236}">
-                <a16:creationId xmlns:a16="http://schemas.microsoft.com/office/drawing/2014/main" id="{74CABFD4-BDFD-B882-8CA9-6F247858FA61}"/>
-              </a:ext>
-            </a:extLst>
-          </p:cNvPr>
-          <p:cNvSpPr/>
-          <p:nvPr/>
-        </p:nvSpPr>
-        <p:spPr>
-          <a:xfrm>
-            <a:off x="1302393" y="3832730"/>
-            <a:ext cx="301752" cy="301752"/>
-          </a:xfrm>
-          <a:prstGeom prst="rect">
-            <a:avLst/>
-          </a:prstGeom>
-          <a:solidFill>
-            <a:schemeClr val="bg1"/>
-          </a:solidFill>
-        </p:spPr>
-        <p:style>
-          <a:lnRef idx="2">
-            <a:schemeClr val="accent1">
-              <a:shade val="15000"/>
-            </a:schemeClr>
-          </a:lnRef>
-          <a:fillRef idx="1">
-            <a:schemeClr val="accent1"/>
-          </a:fillRef>
-          <a:effectRef idx="0">
-            <a:schemeClr val="accent1"/>
-          </a:effectRef>
-          <a:fontRef idx="minor">
-            <a:schemeClr val="lt1"/>
-          </a:fontRef>
-        </p:style>
-        <p:txBody>
-          <a:bodyPr rtlCol="0" anchor="ctr"/>
-          <a:lstStyle/>
-          <a:p>
-            <a:pPr algn="ctr"/>
-            <a:endParaRPr lang="en-US"/>
-          </a:p>
-        </p:txBody>
-      </p:sp>
-      <p:sp>
-        <p:nvSpPr>
-          <p:cNvPr id="25" name="Tekstvak 24">
-            <a:extLst>
-              <a:ext uri="{FF2B5EF4-FFF2-40B4-BE49-F238E27FC236}">
-                <a16:creationId xmlns:a16="http://schemas.microsoft.com/office/drawing/2014/main" id="{5A4FE018-0C5E-9B74-E2E3-9CCAFC6BBD9D}"/>
-              </a:ext>
-            </a:extLst>
-          </p:cNvPr>
-          <p:cNvSpPr txBox="1"/>
-          <p:nvPr/>
-        </p:nvSpPr>
-        <p:spPr>
-          <a:xfrm>
-            <a:off x="1187812" y="4325073"/>
-            <a:ext cx="530915" cy="369332"/>
-          </a:xfrm>
-          <a:prstGeom prst="rect">
-            <a:avLst/>
-          </a:prstGeom>
-          <a:noFill/>
-        </p:spPr>
-        <p:txBody>
-          <a:bodyPr wrap="none" rtlCol="0">
-            <a:spAutoFit/>
-          </a:bodyPr>
-          <a:lstStyle/>
-          <a:p>
-            <a:r>
-              <a:rPr lang="en-US" dirty="0"/>
-              <a:t>Tile</a:t>
-            </a:r>
-            <a:endParaRPr lang="nl-NL" dirty="0"/>
-          </a:p>
-        </p:txBody>
-      </p:sp>
-    </p:spTree>
-    <p:extLst>
-      <p:ext uri="{BB962C8B-B14F-4D97-AF65-F5344CB8AC3E}">
-        <p14:creationId xmlns:p14="http://schemas.microsoft.com/office/powerpoint/2010/main" val="4238619311"/>
-      </p:ext>
-    </p:extLst>
-  </p:cSld>
-  <p:clrMapOvr>
-    <a:masterClrMapping/>
-  </p:clrMapOvr>
-</p:sld>
-</file>
-
-<file path=ppt/slides/slide3.xml><?xml version="1.0" encoding="utf-8"?>
-<p:sld xmlns:a="http://schemas.openxmlformats.org/drawingml/2006/main" xmlns:r="http://schemas.openxmlformats.org/officeDocument/2006/relationships" xmlns:p="http://schemas.openxmlformats.org/presentationml/2006/main">
-  <p:cSld>
-    <p:bg>
-      <p:bgPr>
-        <a:solidFill>
-          <a:schemeClr val="bg1"/>
-        </a:solidFill>
-        <a:effectLst/>
-      </p:bgPr>
-    </p:bg>
-    <p:spTree>
-      <p:nvGrpSpPr>
-        <p:cNvPr id="1" name=""/>
-        <p:cNvGrpSpPr/>
-        <p:nvPr/>
-      </p:nvGrpSpPr>
-      <p:grpSpPr>
-        <a:xfrm>
-          <a:off x="0" y="0"/>
-          <a:ext cx="0" cy="0"/>
-          <a:chOff x="0" y="0"/>
-          <a:chExt cx="0" cy="0"/>
-        </a:xfrm>
-      </p:grpSpPr>
-      <p:sp useBgFill="1">
-        <p:nvSpPr>
-          <p:cNvPr id="11" name="Rectangle 10">
-            <a:extLst>
-              <a:ext uri="{FF2B5EF4-FFF2-40B4-BE49-F238E27FC236}">
-                <a16:creationId xmlns:a16="http://schemas.microsoft.com/office/drawing/2014/main" id="{8555C5B3-193A-4749-9AFD-682E53CDDE8F}"/>
-              </a:ext>
-              <a:ext uri="{C183D7F6-B498-43B3-948B-1728B52AA6E4}">
-                <adec:decorative xmlns:adec="http://schemas.microsoft.com/office/drawing/2017/decorative" val="1"/>
-              </a:ext>
-            </a:extLst>
-          </p:cNvPr>
-          <p:cNvSpPr>
-            <a:spLocks noGrp="1" noRot="1" noChangeAspect="1" noMove="1" noResize="1" noEditPoints="1" noAdjustHandles="1" noChangeArrowheads="1" noChangeShapeType="1" noTextEdit="1"/>
-          </p:cNvSpPr>
-          <p:nvPr>
-            <p:extLst>
-              <p:ext uri="{386F3935-93C4-4BCD-93E2-E3B085C9AB24}">
-                <p16:designElem xmlns:p16="http://schemas.microsoft.com/office/powerpoint/2015/main" val="1"/>
-              </p:ext>
-            </p:extLst>
-          </p:nvPr>
-        </p:nvSpPr>
-        <p:spPr>
-          <a:xfrm>
-            <a:off x="0" y="0"/>
-            <a:ext cx="12192000" cy="6858000"/>
-          </a:xfrm>
-          <a:prstGeom prst="rect">
-            <a:avLst/>
-          </a:prstGeom>
-          <a:ln w="12700" cap="flat" cmpd="sng" algn="ctr">
-            <a:noFill/>
-            <a:prstDash val="solid"/>
-            <a:miter lim="800000"/>
-          </a:ln>
-          <a:effectLst/>
-          <a:extLst>
-            <a:ext uri="{91240B29-F687-4F45-9708-019B960494DF}">
-              <a14:hiddenLine xmlns:a14="http://schemas.microsoft.com/office/drawing/2010/main" w="12700" cap="flat" cmpd="sng" algn="ctr">
-                <a:solidFill>
-                  <a:schemeClr val="accent1">
-                    <a:shade val="50000"/>
-                  </a:schemeClr>
-                </a:solidFill>
-                <a:prstDash val="solid"/>
-                <a:miter lim="800000"/>
-              </a14:hiddenLine>
-            </a:ext>
-          </a:extLst>
-        </p:spPr>
-        <p:style>
-          <a:lnRef idx="2">
-            <a:schemeClr val="accent1">
-              <a:shade val="50000"/>
-            </a:schemeClr>
-          </a:lnRef>
-          <a:fillRef idx="1">
-            <a:schemeClr val="accent1"/>
-          </a:fillRef>
-          <a:effectRef idx="0">
-            <a:schemeClr val="accent1"/>
-          </a:effectRef>
-          <a:fontRef idx="minor">
-            <a:schemeClr val="lt1"/>
-          </a:fontRef>
-        </p:style>
-        <p:txBody>
-          <a:bodyPr rtlCol="0" anchor="ctr"/>
-          <a:lstStyle/>
-          <a:p>
-            <a:pPr algn="ctr"/>
-            <a:endParaRPr lang="en-US" dirty="0"/>
-          </a:p>
-        </p:txBody>
-      </p:sp>
-      <p:sp>
-        <p:nvSpPr>
-          <p:cNvPr id="13" name="Rectangle 12">
-            <a:extLst>
-              <a:ext uri="{FF2B5EF4-FFF2-40B4-BE49-F238E27FC236}">
-                <a16:creationId xmlns:a16="http://schemas.microsoft.com/office/drawing/2014/main" id="{2EAE06A6-F76A-41C9-827A-C561B004485C}"/>
-              </a:ext>
-              <a:ext uri="{C183D7F6-B498-43B3-948B-1728B52AA6E4}">
-                <adec:decorative xmlns:adec="http://schemas.microsoft.com/office/drawing/2017/decorative" val="1"/>
-              </a:ext>
-            </a:extLst>
-          </p:cNvPr>
-          <p:cNvSpPr>
-            <a:spLocks noGrp="1" noRot="1" noChangeAspect="1" noMove="1" noResize="1" noEditPoints="1" noAdjustHandles="1" noChangeArrowheads="1" noChangeShapeType="1" noTextEdit="1"/>
-          </p:cNvSpPr>
-          <p:nvPr>
-            <p:extLst>
-              <p:ext uri="{386F3935-93C4-4BCD-93E2-E3B085C9AB24}">
-                <p16:designElem xmlns:p16="http://schemas.microsoft.com/office/powerpoint/2015/main" val="1"/>
-              </p:ext>
-            </p:extLst>
-          </p:nvPr>
-        </p:nvSpPr>
-        <p:spPr>
-          <a:xfrm flipH="1">
-            <a:off x="0" y="-3"/>
-            <a:ext cx="12192000" cy="6858000"/>
-          </a:xfrm>
-          <a:prstGeom prst="rect">
-            <a:avLst/>
-          </a:prstGeom>
-          <a:gradFill>
-            <a:gsLst>
-              <a:gs pos="0">
-                <a:srgbClr val="000000"/>
-              </a:gs>
-              <a:gs pos="100000">
-                <a:schemeClr val="accent1">
-                  <a:lumMod val="75000"/>
-                </a:schemeClr>
-              </a:gs>
-            </a:gsLst>
-            <a:lin ang="6600000" scaled="0"/>
-          </a:gradFill>
-          <a:ln>
-            <a:noFill/>
-          </a:ln>
-        </p:spPr>
-        <p:style>
-          <a:lnRef idx="2">
-            <a:schemeClr val="accent1">
-              <a:shade val="50000"/>
-            </a:schemeClr>
-          </a:lnRef>
-          <a:fillRef idx="1">
-            <a:schemeClr val="accent1"/>
-          </a:fillRef>
-          <a:effectRef idx="0">
-            <a:schemeClr val="accent1"/>
-          </a:effectRef>
-          <a:fontRef idx="minor">
-            <a:schemeClr val="lt1"/>
-          </a:fontRef>
-        </p:style>
-        <p:txBody>
-          <a:bodyPr rtlCol="0" anchor="ctr"/>
-          <a:lstStyle/>
-          <a:p>
-            <a:pPr algn="ctr"/>
-            <a:endParaRPr lang="en-US" dirty="0"/>
-          </a:p>
-        </p:txBody>
-      </p:sp>
-      <p:sp>
-        <p:nvSpPr>
-          <p:cNvPr id="15" name="Rectangle 14">
-            <a:extLst>
-              <a:ext uri="{FF2B5EF4-FFF2-40B4-BE49-F238E27FC236}">
-                <a16:creationId xmlns:a16="http://schemas.microsoft.com/office/drawing/2014/main" id="{89F9D4E8-0639-444B-949B-9518585061AF}"/>
-              </a:ext>
-              <a:ext uri="{C183D7F6-B498-43B3-948B-1728B52AA6E4}">
-                <adec:decorative xmlns:adec="http://schemas.microsoft.com/office/drawing/2017/decorative" val="1"/>
-              </a:ext>
-            </a:extLst>
-          </p:cNvPr>
-          <p:cNvSpPr>
-            <a:spLocks noGrp="1" noRot="1" noChangeAspect="1" noMove="1" noResize="1" noEditPoints="1" noAdjustHandles="1" noChangeArrowheads="1" noChangeShapeType="1" noTextEdit="1"/>
-          </p:cNvSpPr>
-          <p:nvPr>
-            <p:extLst>
-              <p:ext uri="{386F3935-93C4-4BCD-93E2-E3B085C9AB24}">
-                <p16:designElem xmlns:p16="http://schemas.microsoft.com/office/powerpoint/2015/main" val="1"/>
-              </p:ext>
-            </p:extLst>
-          </p:nvPr>
-        </p:nvSpPr>
-        <p:spPr>
-          <a:xfrm flipH="1">
-            <a:off x="480861" y="0"/>
-            <a:ext cx="7661934" cy="6858000"/>
-          </a:xfrm>
-          <a:prstGeom prst="rect">
-            <a:avLst/>
-          </a:prstGeom>
-          <a:gradFill>
-            <a:gsLst>
-              <a:gs pos="0">
-                <a:schemeClr val="accent1">
-                  <a:lumMod val="75000"/>
-                  <a:alpha val="45000"/>
-                </a:schemeClr>
-              </a:gs>
-              <a:gs pos="100000">
-                <a:srgbClr val="000000">
-                  <a:alpha val="29000"/>
-                </a:srgbClr>
-              </a:gs>
-            </a:gsLst>
-            <a:lin ang="12000000" scaled="0"/>
-          </a:gradFill>
-          <a:ln>
-            <a:noFill/>
-          </a:ln>
-        </p:spPr>
-        <p:style>
-          <a:lnRef idx="2">
-            <a:schemeClr val="accent1">
-              <a:shade val="50000"/>
-            </a:schemeClr>
-          </a:lnRef>
-          <a:fillRef idx="1">
-            <a:schemeClr val="accent1"/>
-          </a:fillRef>
-          <a:effectRef idx="0">
-            <a:schemeClr val="accent1"/>
-          </a:effectRef>
-          <a:fontRef idx="minor">
-            <a:schemeClr val="lt1"/>
-          </a:fontRef>
-        </p:style>
-        <p:txBody>
-          <a:bodyPr rtlCol="0" anchor="ctr"/>
-          <a:lstStyle/>
-          <a:p>
-            <a:pPr algn="ctr"/>
-            <a:endParaRPr lang="en-US" dirty="0"/>
-          </a:p>
-        </p:txBody>
-      </p:sp>
-      <p:sp>
-        <p:nvSpPr>
-          <p:cNvPr id="17" name="Rectangle 16">
-            <a:extLst>
-              <a:ext uri="{FF2B5EF4-FFF2-40B4-BE49-F238E27FC236}">
-                <a16:creationId xmlns:a16="http://schemas.microsoft.com/office/drawing/2014/main" id="{7E3DA7A2-ED70-4BBA-AB72-00AD461FA405}"/>
-              </a:ext>
-              <a:ext uri="{C183D7F6-B498-43B3-948B-1728B52AA6E4}">
-                <adec:decorative xmlns:adec="http://schemas.microsoft.com/office/drawing/2017/decorative" val="1"/>
-              </a:ext>
-            </a:extLst>
-          </p:cNvPr>
-          <p:cNvSpPr>
-            <a:spLocks noGrp="1" noRot="1" noChangeAspect="1" noMove="1" noResize="1" noEditPoints="1" noAdjustHandles="1" noChangeArrowheads="1" noChangeShapeType="1" noTextEdit="1"/>
-          </p:cNvSpPr>
-          <p:nvPr>
-            <p:extLst>
-              <p:ext uri="{386F3935-93C4-4BCD-93E2-E3B085C9AB24}">
-                <p16:designElem xmlns:p16="http://schemas.microsoft.com/office/powerpoint/2015/main" val="1"/>
-              </p:ext>
-            </p:extLst>
-          </p:nvPr>
-        </p:nvSpPr>
-        <p:spPr>
-          <a:xfrm rot="10800000" flipH="1">
-            <a:off x="480862" y="-6"/>
-            <a:ext cx="11711138" cy="6410334"/>
-          </a:xfrm>
-          <a:prstGeom prst="rect">
-            <a:avLst/>
-          </a:prstGeom>
-          <a:gradFill>
-            <a:gsLst>
-              <a:gs pos="0">
-                <a:schemeClr val="accent1">
-                  <a:alpha val="0"/>
-                </a:schemeClr>
-              </a:gs>
-              <a:gs pos="100000">
-                <a:srgbClr val="000000">
-                  <a:alpha val="41000"/>
-                </a:srgbClr>
-              </a:gs>
-            </a:gsLst>
-            <a:lin ang="18000000" scaled="0"/>
-          </a:gradFill>
-          <a:ln>
-            <a:noFill/>
-          </a:ln>
-        </p:spPr>
-        <p:style>
-          <a:lnRef idx="2">
-            <a:schemeClr val="accent1">
-              <a:shade val="50000"/>
-            </a:schemeClr>
-          </a:lnRef>
-          <a:fillRef idx="1">
-            <a:schemeClr val="accent1"/>
-          </a:fillRef>
-          <a:effectRef idx="0">
-            <a:schemeClr val="accent1"/>
-          </a:effectRef>
-          <a:fontRef idx="minor">
-            <a:schemeClr val="lt1"/>
-          </a:fontRef>
-        </p:style>
-        <p:txBody>
-          <a:bodyPr rtlCol="0" anchor="ctr"/>
-          <a:lstStyle/>
-          <a:p>
-            <a:pPr algn="ctr"/>
-            <a:endParaRPr lang="en-US" dirty="0"/>
-          </a:p>
-        </p:txBody>
-      </p:sp>
-      <p:sp>
-        <p:nvSpPr>
-          <p:cNvPr id="4" name="Titel 3">
-            <a:extLst>
-              <a:ext uri="{FF2B5EF4-FFF2-40B4-BE49-F238E27FC236}">
-                <a16:creationId xmlns:a16="http://schemas.microsoft.com/office/drawing/2014/main" id="{889A43D4-4D3C-1E05-E15E-4D5A7B1A7B7A}"/>
-              </a:ext>
-            </a:extLst>
-          </p:cNvPr>
-          <p:cNvSpPr>
-            <a:spLocks noGrp="1"/>
-          </p:cNvSpPr>
-          <p:nvPr>
-            <p:ph type="title"/>
-          </p:nvPr>
-        </p:nvSpPr>
-        <p:spPr>
-          <a:xfrm>
-            <a:off x="1127208" y="857251"/>
-            <a:ext cx="4747280" cy="3098061"/>
-          </a:xfrm>
-        </p:spPr>
-        <p:txBody>
-          <a:bodyPr vert="horz" lIns="91440" tIns="45720" rIns="91440" bIns="45720" rtlCol="0" anchor="b">
-            <a:normAutofit/>
-          </a:bodyPr>
-          <a:lstStyle/>
-          <a:p>
-            <a:r>
-              <a:rPr lang="en-US" sz="4800" kern="1200">
-                <a:solidFill>
-                  <a:srgbClr val="FFFFFF"/>
-                </a:solidFill>
-                <a:latin typeface="+mj-lt"/>
-                <a:ea typeface="+mj-ea"/>
-                <a:cs typeface="+mj-cs"/>
-              </a:rPr>
-              <a:t>De tilemap</a:t>
-            </a:r>
-          </a:p>
-        </p:txBody>
-      </p:sp>
-      <p:sp>
-        <p:nvSpPr>
-          <p:cNvPr id="19" name="Rectangle 18">
-            <a:extLst>
-              <a:ext uri="{FF2B5EF4-FFF2-40B4-BE49-F238E27FC236}">
-                <a16:creationId xmlns:a16="http://schemas.microsoft.com/office/drawing/2014/main" id="{FC485432-3647-4218-B5D3-15D3FA222B13}"/>
-              </a:ext>
-              <a:ext uri="{C183D7F6-B498-43B3-948B-1728B52AA6E4}">
-                <adec:decorative xmlns:adec="http://schemas.microsoft.com/office/drawing/2017/decorative" val="1"/>
-              </a:ext>
-            </a:extLst>
-          </p:cNvPr>
-          <p:cNvSpPr>
-            <a:spLocks noGrp="1" noRot="1" noChangeAspect="1" noMove="1" noResize="1" noEditPoints="1" noAdjustHandles="1" noChangeArrowheads="1" noChangeShapeType="1" noTextEdit="1"/>
-          </p:cNvSpPr>
-          <p:nvPr>
-            <p:extLst>
-              <p:ext uri="{386F3935-93C4-4BCD-93E2-E3B085C9AB24}">
-                <p16:designElem xmlns:p16="http://schemas.microsoft.com/office/powerpoint/2015/main" val="1"/>
-              </p:ext>
-            </p:extLst>
-          </p:nvPr>
-        </p:nvSpPr>
-        <p:spPr>
-          <a:xfrm rot="16200000">
-            <a:off x="4844797" y="-489206"/>
-            <a:ext cx="2502408" cy="12191998"/>
-          </a:xfrm>
-          <a:prstGeom prst="rect">
-            <a:avLst/>
-          </a:prstGeom>
-          <a:gradFill>
-            <a:gsLst>
-              <a:gs pos="0">
-                <a:schemeClr val="accent1">
-                  <a:alpha val="24000"/>
-                </a:schemeClr>
-              </a:gs>
-              <a:gs pos="78000">
-                <a:schemeClr val="accent1">
-                  <a:lumMod val="50000"/>
-                  <a:alpha val="0"/>
-                </a:schemeClr>
-              </a:gs>
-            </a:gsLst>
-            <a:lin ang="10200000" scaled="0"/>
-          </a:gradFill>
-          <a:ln>
-            <a:noFill/>
-          </a:ln>
-        </p:spPr>
-        <p:style>
-          <a:lnRef idx="2">
-            <a:schemeClr val="accent1">
-              <a:shade val="50000"/>
-            </a:schemeClr>
-          </a:lnRef>
-          <a:fillRef idx="1">
-            <a:schemeClr val="accent1"/>
-          </a:fillRef>
-          <a:effectRef idx="0">
-            <a:schemeClr val="accent1"/>
-          </a:effectRef>
-          <a:fontRef idx="minor">
-            <a:schemeClr val="lt1"/>
-          </a:fontRef>
-        </p:style>
-        <p:txBody>
-          <a:bodyPr rtlCol="0" anchor="ctr"/>
-          <a:lstStyle/>
-          <a:p>
-            <a:pPr algn="ctr"/>
-            <a:endParaRPr lang="en-US"/>
-          </a:p>
-        </p:txBody>
-      </p:sp>
-      <p:sp>
-        <p:nvSpPr>
-          <p:cNvPr id="5" name="Tijdelijke aanduiding voor tekst 4">
-            <a:extLst>
-              <a:ext uri="{FF2B5EF4-FFF2-40B4-BE49-F238E27FC236}">
-                <a16:creationId xmlns:a16="http://schemas.microsoft.com/office/drawing/2014/main" id="{29130633-EF9A-B9B3-1A1F-DFA039DD88D5}"/>
-              </a:ext>
-            </a:extLst>
-          </p:cNvPr>
-          <p:cNvSpPr>
-            <a:spLocks noGrp="1"/>
-          </p:cNvSpPr>
-          <p:nvPr>
-            <p:ph type="body" idx="1"/>
-          </p:nvPr>
-        </p:nvSpPr>
-        <p:spPr>
-          <a:xfrm>
-            <a:off x="1127208" y="4756265"/>
-            <a:ext cx="4393278" cy="1244483"/>
-          </a:xfrm>
-        </p:spPr>
-        <p:txBody>
-          <a:bodyPr vert="horz" lIns="91440" tIns="45720" rIns="91440" bIns="45720" rtlCol="0" anchor="t">
-            <a:normAutofit/>
-          </a:bodyPr>
-          <a:lstStyle/>
-          <a:p>
-            <a:r>
-              <a:rPr lang="en-US" kern="1200">
-                <a:solidFill>
-                  <a:srgbClr val="FFFFFF"/>
-                </a:solidFill>
-                <a:latin typeface="+mn-lt"/>
-                <a:ea typeface="+mn-ea"/>
-                <a:cs typeface="+mn-cs"/>
-              </a:rPr>
-              <a:t>Eigenschappen van de tilemap</a:t>
-            </a:r>
-          </a:p>
-        </p:txBody>
-      </p:sp>
-      <p:sp>
-        <p:nvSpPr>
-          <p:cNvPr id="21" name="Oval 20">
-            <a:extLst>
-              <a:ext uri="{FF2B5EF4-FFF2-40B4-BE49-F238E27FC236}">
-                <a16:creationId xmlns:a16="http://schemas.microsoft.com/office/drawing/2014/main" id="{F4AFDDCA-6ABA-4D23-8A5C-1BF0F4308148}"/>
-              </a:ext>
-              <a:ext uri="{C183D7F6-B498-43B3-948B-1728B52AA6E4}">
-                <adec:decorative xmlns:adec="http://schemas.microsoft.com/office/drawing/2017/decorative" val="1"/>
-              </a:ext>
-            </a:extLst>
-          </p:cNvPr>
-          <p:cNvSpPr>
-            <a:spLocks noGrp="1" noRot="1" noChangeAspect="1" noMove="1" noResize="1" noEditPoints="1" noAdjustHandles="1" noChangeArrowheads="1" noChangeShapeType="1" noTextEdit="1"/>
-          </p:cNvSpPr>
-          <p:nvPr>
-            <p:extLst>
-              <p:ext uri="{386F3935-93C4-4BCD-93E2-E3B085C9AB24}">
-                <p16:designElem xmlns:p16="http://schemas.microsoft.com/office/powerpoint/2015/main" val="1"/>
-              </p:ext>
-            </p:extLst>
-          </p:nvPr>
-        </p:nvSpPr>
-        <p:spPr>
-          <a:xfrm>
-            <a:off x="6390589" y="1062544"/>
-            <a:ext cx="4756162" cy="4756162"/>
-          </a:xfrm>
-          <a:prstGeom prst="ellipse">
-            <a:avLst/>
-          </a:prstGeom>
-          <a:solidFill>
-            <a:schemeClr val="bg1"/>
-          </a:solidFill>
-          <a:ln>
-            <a:noFill/>
-          </a:ln>
-        </p:spPr>
-        <p:style>
-          <a:lnRef idx="2">
-            <a:schemeClr val="accent1">
-              <a:shade val="50000"/>
-            </a:schemeClr>
-          </a:lnRef>
-          <a:fillRef idx="1">
-            <a:schemeClr val="accent1"/>
-          </a:fillRef>
-          <a:effectRef idx="0">
-            <a:schemeClr val="accent1"/>
-          </a:effectRef>
-          <a:fontRef idx="minor">
-            <a:schemeClr val="lt1"/>
-          </a:fontRef>
-        </p:style>
-        <p:txBody>
-          <a:bodyPr rtlCol="0" anchor="ctr"/>
-          <a:lstStyle/>
-          <a:p>
-            <a:pPr algn="ctr"/>
-            <a:endParaRPr lang="en-US"/>
-          </a:p>
-        </p:txBody>
-      </p:sp>
-      <p:pic>
-        <p:nvPicPr>
-          <p:cNvPr id="6" name="Picture 2" descr="Unity Tilemap | Unity Tutorial | NotSlot">
-            <a:extLst>
-              <a:ext uri="{FF2B5EF4-FFF2-40B4-BE49-F238E27FC236}">
-                <a16:creationId xmlns:a16="http://schemas.microsoft.com/office/drawing/2014/main" id="{EBC18240-EEA5-507E-2205-869626DA9B69}"/>
-              </a:ext>
-            </a:extLst>
-          </p:cNvPr>
-          <p:cNvPicPr>
-            <a:picLocks noChangeAspect="1" noChangeArrowheads="1"/>
-          </p:cNvPicPr>
-          <p:nvPr/>
-        </p:nvPicPr>
-        <p:blipFill>
-          <a:blip r:embed="rId2">
-            <a:extLst>
-              <a:ext uri="{28A0092B-C50C-407E-A947-70E740481C1C}">
-                <a14:useLocalDpi xmlns:a14="http://schemas.microsoft.com/office/drawing/2010/main" val="0"/>
-              </a:ext>
-            </a:extLst>
-          </a:blip>
-          <a:stretch>
-            <a:fillRect/>
-          </a:stretch>
-        </p:blipFill>
-        <p:spPr bwMode="auto">
-          <a:xfrm>
-            <a:off x="6920559" y="2389738"/>
-            <a:ext cx="3737164" cy="2092811"/>
-          </a:xfrm>
-          <a:prstGeom prst="rect">
-            <a:avLst/>
-          </a:prstGeom>
-          <a:noFill/>
-          <a:extLst>
-            <a:ext uri="{909E8E84-426E-40DD-AFC4-6F175D3DCCD1}">
-              <a14:hiddenFill xmlns:a14="http://schemas.microsoft.com/office/drawing/2010/main">
-                <a:solidFill>
-                  <a:srgbClr val="FFFFFF"/>
-                </a:solidFill>
-              </a14:hiddenFill>
-            </a:ext>
-          </a:extLst>
-        </p:spPr>
-      </p:pic>
-    </p:spTree>
-    <p:extLst>
-      <p:ext uri="{BB962C8B-B14F-4D97-AF65-F5344CB8AC3E}">
-        <p14:creationId xmlns:p14="http://schemas.microsoft.com/office/powerpoint/2010/main" val="256746609"/>
-      </p:ext>
-    </p:extLst>
-  </p:cSld>
-  <p:clrMapOvr>
-    <a:masterClrMapping/>
-  </p:clrMapOvr>
-</p:sld>
-</file>
-
-<file path=ppt/slides/slide4.xml><?xml version="1.0" encoding="utf-8"?>
 <p:sld xmlns:a="http://schemas.openxmlformats.org/drawingml/2006/main" xmlns:r="http://schemas.openxmlformats.org/officeDocument/2006/relationships" xmlns:p="http://schemas.openxmlformats.org/presentationml/2006/main">
   <p:cSld>
     <p:spTree>
@@ -6166,6 +4288,467 @@
 </p:sld>
 </file>
 
+<file path=ppt/slides/slide3.xml><?xml version="1.0" encoding="utf-8"?>
+<p:sld xmlns:a="http://schemas.openxmlformats.org/drawingml/2006/main" xmlns:r="http://schemas.openxmlformats.org/officeDocument/2006/relationships" xmlns:p="http://schemas.openxmlformats.org/presentationml/2006/main">
+  <p:cSld>
+    <p:spTree>
+      <p:nvGrpSpPr>
+        <p:cNvPr id="1" name=""/>
+        <p:cNvGrpSpPr/>
+        <p:nvPr/>
+      </p:nvGrpSpPr>
+      <p:grpSpPr>
+        <a:xfrm>
+          <a:off x="0" y="0"/>
+          <a:ext cx="0" cy="0"/>
+          <a:chOff x="0" y="0"/>
+          <a:chExt cx="0" cy="0"/>
+        </a:xfrm>
+      </p:grpSpPr>
+      <p:sp>
+        <p:nvSpPr>
+          <p:cNvPr id="2" name="Titel 1">
+            <a:extLst>
+              <a:ext uri="{FF2B5EF4-FFF2-40B4-BE49-F238E27FC236}">
+                <a16:creationId xmlns:a16="http://schemas.microsoft.com/office/drawing/2014/main" id="{06C1E204-452E-2559-3616-AAAB30F4DC86}"/>
+              </a:ext>
+            </a:extLst>
+          </p:cNvPr>
+          <p:cNvSpPr>
+            <a:spLocks noGrp="1"/>
+          </p:cNvSpPr>
+          <p:nvPr>
+            <p:ph type="title"/>
+          </p:nvPr>
+        </p:nvSpPr>
+        <p:spPr/>
+        <p:txBody>
+          <a:bodyPr/>
+          <a:lstStyle/>
+          <a:p>
+            <a:r>
+              <a:rPr lang="en-US" dirty="0" err="1"/>
+              <a:t>Drie</a:t>
+            </a:r>
+            <a:r>
+              <a:rPr lang="en-US" dirty="0"/>
+              <a:t> </a:t>
+            </a:r>
+            <a:r>
+              <a:rPr lang="en-US" dirty="0" err="1"/>
+              <a:t>posities</a:t>
+            </a:r>
+            <a:r>
+              <a:rPr lang="en-US" dirty="0"/>
+              <a:t> van </a:t>
+            </a:r>
+            <a:r>
+              <a:rPr lang="en-US" dirty="0" err="1"/>
+              <a:t>belang</a:t>
+            </a:r>
+            <a:endParaRPr lang="nl-NL" dirty="0"/>
+          </a:p>
+        </p:txBody>
+      </p:sp>
+      <p:sp>
+        <p:nvSpPr>
+          <p:cNvPr id="3" name="Tijdelijke aanduiding voor inhoud 2">
+            <a:extLst>
+              <a:ext uri="{FF2B5EF4-FFF2-40B4-BE49-F238E27FC236}">
+                <a16:creationId xmlns:a16="http://schemas.microsoft.com/office/drawing/2014/main" id="{8CE2174D-010B-280B-4236-C0B83D51DEC2}"/>
+              </a:ext>
+            </a:extLst>
+          </p:cNvPr>
+          <p:cNvSpPr>
+            <a:spLocks noGrp="1"/>
+          </p:cNvSpPr>
+          <p:nvPr>
+            <p:ph idx="1"/>
+          </p:nvPr>
+        </p:nvSpPr>
+        <p:spPr/>
+        <p:txBody>
+          <a:bodyPr>
+            <a:normAutofit/>
+          </a:bodyPr>
+          <a:lstStyle/>
+          <a:p>
+            <a:r>
+              <a:rPr lang="en-US" dirty="0"/>
+              <a:t>De </a:t>
+            </a:r>
+            <a:r>
+              <a:rPr lang="en-US" dirty="0" err="1"/>
+              <a:t>positie</a:t>
+            </a:r>
+            <a:r>
+              <a:rPr lang="en-US" dirty="0"/>
+              <a:t> van de </a:t>
+            </a:r>
+            <a:r>
+              <a:rPr lang="en-US" dirty="0" err="1"/>
+              <a:t>muis</a:t>
+            </a:r>
+            <a:endParaRPr lang="en-US" dirty="0"/>
+          </a:p>
+          <a:p>
+            <a:pPr lvl="1"/>
+            <a:r>
+              <a:rPr lang="nl-NL" dirty="0">
+                <a:latin typeface="Courier New" panose="02070309020205020404" pitchFamily="49" charset="0"/>
+                <a:cs typeface="Courier New" panose="02070309020205020404" pitchFamily="49" charset="0"/>
+              </a:rPr>
+              <a:t>Vector3 </a:t>
+            </a:r>
+            <a:r>
+              <a:rPr lang="nl-NL" dirty="0" err="1">
+                <a:latin typeface="Courier New" panose="02070309020205020404" pitchFamily="49" charset="0"/>
+                <a:cs typeface="Courier New" panose="02070309020205020404" pitchFamily="49" charset="0"/>
+              </a:rPr>
+              <a:t>MousePosition</a:t>
+            </a:r>
+            <a:r>
+              <a:rPr lang="nl-NL" dirty="0">
+                <a:latin typeface="Courier New" panose="02070309020205020404" pitchFamily="49" charset="0"/>
+                <a:cs typeface="Courier New" panose="02070309020205020404" pitchFamily="49" charset="0"/>
+              </a:rPr>
+              <a:t> = </a:t>
+            </a:r>
+            <a:r>
+              <a:rPr lang="nl-NL" dirty="0" err="1">
+                <a:latin typeface="Courier New" panose="02070309020205020404" pitchFamily="49" charset="0"/>
+                <a:cs typeface="Courier New" panose="02070309020205020404" pitchFamily="49" charset="0"/>
+              </a:rPr>
+              <a:t>Input.mousePosition</a:t>
+            </a:r>
+            <a:r>
+              <a:rPr lang="nl-NL" dirty="0">
+                <a:latin typeface="Courier New" panose="02070309020205020404" pitchFamily="49" charset="0"/>
+                <a:cs typeface="Courier New" panose="02070309020205020404" pitchFamily="49" charset="0"/>
+              </a:rPr>
+              <a:t>;</a:t>
+            </a:r>
+          </a:p>
+          <a:p>
+            <a:pPr lvl="1"/>
+            <a:endParaRPr lang="en-US" dirty="0"/>
+          </a:p>
+          <a:p>
+            <a:r>
+              <a:rPr lang="en-US" dirty="0"/>
+              <a:t>De </a:t>
+            </a:r>
+            <a:r>
+              <a:rPr lang="en-US" dirty="0" err="1"/>
+              <a:t>wereldpositie</a:t>
+            </a:r>
+            <a:r>
+              <a:rPr lang="en-US" dirty="0"/>
+              <a:t> van de </a:t>
+            </a:r>
+            <a:r>
+              <a:rPr lang="en-US" dirty="0" err="1"/>
+              <a:t>muis</a:t>
+            </a:r>
+            <a:endParaRPr lang="en-US" dirty="0"/>
+          </a:p>
+          <a:p>
+            <a:pPr lvl="1"/>
+            <a:r>
+              <a:rPr lang="en-US" dirty="0">
+                <a:latin typeface="Courier New" panose="02070309020205020404" pitchFamily="49" charset="0"/>
+                <a:cs typeface="Courier New" panose="02070309020205020404" pitchFamily="49" charset="0"/>
+              </a:rPr>
+              <a:t>Vector3 </a:t>
+            </a:r>
+            <a:r>
+              <a:rPr lang="en-US" dirty="0" err="1">
+                <a:latin typeface="Courier New" panose="02070309020205020404" pitchFamily="49" charset="0"/>
+                <a:cs typeface="Courier New" panose="02070309020205020404" pitchFamily="49" charset="0"/>
+              </a:rPr>
+              <a:t>WorldPosition</a:t>
+            </a:r>
+            <a:r>
+              <a:rPr lang="en-US" dirty="0">
+                <a:latin typeface="Courier New" panose="02070309020205020404" pitchFamily="49" charset="0"/>
+                <a:cs typeface="Courier New" panose="02070309020205020404" pitchFamily="49" charset="0"/>
+              </a:rPr>
+              <a:t> = </a:t>
+            </a:r>
+            <a:r>
+              <a:rPr lang="en-US" dirty="0" err="1">
+                <a:latin typeface="Courier New" panose="02070309020205020404" pitchFamily="49" charset="0"/>
+                <a:cs typeface="Courier New" panose="02070309020205020404" pitchFamily="49" charset="0"/>
+              </a:rPr>
+              <a:t>Camera.main.ScreenToWorldPoint</a:t>
+            </a:r>
+            <a:r>
+              <a:rPr lang="en-US" dirty="0">
+                <a:latin typeface="Courier New" panose="02070309020205020404" pitchFamily="49" charset="0"/>
+                <a:cs typeface="Courier New" panose="02070309020205020404" pitchFamily="49" charset="0"/>
+              </a:rPr>
+              <a:t>( </a:t>
+            </a:r>
+            <a:r>
+              <a:rPr lang="en-US" dirty="0" err="1">
+                <a:latin typeface="Courier New" panose="02070309020205020404" pitchFamily="49" charset="0"/>
+                <a:cs typeface="Courier New" panose="02070309020205020404" pitchFamily="49" charset="0"/>
+              </a:rPr>
+              <a:t>MousePosition</a:t>
+            </a:r>
+            <a:r>
+              <a:rPr lang="en-US" dirty="0">
+                <a:latin typeface="Courier New" panose="02070309020205020404" pitchFamily="49" charset="0"/>
+                <a:cs typeface="Courier New" panose="02070309020205020404" pitchFamily="49" charset="0"/>
+              </a:rPr>
+              <a:t> );</a:t>
+            </a:r>
+          </a:p>
+          <a:p>
+            <a:pPr lvl="1"/>
+            <a:endParaRPr lang="en-US" dirty="0"/>
+          </a:p>
+          <a:p>
+            <a:r>
+              <a:rPr lang="en-US" dirty="0"/>
+              <a:t>De </a:t>
+            </a:r>
+            <a:r>
+              <a:rPr lang="en-US" dirty="0" err="1"/>
+              <a:t>positie</a:t>
+            </a:r>
+            <a:r>
+              <a:rPr lang="en-US" dirty="0"/>
+              <a:t> van de Cell </a:t>
+            </a:r>
+            <a:r>
+              <a:rPr lang="en-US" dirty="0" err="1"/>
+              <a:t>waar</a:t>
+            </a:r>
+            <a:r>
+              <a:rPr lang="en-US" dirty="0"/>
+              <a:t> op is </a:t>
+            </a:r>
+            <a:r>
+              <a:rPr lang="en-US" dirty="0" err="1"/>
+              <a:t>geklikt</a:t>
+            </a:r>
+            <a:endParaRPr lang="en-US" dirty="0"/>
+          </a:p>
+          <a:p>
+            <a:pPr lvl="1"/>
+            <a:r>
+              <a:rPr lang="en-US" sz="1400" dirty="0">
+                <a:latin typeface="Courier New" panose="02070309020205020404" pitchFamily="49" charset="0"/>
+                <a:cs typeface="Courier New" panose="02070309020205020404" pitchFamily="49" charset="0"/>
+              </a:rPr>
+              <a:t>Vector3Int </a:t>
+            </a:r>
+            <a:r>
+              <a:rPr lang="en-US" sz="1400" dirty="0" err="1">
+                <a:latin typeface="Courier New" panose="02070309020205020404" pitchFamily="49" charset="0"/>
+                <a:cs typeface="Courier New" panose="02070309020205020404" pitchFamily="49" charset="0"/>
+              </a:rPr>
+              <a:t>CellPosition</a:t>
+            </a:r>
+            <a:r>
+              <a:rPr lang="en-US" sz="1400" dirty="0">
+                <a:latin typeface="Courier New" panose="02070309020205020404" pitchFamily="49" charset="0"/>
+                <a:cs typeface="Courier New" panose="02070309020205020404" pitchFamily="49" charset="0"/>
+              </a:rPr>
+              <a:t> = </a:t>
+            </a:r>
+            <a:r>
+              <a:rPr lang="en-US" sz="1400" dirty="0" err="1">
+                <a:latin typeface="Courier New" panose="02070309020205020404" pitchFamily="49" charset="0"/>
+                <a:cs typeface="Courier New" panose="02070309020205020404" pitchFamily="49" charset="0"/>
+              </a:rPr>
+              <a:t>myTilemap.WorldToCell</a:t>
+            </a:r>
+            <a:r>
+              <a:rPr lang="en-US" sz="1400" dirty="0">
+                <a:latin typeface="Courier New" panose="02070309020205020404" pitchFamily="49" charset="0"/>
+                <a:cs typeface="Courier New" panose="02070309020205020404" pitchFamily="49" charset="0"/>
+              </a:rPr>
+              <a:t>( </a:t>
+            </a:r>
+            <a:r>
+              <a:rPr lang="en-US" sz="1400" dirty="0" err="1">
+                <a:latin typeface="Courier New" panose="02070309020205020404" pitchFamily="49" charset="0"/>
+                <a:cs typeface="Courier New" panose="02070309020205020404" pitchFamily="49" charset="0"/>
+              </a:rPr>
+              <a:t>WorldPosition</a:t>
+            </a:r>
+            <a:r>
+              <a:rPr lang="en-US" sz="1400" dirty="0">
+                <a:latin typeface="Courier New" panose="02070309020205020404" pitchFamily="49" charset="0"/>
+                <a:cs typeface="Courier New" panose="02070309020205020404" pitchFamily="49" charset="0"/>
+              </a:rPr>
+              <a:t> );</a:t>
+            </a:r>
+            <a:endParaRPr lang="nl-NL" sz="1400" dirty="0">
+              <a:latin typeface="Courier New" panose="02070309020205020404" pitchFamily="49" charset="0"/>
+              <a:cs typeface="Courier New" panose="02070309020205020404" pitchFamily="49" charset="0"/>
+            </a:endParaRPr>
+          </a:p>
+        </p:txBody>
+      </p:sp>
+    </p:spTree>
+    <p:extLst>
+      <p:ext uri="{BB962C8B-B14F-4D97-AF65-F5344CB8AC3E}">
+        <p14:creationId xmlns:p14="http://schemas.microsoft.com/office/powerpoint/2010/main" val="1142169997"/>
+      </p:ext>
+    </p:extLst>
+  </p:cSld>
+  <p:clrMapOvr>
+    <a:masterClrMapping/>
+  </p:clrMapOvr>
+</p:sld>
+</file>
+
+<file path=ppt/slides/slide4.xml><?xml version="1.0" encoding="utf-8"?>
+<p:sld xmlns:a="http://schemas.openxmlformats.org/drawingml/2006/main" xmlns:r="http://schemas.openxmlformats.org/officeDocument/2006/relationships" xmlns:p="http://schemas.openxmlformats.org/presentationml/2006/main">
+  <p:cSld>
+    <p:spTree>
+      <p:nvGrpSpPr>
+        <p:cNvPr id="1" name=""/>
+        <p:cNvGrpSpPr/>
+        <p:nvPr/>
+      </p:nvGrpSpPr>
+      <p:grpSpPr>
+        <a:xfrm>
+          <a:off x="0" y="0"/>
+          <a:ext cx="0" cy="0"/>
+          <a:chOff x="0" y="0"/>
+          <a:chExt cx="0" cy="0"/>
+        </a:xfrm>
+      </p:grpSpPr>
+      <p:sp>
+        <p:nvSpPr>
+          <p:cNvPr id="2" name="Titel 1">
+            <a:extLst>
+              <a:ext uri="{FF2B5EF4-FFF2-40B4-BE49-F238E27FC236}">
+                <a16:creationId xmlns:a16="http://schemas.microsoft.com/office/drawing/2014/main" id="{2D27ED14-CDC6-93A9-CE11-A43635FE703F}"/>
+              </a:ext>
+            </a:extLst>
+          </p:cNvPr>
+          <p:cNvSpPr>
+            <a:spLocks noGrp="1"/>
+          </p:cNvSpPr>
+          <p:nvPr>
+            <p:ph type="title"/>
+          </p:nvPr>
+        </p:nvSpPr>
+        <p:spPr/>
+        <p:txBody>
+          <a:bodyPr/>
+          <a:lstStyle/>
+          <a:p>
+            <a:r>
+              <a:rPr lang="en-US" dirty="0" err="1"/>
+              <a:t>cellBounds</a:t>
+            </a:r>
+            <a:endParaRPr lang="nl-NL" dirty="0"/>
+          </a:p>
+        </p:txBody>
+      </p:sp>
+      <p:sp>
+        <p:nvSpPr>
+          <p:cNvPr id="3" name="Tijdelijke aanduiding voor inhoud 2">
+            <a:extLst>
+              <a:ext uri="{FF2B5EF4-FFF2-40B4-BE49-F238E27FC236}">
+                <a16:creationId xmlns:a16="http://schemas.microsoft.com/office/drawing/2014/main" id="{DBD3B470-FCAE-284D-5F76-F0ACFAE01287}"/>
+              </a:ext>
+            </a:extLst>
+          </p:cNvPr>
+          <p:cNvSpPr>
+            <a:spLocks noGrp="1"/>
+          </p:cNvSpPr>
+          <p:nvPr>
+            <p:ph type="body" idx="1"/>
+          </p:nvPr>
+        </p:nvSpPr>
+        <p:spPr/>
+        <p:txBody>
+          <a:bodyPr/>
+          <a:lstStyle/>
+          <a:p>
+            <a:r>
+              <a:rPr lang="en-US" dirty="0" err="1"/>
+              <a:t>Bepaal</a:t>
+            </a:r>
+            <a:r>
+              <a:rPr lang="en-US" dirty="0"/>
+              <a:t> de width </a:t>
+            </a:r>
+            <a:r>
+              <a:rPr lang="en-US" dirty="0" err="1"/>
+              <a:t>en</a:t>
+            </a:r>
+            <a:r>
+              <a:rPr lang="en-US" dirty="0"/>
+              <a:t> height van </a:t>
+            </a:r>
+            <a:r>
+              <a:rPr lang="en-US" dirty="0" err="1"/>
+              <a:t>een</a:t>
+            </a:r>
+            <a:r>
+              <a:rPr lang="en-US" dirty="0"/>
+              <a:t> </a:t>
+            </a:r>
+            <a:r>
+              <a:rPr lang="en-US" dirty="0" err="1"/>
+              <a:t>tilemap</a:t>
+            </a:r>
+            <a:endParaRPr lang="en-US" dirty="0"/>
+          </a:p>
+          <a:p>
+            <a:r>
+              <a:rPr lang="en-US" dirty="0" err="1"/>
+              <a:t>Bepaal</a:t>
+            </a:r>
+            <a:r>
+              <a:rPr lang="en-US" dirty="0"/>
+              <a:t> de </a:t>
+            </a:r>
+            <a:r>
+              <a:rPr lang="en-US" dirty="0" err="1"/>
+              <a:t>cellpositie</a:t>
+            </a:r>
+            <a:r>
+              <a:rPr lang="en-US" dirty="0"/>
+              <a:t> van de tile </a:t>
+            </a:r>
+            <a:r>
+              <a:rPr lang="en-US" dirty="0" err="1"/>
+              <a:t>linksboven</a:t>
+            </a:r>
+            <a:r>
+              <a:rPr lang="en-US" dirty="0"/>
+              <a:t> van de </a:t>
+            </a:r>
+            <a:r>
+              <a:rPr lang="en-US" dirty="0" err="1"/>
+              <a:t>tilemap</a:t>
+            </a:r>
+            <a:endParaRPr lang="nl-NL" dirty="0"/>
+          </a:p>
+        </p:txBody>
+      </p:sp>
+    </p:spTree>
+    <p:extLst>
+      <p:ext uri="{BB962C8B-B14F-4D97-AF65-F5344CB8AC3E}">
+        <p14:creationId xmlns:p14="http://schemas.microsoft.com/office/powerpoint/2010/main" val="13667862"/>
+      </p:ext>
+    </p:extLst>
+  </p:cSld>
+  <p:clrMapOvr>
+    <a:masterClrMapping/>
+  </p:clrMapOvr>
+</p:sld>
+</file>
+
 <file path=ppt/slides/slide5.xml><?xml version="1.0" encoding="utf-8"?>
 <p:sld xmlns:a="http://schemas.openxmlformats.org/drawingml/2006/main" xmlns:r="http://schemas.openxmlformats.org/officeDocument/2006/relationships" xmlns:p="http://schemas.openxmlformats.org/presentationml/2006/main">
   <p:cSld>
@@ -6185,10 +4768,10 @@
       </p:grpSpPr>
       <p:sp>
         <p:nvSpPr>
-          <p:cNvPr id="2" name="Titel 1">
-            <a:extLst>
-              <a:ext uri="{FF2B5EF4-FFF2-40B4-BE49-F238E27FC236}">
-                <a16:creationId xmlns:a16="http://schemas.microsoft.com/office/drawing/2014/main" id="{06C1E204-452E-2559-3616-AAAB30F4DC86}"/>
+          <p:cNvPr id="4" name="Titel 3">
+            <a:extLst>
+              <a:ext uri="{FF2B5EF4-FFF2-40B4-BE49-F238E27FC236}">
+                <a16:creationId xmlns:a16="http://schemas.microsoft.com/office/drawing/2014/main" id="{D0E6194B-3C49-6719-D0E3-25D816093F6F}"/>
               </a:ext>
             </a:extLst>
           </p:cNvPr>
@@ -6202,53 +4785,6 @@
         <p:spPr/>
         <p:txBody>
           <a:bodyPr/>
-          <a:lstStyle/>
-          <a:p>
-            <a:r>
-              <a:rPr lang="en-US" dirty="0" err="1"/>
-              <a:t>Drie</a:t>
-            </a:r>
-            <a:r>
-              <a:rPr lang="en-US" dirty="0"/>
-              <a:t> </a:t>
-            </a:r>
-            <a:r>
-              <a:rPr lang="en-US" dirty="0" err="1"/>
-              <a:t>posities</a:t>
-            </a:r>
-            <a:r>
-              <a:rPr lang="en-US" dirty="0"/>
-              <a:t> van </a:t>
-            </a:r>
-            <a:r>
-              <a:rPr lang="en-US" dirty="0" err="1"/>
-              <a:t>belang</a:t>
-            </a:r>
-            <a:endParaRPr lang="nl-NL" dirty="0"/>
-          </a:p>
-        </p:txBody>
-      </p:sp>
-      <p:sp>
-        <p:nvSpPr>
-          <p:cNvPr id="3" name="Tijdelijke aanduiding voor inhoud 2">
-            <a:extLst>
-              <a:ext uri="{FF2B5EF4-FFF2-40B4-BE49-F238E27FC236}">
-                <a16:creationId xmlns:a16="http://schemas.microsoft.com/office/drawing/2014/main" id="{8CE2174D-010B-280B-4236-C0B83D51DEC2}"/>
-              </a:ext>
-            </a:extLst>
-          </p:cNvPr>
-          <p:cNvSpPr>
-            <a:spLocks noGrp="1"/>
-          </p:cNvSpPr>
-          <p:nvPr>
-            <p:ph idx="1"/>
-          </p:nvPr>
-        </p:nvSpPr>
-        <p:spPr/>
-        <p:txBody>
-          <a:bodyPr>
-            <a:normAutofit/>
-          </a:bodyPr>
           <a:lstStyle/>
           <a:p>
             <a:r>
@@ -6257,47 +4793,85 @@
             </a:r>
             <a:r>
               <a:rPr lang="en-US" dirty="0" err="1"/>
-              <a:t>positie</a:t>
-            </a:r>
-            <a:r>
-              <a:rPr lang="en-US" dirty="0"/>
-              <a:t> van de </a:t>
-            </a:r>
-            <a:r>
-              <a:rPr lang="en-US" dirty="0" err="1"/>
-              <a:t>muis</a:t>
-            </a:r>
-            <a:endParaRPr lang="en-US" dirty="0"/>
-          </a:p>
-          <a:p>
-            <a:pPr lvl="1"/>
+              <a:t>cellBounds</a:t>
+            </a:r>
+            <a:endParaRPr lang="nl-NL" dirty="0"/>
+          </a:p>
+        </p:txBody>
+      </p:sp>
+      <p:sp>
+        <p:nvSpPr>
+          <p:cNvPr id="5" name="Tijdelijke aanduiding voor inhoud 4">
+            <a:extLst>
+              <a:ext uri="{FF2B5EF4-FFF2-40B4-BE49-F238E27FC236}">
+                <a16:creationId xmlns:a16="http://schemas.microsoft.com/office/drawing/2014/main" id="{2152DD7D-C7CB-F280-A447-595B9AB8891F}"/>
+              </a:ext>
+            </a:extLst>
+          </p:cNvPr>
+          <p:cNvSpPr>
+            <a:spLocks noGrp="1"/>
+          </p:cNvSpPr>
+          <p:nvPr>
+            <p:ph idx="1"/>
+          </p:nvPr>
+        </p:nvSpPr>
+        <p:spPr>
+          <a:solidFill>
+            <a:schemeClr val="bg1">
+              <a:lumMod val="85000"/>
+            </a:schemeClr>
+          </a:solidFill>
+        </p:spPr>
+        <p:txBody>
+          <a:bodyPr>
+            <a:normAutofit lnSpcReduction="10000"/>
+          </a:bodyPr>
+          <a:lstStyle/>
+          <a:p>
+            <a:pPr marL="0" indent="0">
+              <a:buNone/>
+            </a:pPr>
             <a:r>
               <a:rPr lang="nl-NL" dirty="0">
                 <a:latin typeface="Courier New" panose="02070309020205020404" pitchFamily="49" charset="0"/>
                 <a:cs typeface="Courier New" panose="02070309020205020404" pitchFamily="49" charset="0"/>
               </a:rPr>
-              <a:t>Vector3 </a:t>
+              <a:t> [</a:t>
             </a:r>
             <a:r>
               <a:rPr lang="nl-NL" dirty="0" err="1">
                 <a:latin typeface="Courier New" panose="02070309020205020404" pitchFamily="49" charset="0"/>
                 <a:cs typeface="Courier New" panose="02070309020205020404" pitchFamily="49" charset="0"/>
               </a:rPr>
-              <a:t>MousePosition</a:t>
+              <a:t>SerializeField</a:t>
             </a:r>
             <a:r>
               <a:rPr lang="nl-NL" dirty="0">
                 <a:latin typeface="Courier New" panose="02070309020205020404" pitchFamily="49" charset="0"/>
                 <a:cs typeface="Courier New" panose="02070309020205020404" pitchFamily="49" charset="0"/>
               </a:rPr>
-              <a:t> = </a:t>
+              <a:t>] </a:t>
+            </a:r>
+            <a:r>
+              <a:rPr lang="nl-NL" b="1" dirty="0" err="1">
+                <a:latin typeface="Courier New" panose="02070309020205020404" pitchFamily="49" charset="0"/>
+                <a:cs typeface="Courier New" panose="02070309020205020404" pitchFamily="49" charset="0"/>
+              </a:rPr>
+              <a:t>Tilemap</a:t>
+            </a:r>
+            <a:r>
+              <a:rPr lang="nl-NL" dirty="0">
+                <a:latin typeface="Courier New" panose="02070309020205020404" pitchFamily="49" charset="0"/>
+                <a:cs typeface="Courier New" panose="02070309020205020404" pitchFamily="49" charset="0"/>
+              </a:rPr>
+              <a:t> </a:t>
             </a:r>
             <a:r>
               <a:rPr lang="nl-NL" dirty="0" err="1">
                 <a:latin typeface="Courier New" panose="02070309020205020404" pitchFamily="49" charset="0"/>
                 <a:cs typeface="Courier New" panose="02070309020205020404" pitchFamily="49" charset="0"/>
               </a:rPr>
-              <a:t>Input.mousePosition</a:t>
+              <a:t>myTilemap</a:t>
             </a:r>
             <a:r>
               <a:rPr lang="nl-NL" dirty="0">
@@ -6308,173 +4882,225 @@
             </a:r>
           </a:p>
           <a:p>
-            <a:pPr lvl="1"/>
-            <a:endParaRPr lang="en-US" dirty="0"/>
-          </a:p>
-          <a:p>
-            <a:r>
-              <a:rPr lang="en-US" dirty="0"/>
-              <a:t>De </a:t>
-            </a:r>
-            <a:r>
-              <a:rPr lang="en-US" dirty="0" err="1"/>
-              <a:t>wereldpositie</a:t>
-            </a:r>
-            <a:r>
-              <a:rPr lang="en-US" dirty="0"/>
-              <a:t> van de </a:t>
-            </a:r>
-            <a:r>
-              <a:rPr lang="en-US" dirty="0" err="1"/>
-              <a:t>muis</a:t>
-            </a:r>
-            <a:endParaRPr lang="en-US" dirty="0"/>
-          </a:p>
-          <a:p>
-            <a:pPr lvl="1"/>
-            <a:r>
-              <a:rPr lang="en-US" dirty="0">
-                <a:latin typeface="Courier New" panose="02070309020205020404" pitchFamily="49" charset="0"/>
-                <a:cs typeface="Courier New" panose="02070309020205020404" pitchFamily="49" charset="0"/>
-              </a:rPr>
-              <a:t>Vector3 </a:t>
-            </a:r>
-            <a:r>
-              <a:rPr lang="en-US" dirty="0" err="1">
-                <a:latin typeface="Courier New" panose="02070309020205020404" pitchFamily="49" charset="0"/>
-                <a:cs typeface="Courier New" panose="02070309020205020404" pitchFamily="49" charset="0"/>
-              </a:rPr>
-              <a:t>WorldPosition</a:t>
-            </a:r>
-            <a:r>
-              <a:rPr lang="en-US" dirty="0">
-                <a:latin typeface="Courier New" panose="02070309020205020404" pitchFamily="49" charset="0"/>
-                <a:cs typeface="Courier New" panose="02070309020205020404" pitchFamily="49" charset="0"/>
-              </a:rPr>
-              <a:t> = </a:t>
-            </a:r>
-            <a:r>
-              <a:rPr lang="en-US" dirty="0" err="1">
-                <a:latin typeface="Courier New" panose="02070309020205020404" pitchFamily="49" charset="0"/>
-                <a:cs typeface="Courier New" panose="02070309020205020404" pitchFamily="49" charset="0"/>
-              </a:rPr>
-              <a:t>Camera.main.ScreenToWorldPoint</a:t>
-            </a:r>
-            <a:r>
-              <a:rPr lang="en-US" dirty="0">
-                <a:latin typeface="Courier New" panose="02070309020205020404" pitchFamily="49" charset="0"/>
-                <a:cs typeface="Courier New" panose="02070309020205020404" pitchFamily="49" charset="0"/>
-              </a:rPr>
-              <a:t>( </a:t>
-            </a:r>
-            <a:r>
-              <a:rPr lang="en-US" dirty="0" err="1">
-                <a:latin typeface="Courier New" panose="02070309020205020404" pitchFamily="49" charset="0"/>
-                <a:cs typeface="Courier New" panose="02070309020205020404" pitchFamily="49" charset="0"/>
-              </a:rPr>
-              <a:t>MousePosition</a:t>
-            </a:r>
-            <a:r>
-              <a:rPr lang="en-US" dirty="0">
-                <a:latin typeface="Courier New" panose="02070309020205020404" pitchFamily="49" charset="0"/>
-                <a:cs typeface="Courier New" panose="02070309020205020404" pitchFamily="49" charset="0"/>
-              </a:rPr>
-              <a:t> );</a:t>
-            </a:r>
-          </a:p>
-          <a:p>
-            <a:pPr lvl="1"/>
-            <a:endParaRPr lang="en-US" dirty="0"/>
-          </a:p>
-          <a:p>
-            <a:r>
-              <a:rPr lang="en-US" dirty="0"/>
-              <a:t>De </a:t>
-            </a:r>
-            <a:r>
-              <a:rPr lang="en-US" dirty="0" err="1"/>
-              <a:t>positie</a:t>
-            </a:r>
-            <a:r>
-              <a:rPr lang="en-US" dirty="0"/>
-              <a:t> van de Cell </a:t>
-            </a:r>
-            <a:r>
-              <a:rPr lang="en-US" dirty="0" err="1"/>
-              <a:t>waar</a:t>
-            </a:r>
-            <a:r>
-              <a:rPr lang="en-US" dirty="0"/>
-              <a:t> op is </a:t>
-            </a:r>
-            <a:r>
-              <a:rPr lang="en-US" dirty="0" err="1"/>
-              <a:t>geklikt</a:t>
-            </a:r>
-            <a:endParaRPr lang="en-US" dirty="0"/>
-          </a:p>
-          <a:p>
-            <a:pPr lvl="1"/>
-            <a:r>
-              <a:rPr lang="en-US" sz="1400" dirty="0">
-                <a:latin typeface="Courier New" panose="02070309020205020404" pitchFamily="49" charset="0"/>
-                <a:cs typeface="Courier New" panose="02070309020205020404" pitchFamily="49" charset="0"/>
-              </a:rPr>
-              <a:t>Vector3Int </a:t>
-            </a:r>
-            <a:r>
-              <a:rPr lang="en-US" sz="1400" dirty="0" err="1">
-                <a:latin typeface="Courier New" panose="02070309020205020404" pitchFamily="49" charset="0"/>
-                <a:cs typeface="Courier New" panose="02070309020205020404" pitchFamily="49" charset="0"/>
-              </a:rPr>
-              <a:t>CellPosition</a:t>
-            </a:r>
-            <a:r>
-              <a:rPr lang="en-US" sz="1400" dirty="0">
-                <a:latin typeface="Courier New" panose="02070309020205020404" pitchFamily="49" charset="0"/>
-                <a:cs typeface="Courier New" panose="02070309020205020404" pitchFamily="49" charset="0"/>
-              </a:rPr>
-              <a:t> = </a:t>
-            </a:r>
-            <a:r>
-              <a:rPr lang="en-US" sz="1400" dirty="0" err="1">
-                <a:latin typeface="Courier New" panose="02070309020205020404" pitchFamily="49" charset="0"/>
-                <a:cs typeface="Courier New" panose="02070309020205020404" pitchFamily="49" charset="0"/>
-              </a:rPr>
-              <a:t>myTilemap.WorldToCell</a:t>
-            </a:r>
-            <a:r>
-              <a:rPr lang="en-US" sz="1400" dirty="0">
-                <a:latin typeface="Courier New" panose="02070309020205020404" pitchFamily="49" charset="0"/>
-                <a:cs typeface="Courier New" panose="02070309020205020404" pitchFamily="49" charset="0"/>
-              </a:rPr>
-              <a:t>( </a:t>
-            </a:r>
-            <a:r>
-              <a:rPr lang="en-US" sz="1400" dirty="0" err="1">
-                <a:latin typeface="Courier New" panose="02070309020205020404" pitchFamily="49" charset="0"/>
-                <a:cs typeface="Courier New" panose="02070309020205020404" pitchFamily="49" charset="0"/>
-              </a:rPr>
-              <a:t>WorldPosition</a:t>
-            </a:r>
-            <a:r>
-              <a:rPr lang="en-US" sz="1400" dirty="0">
-                <a:latin typeface="Courier New" panose="02070309020205020404" pitchFamily="49" charset="0"/>
-                <a:cs typeface="Courier New" panose="02070309020205020404" pitchFamily="49" charset="0"/>
-              </a:rPr>
-              <a:t> );</a:t>
-            </a:r>
-            <a:endParaRPr lang="nl-NL" sz="1400" dirty="0">
+            <a:pPr marL="0" indent="0">
+              <a:buNone/>
+            </a:pPr>
+            <a:endParaRPr lang="nl-NL" dirty="0">
               <a:latin typeface="Courier New" panose="02070309020205020404" pitchFamily="49" charset="0"/>
               <a:cs typeface="Courier New" panose="02070309020205020404" pitchFamily="49" charset="0"/>
             </a:endParaRPr>
           </a:p>
-        </p:txBody>
-      </p:sp>
+          <a:p>
+            <a:pPr marL="0" indent="0">
+              <a:buNone/>
+            </a:pPr>
+            <a:r>
+              <a:rPr lang="nl-NL" dirty="0">
+                <a:latin typeface="Courier New" panose="02070309020205020404" pitchFamily="49" charset="0"/>
+                <a:cs typeface="Courier New" panose="02070309020205020404" pitchFamily="49" charset="0"/>
+              </a:rPr>
+              <a:t>    </a:t>
+            </a:r>
+            <a:r>
+              <a:rPr lang="nl-NL" b="1" dirty="0" err="1">
+                <a:latin typeface="Courier New" panose="02070309020205020404" pitchFamily="49" charset="0"/>
+                <a:cs typeface="Courier New" panose="02070309020205020404" pitchFamily="49" charset="0"/>
+              </a:rPr>
+              <a:t>BoundsInt</a:t>
+            </a:r>
+            <a:r>
+              <a:rPr lang="nl-NL" dirty="0">
+                <a:latin typeface="Courier New" panose="02070309020205020404" pitchFamily="49" charset="0"/>
+                <a:cs typeface="Courier New" panose="02070309020205020404" pitchFamily="49" charset="0"/>
+              </a:rPr>
+              <a:t> </a:t>
+            </a:r>
+            <a:r>
+              <a:rPr lang="nl-NL" dirty="0" err="1">
+                <a:latin typeface="Courier New" panose="02070309020205020404" pitchFamily="49" charset="0"/>
+                <a:cs typeface="Courier New" panose="02070309020205020404" pitchFamily="49" charset="0"/>
+              </a:rPr>
+              <a:t>bounds</a:t>
+            </a:r>
+            <a:r>
+              <a:rPr lang="nl-NL" dirty="0">
+                <a:latin typeface="Courier New" panose="02070309020205020404" pitchFamily="49" charset="0"/>
+                <a:cs typeface="Courier New" panose="02070309020205020404" pitchFamily="49" charset="0"/>
+              </a:rPr>
+              <a:t>;</a:t>
+            </a:r>
+          </a:p>
+          <a:p>
+            <a:pPr marL="0" indent="0">
+              <a:buNone/>
+            </a:pPr>
+            <a:r>
+              <a:rPr lang="nl-NL" dirty="0">
+                <a:latin typeface="Courier New" panose="02070309020205020404" pitchFamily="49" charset="0"/>
+                <a:cs typeface="Courier New" panose="02070309020205020404" pitchFamily="49" charset="0"/>
+              </a:rPr>
+              <a:t>    </a:t>
+            </a:r>
+          </a:p>
+          <a:p>
+            <a:pPr marL="0" indent="0">
+              <a:buNone/>
+            </a:pPr>
+            <a:r>
+              <a:rPr lang="nl-NL" dirty="0" err="1">
+                <a:latin typeface="Courier New" panose="02070309020205020404" pitchFamily="49" charset="0"/>
+                <a:cs typeface="Courier New" panose="02070309020205020404" pitchFamily="49" charset="0"/>
+              </a:rPr>
+              <a:t>void</a:t>
+            </a:r>
+            <a:r>
+              <a:rPr lang="nl-NL" dirty="0">
+                <a:latin typeface="Courier New" panose="02070309020205020404" pitchFamily="49" charset="0"/>
+                <a:cs typeface="Courier New" panose="02070309020205020404" pitchFamily="49" charset="0"/>
+              </a:rPr>
+              <a:t> Start()</a:t>
+            </a:r>
+          </a:p>
+          <a:p>
+            <a:pPr marL="0" indent="0">
+              <a:buNone/>
+            </a:pPr>
+            <a:r>
+              <a:rPr lang="nl-NL" dirty="0">
+                <a:latin typeface="Courier New" panose="02070309020205020404" pitchFamily="49" charset="0"/>
+                <a:cs typeface="Courier New" panose="02070309020205020404" pitchFamily="49" charset="0"/>
+              </a:rPr>
+              <a:t>    {</a:t>
+            </a:r>
+          </a:p>
+          <a:p>
+            <a:pPr marL="0" indent="0">
+              <a:buNone/>
+            </a:pPr>
+            <a:r>
+              <a:rPr lang="nl-NL" dirty="0">
+                <a:latin typeface="Courier New" panose="02070309020205020404" pitchFamily="49" charset="0"/>
+                <a:cs typeface="Courier New" panose="02070309020205020404" pitchFamily="49" charset="0"/>
+              </a:rPr>
+              <a:t>        </a:t>
+            </a:r>
+            <a:r>
+              <a:rPr lang="nl-NL" dirty="0" err="1">
+                <a:latin typeface="Courier New" panose="02070309020205020404" pitchFamily="49" charset="0"/>
+                <a:cs typeface="Courier New" panose="02070309020205020404" pitchFamily="49" charset="0"/>
+              </a:rPr>
+              <a:t>bounds</a:t>
+            </a:r>
+            <a:r>
+              <a:rPr lang="nl-NL" dirty="0">
+                <a:latin typeface="Courier New" panose="02070309020205020404" pitchFamily="49" charset="0"/>
+                <a:cs typeface="Courier New" panose="02070309020205020404" pitchFamily="49" charset="0"/>
+              </a:rPr>
+              <a:t> = </a:t>
+            </a:r>
+            <a:r>
+              <a:rPr lang="nl-NL" dirty="0" err="1">
+                <a:latin typeface="Courier New" panose="02070309020205020404" pitchFamily="49" charset="0"/>
+                <a:cs typeface="Courier New" panose="02070309020205020404" pitchFamily="49" charset="0"/>
+              </a:rPr>
+              <a:t>myTilemap.cellBounds</a:t>
+            </a:r>
+            <a:r>
+              <a:rPr lang="nl-NL" dirty="0">
+                <a:latin typeface="Courier New" panose="02070309020205020404" pitchFamily="49" charset="0"/>
+                <a:cs typeface="Courier New" panose="02070309020205020404" pitchFamily="49" charset="0"/>
+              </a:rPr>
+              <a:t>;</a:t>
+            </a:r>
+          </a:p>
+          <a:p>
+            <a:pPr marL="0" indent="0">
+              <a:buNone/>
+            </a:pPr>
+            <a:r>
+              <a:rPr lang="nl-NL" dirty="0">
+                <a:latin typeface="Courier New" panose="02070309020205020404" pitchFamily="49" charset="0"/>
+                <a:cs typeface="Courier New" panose="02070309020205020404" pitchFamily="49" charset="0"/>
+              </a:rPr>
+              <a:t>        </a:t>
+            </a:r>
+            <a:r>
+              <a:rPr lang="nl-NL" dirty="0" err="1">
+                <a:latin typeface="Courier New" panose="02070309020205020404" pitchFamily="49" charset="0"/>
+                <a:cs typeface="Courier New" panose="02070309020205020404" pitchFamily="49" charset="0"/>
+              </a:rPr>
+              <a:t>Debug.Log</a:t>
+            </a:r>
+            <a:r>
+              <a:rPr lang="nl-NL" dirty="0">
+                <a:latin typeface="Courier New" panose="02070309020205020404" pitchFamily="49" charset="0"/>
+                <a:cs typeface="Courier New" panose="02070309020205020404" pitchFamily="49" charset="0"/>
+              </a:rPr>
+              <a:t>(</a:t>
+            </a:r>
+            <a:r>
+              <a:rPr lang="nl-NL" dirty="0" err="1">
+                <a:latin typeface="Courier New" panose="02070309020205020404" pitchFamily="49" charset="0"/>
+                <a:cs typeface="Courier New" panose="02070309020205020404" pitchFamily="49" charset="0"/>
+              </a:rPr>
+              <a:t>bounds</a:t>
+            </a:r>
+            <a:r>
+              <a:rPr lang="nl-NL" dirty="0">
+                <a:latin typeface="Courier New" panose="02070309020205020404" pitchFamily="49" charset="0"/>
+                <a:cs typeface="Courier New" panose="02070309020205020404" pitchFamily="49" charset="0"/>
+              </a:rPr>
+              <a:t>);</a:t>
+            </a:r>
+          </a:p>
+          <a:p>
+            <a:pPr marL="0" indent="0">
+              <a:buNone/>
+            </a:pPr>
+            <a:r>
+              <a:rPr lang="nl-NL" dirty="0">
+                <a:latin typeface="Courier New" panose="02070309020205020404" pitchFamily="49" charset="0"/>
+                <a:cs typeface="Courier New" panose="02070309020205020404" pitchFamily="49" charset="0"/>
+              </a:rPr>
+              <a:t>    }</a:t>
+            </a:r>
+          </a:p>
+        </p:txBody>
+      </p:sp>
+      <p:pic>
+        <p:nvPicPr>
+          <p:cNvPr id="7" name="Afbeelding 6">
+            <a:extLst>
+              <a:ext uri="{FF2B5EF4-FFF2-40B4-BE49-F238E27FC236}">
+                <a16:creationId xmlns:a16="http://schemas.microsoft.com/office/drawing/2014/main" id="{AA7C7541-79CF-D833-CCE4-536CAB93CA9A}"/>
+              </a:ext>
+            </a:extLst>
+          </p:cNvPr>
+          <p:cNvPicPr>
+            <a:picLocks noChangeAspect="1"/>
+          </p:cNvPicPr>
+          <p:nvPr/>
+        </p:nvPicPr>
+        <p:blipFill>
+          <a:blip r:embed="rId2"/>
+          <a:stretch>
+            <a:fillRect/>
+          </a:stretch>
+        </p:blipFill>
+        <p:spPr>
+          <a:xfrm>
+            <a:off x="7398784" y="5307249"/>
+            <a:ext cx="4534533" cy="1457528"/>
+          </a:xfrm>
+          <a:prstGeom prst="rect">
+            <a:avLst/>
+          </a:prstGeom>
+        </p:spPr>
+      </p:pic>
     </p:spTree>
     <p:extLst>
       <p:ext uri="{BB962C8B-B14F-4D97-AF65-F5344CB8AC3E}">
-        <p14:creationId xmlns:p14="http://schemas.microsoft.com/office/powerpoint/2010/main" val="1142169997"/>
+        <p14:creationId xmlns:p14="http://schemas.microsoft.com/office/powerpoint/2010/main" val="2545989669"/>
       </p:ext>
     </p:extLst>
   </p:cSld>
@@ -6485,153 +5111,6 @@
 </file>
 
 <file path=ppt/slides/slide6.xml><?xml version="1.0" encoding="utf-8"?>
-<p:sld xmlns:a="http://schemas.openxmlformats.org/drawingml/2006/main" xmlns:r="http://schemas.openxmlformats.org/officeDocument/2006/relationships" xmlns:p="http://schemas.openxmlformats.org/presentationml/2006/main">
-  <p:cSld>
-    <p:spTree>
-      <p:nvGrpSpPr>
-        <p:cNvPr id="1" name=""/>
-        <p:cNvGrpSpPr/>
-        <p:nvPr/>
-      </p:nvGrpSpPr>
-      <p:grpSpPr>
-        <a:xfrm>
-          <a:off x="0" y="0"/>
-          <a:ext cx="0" cy="0"/>
-          <a:chOff x="0" y="0"/>
-          <a:chExt cx="0" cy="0"/>
-        </a:xfrm>
-      </p:grpSpPr>
-      <p:sp>
-        <p:nvSpPr>
-          <p:cNvPr id="2" name="Titel 1">
-            <a:extLst>
-              <a:ext uri="{FF2B5EF4-FFF2-40B4-BE49-F238E27FC236}">
-                <a16:creationId xmlns:a16="http://schemas.microsoft.com/office/drawing/2014/main" id="{2D27ED14-CDC6-93A9-CE11-A43635FE703F}"/>
-              </a:ext>
-            </a:extLst>
-          </p:cNvPr>
-          <p:cNvSpPr>
-            <a:spLocks noGrp="1"/>
-          </p:cNvSpPr>
-          <p:nvPr>
-            <p:ph type="title"/>
-          </p:nvPr>
-        </p:nvSpPr>
-        <p:spPr/>
-        <p:txBody>
-          <a:bodyPr/>
-          <a:lstStyle/>
-          <a:p>
-            <a:r>
-              <a:rPr lang="en-US" dirty="0" err="1"/>
-              <a:t>Opdracht</a:t>
-            </a:r>
-            <a:r>
-              <a:rPr lang="en-US" dirty="0"/>
-              <a:t> 1</a:t>
-            </a:r>
-            <a:endParaRPr lang="nl-NL" dirty="0"/>
-          </a:p>
-        </p:txBody>
-      </p:sp>
-      <p:sp>
-        <p:nvSpPr>
-          <p:cNvPr id="3" name="Tijdelijke aanduiding voor inhoud 2">
-            <a:extLst>
-              <a:ext uri="{FF2B5EF4-FFF2-40B4-BE49-F238E27FC236}">
-                <a16:creationId xmlns:a16="http://schemas.microsoft.com/office/drawing/2014/main" id="{DBD3B470-FCAE-284D-5F76-F0ACFAE01287}"/>
-              </a:ext>
-            </a:extLst>
-          </p:cNvPr>
-          <p:cNvSpPr>
-            <a:spLocks noGrp="1"/>
-          </p:cNvSpPr>
-          <p:nvPr>
-            <p:ph type="body" idx="1"/>
-          </p:nvPr>
-        </p:nvSpPr>
-        <p:spPr/>
-        <p:txBody>
-          <a:bodyPr/>
-          <a:lstStyle/>
-          <a:p>
-            <a:r>
-              <a:rPr lang="en-US" dirty="0" err="1"/>
-              <a:t>Bepaal</a:t>
-            </a:r>
-            <a:r>
-              <a:rPr lang="en-US" dirty="0"/>
-              <a:t> de width </a:t>
-            </a:r>
-            <a:r>
-              <a:rPr lang="en-US" dirty="0" err="1"/>
-              <a:t>en</a:t>
-            </a:r>
-            <a:r>
-              <a:rPr lang="en-US" dirty="0"/>
-              <a:t> height van </a:t>
-            </a:r>
-            <a:r>
-              <a:rPr lang="en-US" dirty="0" err="1"/>
-              <a:t>een</a:t>
-            </a:r>
-            <a:r>
-              <a:rPr lang="en-US" dirty="0"/>
-              <a:t> </a:t>
-            </a:r>
-            <a:r>
-              <a:rPr lang="en-US" dirty="0" err="1"/>
-              <a:t>tilemap</a:t>
-            </a:r>
-            <a:endParaRPr lang="en-US" dirty="0"/>
-          </a:p>
-          <a:p>
-            <a:r>
-              <a:rPr lang="en-US" dirty="0" err="1"/>
-              <a:t>Bepaal</a:t>
-            </a:r>
-            <a:r>
-              <a:rPr lang="en-US" dirty="0"/>
-              <a:t> de </a:t>
-            </a:r>
-            <a:r>
-              <a:rPr lang="en-US" dirty="0" err="1"/>
-              <a:t>cellpositie</a:t>
-            </a:r>
-            <a:r>
-              <a:rPr lang="en-US" dirty="0"/>
-              <a:t> van de tile </a:t>
-            </a:r>
-            <a:r>
-              <a:rPr lang="en-US" dirty="0" err="1"/>
-              <a:t>linksboven</a:t>
-            </a:r>
-            <a:r>
-              <a:rPr lang="en-US" dirty="0"/>
-              <a:t> van de </a:t>
-            </a:r>
-            <a:r>
-              <a:rPr lang="en-US" dirty="0" err="1"/>
-              <a:t>tilemap</a:t>
-            </a:r>
-            <a:endParaRPr lang="nl-NL" dirty="0"/>
-          </a:p>
-        </p:txBody>
-      </p:sp>
-    </p:spTree>
-    <p:extLst>
-      <p:ext uri="{BB962C8B-B14F-4D97-AF65-F5344CB8AC3E}">
-        <p14:creationId xmlns:p14="http://schemas.microsoft.com/office/powerpoint/2010/main" val="13667862"/>
-      </p:ext>
-    </p:extLst>
-  </p:cSld>
-  <p:clrMapOvr>
-    <a:masterClrMapping/>
-  </p:clrMapOvr>
-</p:sld>
-</file>
-
-<file path=ppt/slides/slide7.xml><?xml version="1.0" encoding="utf-8"?>
 <p:sld xmlns:a="http://schemas.openxmlformats.org/drawingml/2006/main" xmlns:r="http://schemas.openxmlformats.org/officeDocument/2006/relationships" xmlns:p="http://schemas.openxmlformats.org/presentationml/2006/main">
   <p:cSld>
     <p:spTree>
@@ -7440,368 +5919,7 @@
 </p:sld>
 </file>
 
-<file path=ppt/slides/slide8.xml><?xml version="1.0" encoding="utf-8"?>
-<p:sld xmlns:a="http://schemas.openxmlformats.org/drawingml/2006/main" xmlns:r="http://schemas.openxmlformats.org/officeDocument/2006/relationships" xmlns:p="http://schemas.openxmlformats.org/presentationml/2006/main">
-  <p:cSld>
-    <p:spTree>
-      <p:nvGrpSpPr>
-        <p:cNvPr id="1" name=""/>
-        <p:cNvGrpSpPr/>
-        <p:nvPr/>
-      </p:nvGrpSpPr>
-      <p:grpSpPr>
-        <a:xfrm>
-          <a:off x="0" y="0"/>
-          <a:ext cx="0" cy="0"/>
-          <a:chOff x="0" y="0"/>
-          <a:chExt cx="0" cy="0"/>
-        </a:xfrm>
-      </p:grpSpPr>
-      <p:sp>
-        <p:nvSpPr>
-          <p:cNvPr id="4" name="Titel 3">
-            <a:extLst>
-              <a:ext uri="{FF2B5EF4-FFF2-40B4-BE49-F238E27FC236}">
-                <a16:creationId xmlns:a16="http://schemas.microsoft.com/office/drawing/2014/main" id="{D0E6194B-3C49-6719-D0E3-25D816093F6F}"/>
-              </a:ext>
-            </a:extLst>
-          </p:cNvPr>
-          <p:cNvSpPr>
-            <a:spLocks noGrp="1"/>
-          </p:cNvSpPr>
-          <p:nvPr>
-            <p:ph type="title"/>
-          </p:nvPr>
-        </p:nvSpPr>
-        <p:spPr/>
-        <p:txBody>
-          <a:bodyPr/>
-          <a:lstStyle/>
-          <a:p>
-            <a:r>
-              <a:rPr lang="en-US" dirty="0"/>
-              <a:t>De </a:t>
-            </a:r>
-            <a:r>
-              <a:rPr lang="en-US" dirty="0" err="1"/>
-              <a:t>cellBounds</a:t>
-            </a:r>
-            <a:endParaRPr lang="nl-NL" dirty="0"/>
-          </a:p>
-        </p:txBody>
-      </p:sp>
-      <p:sp>
-        <p:nvSpPr>
-          <p:cNvPr id="5" name="Tijdelijke aanduiding voor inhoud 4">
-            <a:extLst>
-              <a:ext uri="{FF2B5EF4-FFF2-40B4-BE49-F238E27FC236}">
-                <a16:creationId xmlns:a16="http://schemas.microsoft.com/office/drawing/2014/main" id="{2152DD7D-C7CB-F280-A447-595B9AB8891F}"/>
-              </a:ext>
-            </a:extLst>
-          </p:cNvPr>
-          <p:cNvSpPr>
-            <a:spLocks noGrp="1"/>
-          </p:cNvSpPr>
-          <p:nvPr>
-            <p:ph idx="1"/>
-          </p:nvPr>
-        </p:nvSpPr>
-        <p:spPr>
-          <a:solidFill>
-            <a:schemeClr val="bg1">
-              <a:lumMod val="85000"/>
-            </a:schemeClr>
-          </a:solidFill>
-        </p:spPr>
-        <p:txBody>
-          <a:bodyPr>
-            <a:normAutofit lnSpcReduction="10000"/>
-          </a:bodyPr>
-          <a:lstStyle/>
-          <a:p>
-            <a:pPr marL="0" indent="0">
-              <a:buNone/>
-            </a:pPr>
-            <a:r>
-              <a:rPr lang="nl-NL" dirty="0">
-                <a:latin typeface="Courier New" panose="02070309020205020404" pitchFamily="49" charset="0"/>
-                <a:cs typeface="Courier New" panose="02070309020205020404" pitchFamily="49" charset="0"/>
-              </a:rPr>
-              <a:t> [</a:t>
-            </a:r>
-            <a:r>
-              <a:rPr lang="nl-NL" dirty="0" err="1">
-                <a:latin typeface="Courier New" panose="02070309020205020404" pitchFamily="49" charset="0"/>
-                <a:cs typeface="Courier New" panose="02070309020205020404" pitchFamily="49" charset="0"/>
-              </a:rPr>
-              <a:t>SerializeField</a:t>
-            </a:r>
-            <a:r>
-              <a:rPr lang="nl-NL" dirty="0">
-                <a:latin typeface="Courier New" panose="02070309020205020404" pitchFamily="49" charset="0"/>
-                <a:cs typeface="Courier New" panose="02070309020205020404" pitchFamily="49" charset="0"/>
-              </a:rPr>
-              <a:t>] </a:t>
-            </a:r>
-            <a:r>
-              <a:rPr lang="nl-NL" b="1" dirty="0" err="1">
-                <a:latin typeface="Courier New" panose="02070309020205020404" pitchFamily="49" charset="0"/>
-                <a:cs typeface="Courier New" panose="02070309020205020404" pitchFamily="49" charset="0"/>
-              </a:rPr>
-              <a:t>Tilemap</a:t>
-            </a:r>
-            <a:r>
-              <a:rPr lang="nl-NL" dirty="0">
-                <a:latin typeface="Courier New" panose="02070309020205020404" pitchFamily="49" charset="0"/>
-                <a:cs typeface="Courier New" panose="02070309020205020404" pitchFamily="49" charset="0"/>
-              </a:rPr>
-              <a:t> </a:t>
-            </a:r>
-            <a:r>
-              <a:rPr lang="nl-NL" dirty="0" err="1">
-                <a:latin typeface="Courier New" panose="02070309020205020404" pitchFamily="49" charset="0"/>
-                <a:cs typeface="Courier New" panose="02070309020205020404" pitchFamily="49" charset="0"/>
-              </a:rPr>
-              <a:t>myTilemap</a:t>
-            </a:r>
-            <a:r>
-              <a:rPr lang="nl-NL" dirty="0">
-                <a:latin typeface="Courier New" panose="02070309020205020404" pitchFamily="49" charset="0"/>
-                <a:cs typeface="Courier New" panose="02070309020205020404" pitchFamily="49" charset="0"/>
-              </a:rPr>
-              <a:t>;</a:t>
-            </a:r>
-          </a:p>
-          <a:p>
-            <a:pPr marL="0" indent="0">
-              <a:buNone/>
-            </a:pPr>
-            <a:endParaRPr lang="nl-NL" dirty="0">
-              <a:latin typeface="Courier New" panose="02070309020205020404" pitchFamily="49" charset="0"/>
-              <a:cs typeface="Courier New" panose="02070309020205020404" pitchFamily="49" charset="0"/>
-            </a:endParaRPr>
-          </a:p>
-          <a:p>
-            <a:pPr marL="0" indent="0">
-              <a:buNone/>
-            </a:pPr>
-            <a:r>
-              <a:rPr lang="nl-NL" dirty="0">
-                <a:latin typeface="Courier New" panose="02070309020205020404" pitchFamily="49" charset="0"/>
-                <a:cs typeface="Courier New" panose="02070309020205020404" pitchFamily="49" charset="0"/>
-              </a:rPr>
-              <a:t>    </a:t>
-            </a:r>
-            <a:r>
-              <a:rPr lang="nl-NL" b="1" dirty="0" err="1">
-                <a:latin typeface="Courier New" panose="02070309020205020404" pitchFamily="49" charset="0"/>
-                <a:cs typeface="Courier New" panose="02070309020205020404" pitchFamily="49" charset="0"/>
-              </a:rPr>
-              <a:t>BoundsInt</a:t>
-            </a:r>
-            <a:r>
-              <a:rPr lang="nl-NL" dirty="0">
-                <a:latin typeface="Courier New" panose="02070309020205020404" pitchFamily="49" charset="0"/>
-                <a:cs typeface="Courier New" panose="02070309020205020404" pitchFamily="49" charset="0"/>
-              </a:rPr>
-              <a:t> </a:t>
-            </a:r>
-            <a:r>
-              <a:rPr lang="nl-NL" dirty="0" err="1">
-                <a:latin typeface="Courier New" panose="02070309020205020404" pitchFamily="49" charset="0"/>
-                <a:cs typeface="Courier New" panose="02070309020205020404" pitchFamily="49" charset="0"/>
-              </a:rPr>
-              <a:t>bounds</a:t>
-            </a:r>
-            <a:r>
-              <a:rPr lang="nl-NL" dirty="0">
-                <a:latin typeface="Courier New" panose="02070309020205020404" pitchFamily="49" charset="0"/>
-                <a:cs typeface="Courier New" panose="02070309020205020404" pitchFamily="49" charset="0"/>
-              </a:rPr>
-              <a:t>;</a:t>
-            </a:r>
-          </a:p>
-          <a:p>
-            <a:pPr marL="0" indent="0">
-              <a:buNone/>
-            </a:pPr>
-            <a:r>
-              <a:rPr lang="nl-NL" dirty="0">
-                <a:latin typeface="Courier New" panose="02070309020205020404" pitchFamily="49" charset="0"/>
-                <a:cs typeface="Courier New" panose="02070309020205020404" pitchFamily="49" charset="0"/>
-              </a:rPr>
-              <a:t>    </a:t>
-            </a:r>
-          </a:p>
-          <a:p>
-            <a:pPr marL="0" indent="0">
-              <a:buNone/>
-            </a:pPr>
-            <a:r>
-              <a:rPr lang="nl-NL" dirty="0" err="1">
-                <a:latin typeface="Courier New" panose="02070309020205020404" pitchFamily="49" charset="0"/>
-                <a:cs typeface="Courier New" panose="02070309020205020404" pitchFamily="49" charset="0"/>
-              </a:rPr>
-              <a:t>void</a:t>
-            </a:r>
-            <a:r>
-              <a:rPr lang="nl-NL" dirty="0">
-                <a:latin typeface="Courier New" panose="02070309020205020404" pitchFamily="49" charset="0"/>
-                <a:cs typeface="Courier New" panose="02070309020205020404" pitchFamily="49" charset="0"/>
-              </a:rPr>
-              <a:t> Start()</a:t>
-            </a:r>
-          </a:p>
-          <a:p>
-            <a:pPr marL="0" indent="0">
-              <a:buNone/>
-            </a:pPr>
-            <a:r>
-              <a:rPr lang="nl-NL" dirty="0">
-                <a:latin typeface="Courier New" panose="02070309020205020404" pitchFamily="49" charset="0"/>
-                <a:cs typeface="Courier New" panose="02070309020205020404" pitchFamily="49" charset="0"/>
-              </a:rPr>
-              <a:t>    {</a:t>
-            </a:r>
-          </a:p>
-          <a:p>
-            <a:pPr marL="0" indent="0">
-              <a:buNone/>
-            </a:pPr>
-            <a:r>
-              <a:rPr lang="nl-NL" dirty="0">
-                <a:latin typeface="Courier New" panose="02070309020205020404" pitchFamily="49" charset="0"/>
-                <a:cs typeface="Courier New" panose="02070309020205020404" pitchFamily="49" charset="0"/>
-              </a:rPr>
-              <a:t>        </a:t>
-            </a:r>
-            <a:r>
-              <a:rPr lang="nl-NL" dirty="0" err="1">
-                <a:latin typeface="Courier New" panose="02070309020205020404" pitchFamily="49" charset="0"/>
-                <a:cs typeface="Courier New" panose="02070309020205020404" pitchFamily="49" charset="0"/>
-              </a:rPr>
-              <a:t>bounds</a:t>
-            </a:r>
-            <a:r>
-              <a:rPr lang="nl-NL" dirty="0">
-                <a:latin typeface="Courier New" panose="02070309020205020404" pitchFamily="49" charset="0"/>
-                <a:cs typeface="Courier New" panose="02070309020205020404" pitchFamily="49" charset="0"/>
-              </a:rPr>
-              <a:t> = </a:t>
-            </a:r>
-            <a:r>
-              <a:rPr lang="nl-NL" dirty="0" err="1">
-                <a:latin typeface="Courier New" panose="02070309020205020404" pitchFamily="49" charset="0"/>
-                <a:cs typeface="Courier New" panose="02070309020205020404" pitchFamily="49" charset="0"/>
-              </a:rPr>
-              <a:t>myTilemap.cellBounds</a:t>
-            </a:r>
-            <a:r>
-              <a:rPr lang="nl-NL" dirty="0">
-                <a:latin typeface="Courier New" panose="02070309020205020404" pitchFamily="49" charset="0"/>
-                <a:cs typeface="Courier New" panose="02070309020205020404" pitchFamily="49" charset="0"/>
-              </a:rPr>
-              <a:t>;</a:t>
-            </a:r>
-          </a:p>
-          <a:p>
-            <a:pPr marL="0" indent="0">
-              <a:buNone/>
-            </a:pPr>
-            <a:r>
-              <a:rPr lang="nl-NL" dirty="0">
-                <a:latin typeface="Courier New" panose="02070309020205020404" pitchFamily="49" charset="0"/>
-                <a:cs typeface="Courier New" panose="02070309020205020404" pitchFamily="49" charset="0"/>
-              </a:rPr>
-              <a:t>        </a:t>
-            </a:r>
-            <a:r>
-              <a:rPr lang="nl-NL" dirty="0" err="1">
-                <a:latin typeface="Courier New" panose="02070309020205020404" pitchFamily="49" charset="0"/>
-                <a:cs typeface="Courier New" panose="02070309020205020404" pitchFamily="49" charset="0"/>
-              </a:rPr>
-              <a:t>Debug.Log</a:t>
-            </a:r>
-            <a:r>
-              <a:rPr lang="nl-NL" dirty="0">
-                <a:latin typeface="Courier New" panose="02070309020205020404" pitchFamily="49" charset="0"/>
-                <a:cs typeface="Courier New" panose="02070309020205020404" pitchFamily="49" charset="0"/>
-              </a:rPr>
-              <a:t>(</a:t>
-            </a:r>
-            <a:r>
-              <a:rPr lang="nl-NL" dirty="0" err="1">
-                <a:latin typeface="Courier New" panose="02070309020205020404" pitchFamily="49" charset="0"/>
-                <a:cs typeface="Courier New" panose="02070309020205020404" pitchFamily="49" charset="0"/>
-              </a:rPr>
-              <a:t>bounds</a:t>
-            </a:r>
-            <a:r>
-              <a:rPr lang="nl-NL" dirty="0">
-                <a:latin typeface="Courier New" panose="02070309020205020404" pitchFamily="49" charset="0"/>
-                <a:cs typeface="Courier New" panose="02070309020205020404" pitchFamily="49" charset="0"/>
-              </a:rPr>
-              <a:t>);</a:t>
-            </a:r>
-          </a:p>
-          <a:p>
-            <a:pPr marL="0" indent="0">
-              <a:buNone/>
-            </a:pPr>
-            <a:r>
-              <a:rPr lang="nl-NL" dirty="0">
-                <a:latin typeface="Courier New" panose="02070309020205020404" pitchFamily="49" charset="0"/>
-                <a:cs typeface="Courier New" panose="02070309020205020404" pitchFamily="49" charset="0"/>
-              </a:rPr>
-              <a:t>    }</a:t>
-            </a:r>
-          </a:p>
-        </p:txBody>
-      </p:sp>
-      <p:pic>
-        <p:nvPicPr>
-          <p:cNvPr id="7" name="Afbeelding 6">
-            <a:extLst>
-              <a:ext uri="{FF2B5EF4-FFF2-40B4-BE49-F238E27FC236}">
-                <a16:creationId xmlns:a16="http://schemas.microsoft.com/office/drawing/2014/main" id="{AA7C7541-79CF-D833-CCE4-536CAB93CA9A}"/>
-              </a:ext>
-            </a:extLst>
-          </p:cNvPr>
-          <p:cNvPicPr>
-            <a:picLocks noChangeAspect="1"/>
-          </p:cNvPicPr>
-          <p:nvPr/>
-        </p:nvPicPr>
-        <p:blipFill>
-          <a:blip r:embed="rId2"/>
-          <a:stretch>
-            <a:fillRect/>
-          </a:stretch>
-        </p:blipFill>
-        <p:spPr>
-          <a:xfrm>
-            <a:off x="7398784" y="5307249"/>
-            <a:ext cx="4534533" cy="1457528"/>
-          </a:xfrm>
-          <a:prstGeom prst="rect">
-            <a:avLst/>
-          </a:prstGeom>
-        </p:spPr>
-      </p:pic>
-    </p:spTree>
-    <p:extLst>
-      <p:ext uri="{BB962C8B-B14F-4D97-AF65-F5344CB8AC3E}">
-        <p14:creationId xmlns:p14="http://schemas.microsoft.com/office/powerpoint/2010/main" val="2545989669"/>
-      </p:ext>
-    </p:extLst>
-  </p:cSld>
-  <p:clrMapOvr>
-    <a:masterClrMapping/>
-  </p:clrMapOvr>
-</p:sld>
-</file>
-
-<file path=ppt/slides/slide9.xml><?xml version="1.0" encoding="utf-8"?>
+<file path=ppt/slides/slide7.xml><?xml version="1.0" encoding="utf-8"?>
 <p:sld xmlns:a="http://schemas.openxmlformats.org/drawingml/2006/main" xmlns:r="http://schemas.openxmlformats.org/officeDocument/2006/relationships" xmlns:p="http://schemas.openxmlformats.org/presentationml/2006/main">
   <p:cSld>
     <p:spTree>
@@ -7938,6 +6056,86 @@
     <p:extLst>
       <p:ext uri="{BB962C8B-B14F-4D97-AF65-F5344CB8AC3E}">
         <p14:creationId xmlns:p14="http://schemas.microsoft.com/office/powerpoint/2010/main" val="919530093"/>
+      </p:ext>
+    </p:extLst>
+  </p:cSld>
+  <p:clrMapOvr>
+    <a:masterClrMapping/>
+  </p:clrMapOvr>
+</p:sld>
+</file>
+
+<file path=ppt/slides/slide8.xml><?xml version="1.0" encoding="utf-8"?>
+<p:sld xmlns:a="http://schemas.openxmlformats.org/drawingml/2006/main" xmlns:r="http://schemas.openxmlformats.org/officeDocument/2006/relationships" xmlns:p="http://schemas.openxmlformats.org/presentationml/2006/main">
+  <p:cSld>
+    <p:spTree>
+      <p:nvGrpSpPr>
+        <p:cNvPr id="1" name=""/>
+        <p:cNvGrpSpPr/>
+        <p:nvPr/>
+      </p:nvGrpSpPr>
+      <p:grpSpPr>
+        <a:xfrm>
+          <a:off x="0" y="0"/>
+          <a:ext cx="0" cy="0"/>
+          <a:chOff x="0" y="0"/>
+          <a:chExt cx="0" cy="0"/>
+        </a:xfrm>
+      </p:grpSpPr>
+      <p:sp>
+        <p:nvSpPr>
+          <p:cNvPr id="2" name="Titel 1">
+            <a:extLst>
+              <a:ext uri="{FF2B5EF4-FFF2-40B4-BE49-F238E27FC236}">
+                <a16:creationId xmlns:a16="http://schemas.microsoft.com/office/drawing/2014/main" id="{FE45CA3E-C9D6-04E4-C92D-157A40F1CBB5}"/>
+              </a:ext>
+            </a:extLst>
+          </p:cNvPr>
+          <p:cNvSpPr>
+            <a:spLocks noGrp="1"/>
+          </p:cNvSpPr>
+          <p:nvPr>
+            <p:ph type="title"/>
+          </p:nvPr>
+        </p:nvSpPr>
+        <p:spPr/>
+        <p:txBody>
+          <a:bodyPr/>
+          <a:lstStyle/>
+          <a:p>
+            <a:endParaRPr lang="nl-NL"/>
+          </a:p>
+        </p:txBody>
+      </p:sp>
+      <p:sp>
+        <p:nvSpPr>
+          <p:cNvPr id="3" name="Tijdelijke aanduiding voor inhoud 2">
+            <a:extLst>
+              <a:ext uri="{FF2B5EF4-FFF2-40B4-BE49-F238E27FC236}">
+                <a16:creationId xmlns:a16="http://schemas.microsoft.com/office/drawing/2014/main" id="{662A7417-122E-94DF-F517-CEF372CF421F}"/>
+              </a:ext>
+            </a:extLst>
+          </p:cNvPr>
+          <p:cNvSpPr>
+            <a:spLocks noGrp="1"/>
+          </p:cNvSpPr>
+          <p:nvPr>
+            <p:ph idx="1"/>
+          </p:nvPr>
+        </p:nvSpPr>
+        <p:spPr/>
+        <p:txBody>
+          <a:bodyPr/>
+          <a:lstStyle/>
+          <a:p>
+            <a:endParaRPr lang="nl-NL"/>
+          </a:p>
+        </p:txBody>
+      </p:sp>
+    </p:spTree>
+    <p:extLst>
+      <p:ext uri="{BB962C8B-B14F-4D97-AF65-F5344CB8AC3E}">
+        <p14:creationId xmlns:p14="http://schemas.microsoft.com/office/powerpoint/2010/main" val="3861025813"/>
       </p:ext>
     </p:extLst>
   </p:cSld>
@@ -8263,11 +6461,12 @@
 </file>
 
 <file path=customXml/item1.xml><?xml version="1.0" encoding="utf-8"?>
-<p:properties xmlns:p="http://schemas.microsoft.com/office/2006/metadata/properties" xmlns:xsi="http://www.w3.org/2001/XMLSchema-instance" xmlns:pc="http://schemas.microsoft.com/office/infopath/2007/PartnerControls">
-  <documentManagement>
-    <_activity xmlns="0ea95f8c-d148-44ae-916f-e4fae07bb092" xsi:nil="true"/>
-  </documentManagement>
-</p:properties>
+<?mso-contentType ?>
+<FormTemplates xmlns="http://schemas.microsoft.com/sharepoint/v3/contenttype/forms">
+  <Display>DocumentLibraryForm</Display>
+  <Edit>DocumentLibraryForm</Edit>
+  <New>DocumentLibraryForm</New>
+</FormTemplates>
 </file>
 
 <file path=customXml/item2.xml><?xml version="1.0" encoding="utf-8"?>
@@ -8524,27 +6723,17 @@
 </file>
 
 <file path=customXml/item3.xml><?xml version="1.0" encoding="utf-8"?>
-<?mso-contentType ?>
-<FormTemplates xmlns="http://schemas.microsoft.com/sharepoint/v3/contenttype/forms">
-  <Display>DocumentLibraryForm</Display>
-  <Edit>DocumentLibraryForm</Edit>
-  <New>DocumentLibraryForm</New>
-</FormTemplates>
+<p:properties xmlns:p="http://schemas.microsoft.com/office/2006/metadata/properties" xmlns:xsi="http://www.w3.org/2001/XMLSchema-instance" xmlns:pc="http://schemas.microsoft.com/office/infopath/2007/PartnerControls">
+  <documentManagement>
+    <_activity xmlns="0ea95f8c-d148-44ae-916f-e4fae07bb092" xsi:nil="true"/>
+  </documentManagement>
+</p:properties>
 </file>
 
 <file path=customXml/itemProps1.xml><?xml version="1.0" encoding="utf-8"?>
-<ds:datastoreItem xmlns:ds="http://schemas.openxmlformats.org/officeDocument/2006/customXml" ds:itemID="{4AE02E84-4242-4C95-906B-10487FB4E1EE}">
+<ds:datastoreItem xmlns:ds="http://schemas.openxmlformats.org/officeDocument/2006/customXml" ds:itemID="{FE951165-B379-4FBD-9FD8-D14F0F4D64C9}">
   <ds:schemaRefs>
-    <ds:schemaRef ds:uri="http://purl.org/dc/elements/1.1/"/>
-    <ds:schemaRef ds:uri="http://purl.org/dc/dcmitype/"/>
-    <ds:schemaRef ds:uri="http://schemas.microsoft.com/office/2006/metadata/properties"/>
-    <ds:schemaRef ds:uri="http://schemas.microsoft.com/office/2006/documentManagement/types"/>
-    <ds:schemaRef ds:uri="07db6276-f26f-4be5-81e0-f9ee6746fca8"/>
-    <ds:schemaRef ds:uri="http://schemas.microsoft.com/office/infopath/2007/PartnerControls"/>
-    <ds:schemaRef ds:uri="http://schemas.openxmlformats.org/package/2006/metadata/core-properties"/>
-    <ds:schemaRef ds:uri="0ea95f8c-d148-44ae-916f-e4fae07bb092"/>
-    <ds:schemaRef ds:uri="http://www.w3.org/XML/1998/namespace"/>
-    <ds:schemaRef ds:uri="http://purl.org/dc/terms/"/>
+    <ds:schemaRef ds:uri="http://schemas.microsoft.com/sharepoint/v3/contenttype/forms"/>
   </ds:schemaRefs>
 </ds:datastoreItem>
 </file>
@@ -8569,9 +6758,18 @@
 </file>
 
 <file path=customXml/itemProps3.xml><?xml version="1.0" encoding="utf-8"?>
-<ds:datastoreItem xmlns:ds="http://schemas.openxmlformats.org/officeDocument/2006/customXml" ds:itemID="{FE951165-B379-4FBD-9FD8-D14F0F4D64C9}">
+<ds:datastoreItem xmlns:ds="http://schemas.openxmlformats.org/officeDocument/2006/customXml" ds:itemID="{4AE02E84-4242-4C95-906B-10487FB4E1EE}">
   <ds:schemaRefs>
-    <ds:schemaRef ds:uri="http://schemas.microsoft.com/sharepoint/v3/contenttype/forms"/>
+    <ds:schemaRef ds:uri="http://purl.org/dc/elements/1.1/"/>
+    <ds:schemaRef ds:uri="http://purl.org/dc/dcmitype/"/>
+    <ds:schemaRef ds:uri="http://schemas.microsoft.com/office/2006/metadata/properties"/>
+    <ds:schemaRef ds:uri="http://schemas.microsoft.com/office/2006/documentManagement/types"/>
+    <ds:schemaRef ds:uri="07db6276-f26f-4be5-81e0-f9ee6746fca8"/>
+    <ds:schemaRef ds:uri="http://schemas.microsoft.com/office/infopath/2007/PartnerControls"/>
+    <ds:schemaRef ds:uri="http://schemas.openxmlformats.org/package/2006/metadata/core-properties"/>
+    <ds:schemaRef ds:uri="0ea95f8c-d148-44ae-916f-e4fae07bb092"/>
+    <ds:schemaRef ds:uri="http://www.w3.org/XML/1998/namespace"/>
+    <ds:schemaRef ds:uri="http://purl.org/dc/terms/"/>
   </ds:schemaRefs>
 </ds:datastoreItem>
 </file>